--- a/exports/pptx/lessons/middle-module-06-moon-phases-tithi/day-07-eclipses.pptx
+++ b/exports/pptx/lessons/middle-module-06-moon-phases-tithi/day-07-eclipses.pptx
@@ -17,9 +17,19 @@
     <p:sldId id="265" r:id="rId11"/>
     <p:sldId id="266" r:id="rId12"/>
     <p:sldId id="267" r:id="rId13"/>
+    <p:sldId id="268" r:id="rId14"/>
+    <p:sldId id="269" r:id="rId15"/>
+    <p:sldId id="270" r:id="rId16"/>
+    <p:sldId id="271" r:id="rId17"/>
+    <p:sldId id="272" r:id="rId18"/>
+    <p:sldId id="273" r:id="rId19"/>
+    <p:sldId id="274" r:id="rId20"/>
+    <p:sldId id="275" r:id="rId21"/>
+    <p:sldId id="276" r:id="rId22"/>
+    <p:sldId id="277" r:id="rId23"/>
   </p:sldIdLst>
   <p:notesMasterIdLst>
-    <p:notesMasterId r:id="rId14"/>
+    <p:notesMasterId r:id="rId24"/>
   </p:notesMasterIdLst>
   <p:sldSz cx="9144000" cy="5143500"/>
   <p:notesSz cx="5143500" cy="9144000"/>
@@ -819,6 +829,622 @@
 </p:notes>
 </file>
 
+<file path=ppt/notesSlides/notesSlide13.xml><?xml version="1.0" encoding="utf-8"?>
+<p:notes xmlns:a="http://schemas.openxmlformats.org/drawingml/2006/main" xmlns:r="http://schemas.openxmlformats.org/officeDocument/2006/relationships" xmlns:p="http://schemas.openxmlformats.org/presentationml/2006/main">
+  <p:cSld>
+    <p:spTree>
+      <p:nvGrpSpPr>
+        <p:cNvPr id="1" name=""/>
+        <p:cNvGrpSpPr/>
+        <p:nvPr/>
+      </p:nvGrpSpPr>
+      <p:grpSpPr>
+        <a:xfrm>
+          <a:off x="0" y="0"/>
+          <a:ext cx="0" cy="0"/>
+          <a:chOff x="0" y="0"/>
+          <a:chExt cx="0" cy="0"/>
+        </a:xfrm>
+      </p:grpSpPr>
+      <p:sp>
+        <p:nvSpPr>
+          <p:cNvPr id="2" name="Slide Image Placeholder 1"/>
+          <p:cNvSpPr>
+            <a:spLocks noGrp="1" noRot="1" noChangeAspect="1"/>
+          </p:cNvSpPr>
+          <p:nvPr>
+            <p:ph type="sldImg"/>
+          </p:nvPr>
+        </p:nvSpPr>
+        <p:spPr/>
+      </p:sp>
+      <p:sp>
+        <p:nvSpPr>
+          <p:cNvPr id="3" name="Notes Placeholder 2"/>
+          <p:cNvSpPr>
+            <a:spLocks noGrp="1"/>
+          </p:cNvSpPr>
+          <p:nvPr>
+            <p:ph type="body" idx="1"/>
+          </p:nvPr>
+        </p:nvSpPr>
+        <p:spPr/>
+        <p:txBody>
+          <a:bodyPr/>
+          <a:lstStyle/>
+          <a:p>
+            <a:r>
+              <a:rPr lang="en-US" dirty="0"/>
+              <a:t/>
+            </a:r>
+            <a:endParaRPr lang="en-US" dirty="0"/>
+          </a:p>
+        </p:txBody>
+      </p:sp>
+      <p:sp>
+        <p:nvSpPr>
+          <p:cNvPr id="4" name="Slide Number Placeholder 3"/>
+          <p:cNvSpPr>
+            <a:spLocks noGrp="1"/>
+          </p:cNvSpPr>
+          <p:nvPr>
+            <p:ph type="sldNum" sz="quarter" idx="10"/>
+          </p:nvPr>
+        </p:nvSpPr>
+        <p:spPr/>
+        <p:txBody>
+          <a:bodyPr/>
+          <a:lstStyle/>
+          <a:p>
+            <a:fld id="{F7021451-1387-4CA6-816F-3879F97B5CBC}" type="slidenum">
+              <a:rPr lang="en-US"/>
+              <a:t>13</a:t>
+            </a:fld>
+            <a:endParaRPr lang="en-US"/>
+          </a:p>
+        </p:txBody>
+      </p:sp>
+    </p:spTree>
+    <p:extLst>
+      <p:ext uri="{BB962C8B-B14F-4D97-AF65-F5344CB8AC3E}">
+        <p14:creationId xmlns:p14="http://schemas.microsoft.com/office/powerpoint/2010/main" val="1024086991"/>
+      </p:ext>
+    </p:extLst>
+  </p:cSld>
+  <p:clrMapOvr>
+    <a:masterClrMapping/>
+  </p:clrMapOvr>
+</p:notes>
+</file>
+
+<file path=ppt/notesSlides/notesSlide14.xml><?xml version="1.0" encoding="utf-8"?>
+<p:notes xmlns:a="http://schemas.openxmlformats.org/drawingml/2006/main" xmlns:r="http://schemas.openxmlformats.org/officeDocument/2006/relationships" xmlns:p="http://schemas.openxmlformats.org/presentationml/2006/main">
+  <p:cSld>
+    <p:spTree>
+      <p:nvGrpSpPr>
+        <p:cNvPr id="1" name=""/>
+        <p:cNvGrpSpPr/>
+        <p:nvPr/>
+      </p:nvGrpSpPr>
+      <p:grpSpPr>
+        <a:xfrm>
+          <a:off x="0" y="0"/>
+          <a:ext cx="0" cy="0"/>
+          <a:chOff x="0" y="0"/>
+          <a:chExt cx="0" cy="0"/>
+        </a:xfrm>
+      </p:grpSpPr>
+      <p:sp>
+        <p:nvSpPr>
+          <p:cNvPr id="2" name="Slide Image Placeholder 1"/>
+          <p:cNvSpPr>
+            <a:spLocks noGrp="1" noRot="1" noChangeAspect="1"/>
+          </p:cNvSpPr>
+          <p:nvPr>
+            <p:ph type="sldImg"/>
+          </p:nvPr>
+        </p:nvSpPr>
+        <p:spPr/>
+      </p:sp>
+      <p:sp>
+        <p:nvSpPr>
+          <p:cNvPr id="3" name="Notes Placeholder 2"/>
+          <p:cNvSpPr>
+            <a:spLocks noGrp="1"/>
+          </p:cNvSpPr>
+          <p:nvPr>
+            <p:ph type="body" idx="1"/>
+          </p:nvPr>
+        </p:nvSpPr>
+        <p:spPr/>
+        <p:txBody>
+          <a:bodyPr/>
+          <a:lstStyle/>
+          <a:p>
+            <a:r>
+              <a:rPr lang="en-US" dirty="0"/>
+              <a:t/>
+            </a:r>
+            <a:endParaRPr lang="en-US" dirty="0"/>
+          </a:p>
+        </p:txBody>
+      </p:sp>
+      <p:sp>
+        <p:nvSpPr>
+          <p:cNvPr id="4" name="Slide Number Placeholder 3"/>
+          <p:cNvSpPr>
+            <a:spLocks noGrp="1"/>
+          </p:cNvSpPr>
+          <p:nvPr>
+            <p:ph type="sldNum" sz="quarter" idx="10"/>
+          </p:nvPr>
+        </p:nvSpPr>
+        <p:spPr/>
+        <p:txBody>
+          <a:bodyPr/>
+          <a:lstStyle/>
+          <a:p>
+            <a:fld id="{F7021451-1387-4CA6-816F-3879F97B5CBC}" type="slidenum">
+              <a:rPr lang="en-US"/>
+              <a:t>14</a:t>
+            </a:fld>
+            <a:endParaRPr lang="en-US"/>
+          </a:p>
+        </p:txBody>
+      </p:sp>
+    </p:spTree>
+    <p:extLst>
+      <p:ext uri="{BB962C8B-B14F-4D97-AF65-F5344CB8AC3E}">
+        <p14:creationId xmlns:p14="http://schemas.microsoft.com/office/powerpoint/2010/main" val="1024086991"/>
+      </p:ext>
+    </p:extLst>
+  </p:cSld>
+  <p:clrMapOvr>
+    <a:masterClrMapping/>
+  </p:clrMapOvr>
+</p:notes>
+</file>
+
+<file path=ppt/notesSlides/notesSlide15.xml><?xml version="1.0" encoding="utf-8"?>
+<p:notes xmlns:a="http://schemas.openxmlformats.org/drawingml/2006/main" xmlns:r="http://schemas.openxmlformats.org/officeDocument/2006/relationships" xmlns:p="http://schemas.openxmlformats.org/presentationml/2006/main">
+  <p:cSld>
+    <p:spTree>
+      <p:nvGrpSpPr>
+        <p:cNvPr id="1" name=""/>
+        <p:cNvGrpSpPr/>
+        <p:nvPr/>
+      </p:nvGrpSpPr>
+      <p:grpSpPr>
+        <a:xfrm>
+          <a:off x="0" y="0"/>
+          <a:ext cx="0" cy="0"/>
+          <a:chOff x="0" y="0"/>
+          <a:chExt cx="0" cy="0"/>
+        </a:xfrm>
+      </p:grpSpPr>
+      <p:sp>
+        <p:nvSpPr>
+          <p:cNvPr id="2" name="Slide Image Placeholder 1"/>
+          <p:cNvSpPr>
+            <a:spLocks noGrp="1" noRot="1" noChangeAspect="1"/>
+          </p:cNvSpPr>
+          <p:nvPr>
+            <p:ph type="sldImg"/>
+          </p:nvPr>
+        </p:nvSpPr>
+        <p:spPr/>
+      </p:sp>
+      <p:sp>
+        <p:nvSpPr>
+          <p:cNvPr id="3" name="Notes Placeholder 2"/>
+          <p:cNvSpPr>
+            <a:spLocks noGrp="1"/>
+          </p:cNvSpPr>
+          <p:nvPr>
+            <p:ph type="body" idx="1"/>
+          </p:nvPr>
+        </p:nvSpPr>
+        <p:spPr/>
+        <p:txBody>
+          <a:bodyPr/>
+          <a:lstStyle/>
+          <a:p>
+            <a:r>
+              <a:rPr lang="en-US" dirty="0"/>
+              <a:t/>
+            </a:r>
+            <a:endParaRPr lang="en-US" dirty="0"/>
+          </a:p>
+        </p:txBody>
+      </p:sp>
+      <p:sp>
+        <p:nvSpPr>
+          <p:cNvPr id="4" name="Slide Number Placeholder 3"/>
+          <p:cNvSpPr>
+            <a:spLocks noGrp="1"/>
+          </p:cNvSpPr>
+          <p:nvPr>
+            <p:ph type="sldNum" sz="quarter" idx="10"/>
+          </p:nvPr>
+        </p:nvSpPr>
+        <p:spPr/>
+        <p:txBody>
+          <a:bodyPr/>
+          <a:lstStyle/>
+          <a:p>
+            <a:fld id="{F7021451-1387-4CA6-816F-3879F97B5CBC}" type="slidenum">
+              <a:rPr lang="en-US"/>
+              <a:t>15</a:t>
+            </a:fld>
+            <a:endParaRPr lang="en-US"/>
+          </a:p>
+        </p:txBody>
+      </p:sp>
+    </p:spTree>
+    <p:extLst>
+      <p:ext uri="{BB962C8B-B14F-4D97-AF65-F5344CB8AC3E}">
+        <p14:creationId xmlns:p14="http://schemas.microsoft.com/office/powerpoint/2010/main" val="1024086991"/>
+      </p:ext>
+    </p:extLst>
+  </p:cSld>
+  <p:clrMapOvr>
+    <a:masterClrMapping/>
+  </p:clrMapOvr>
+</p:notes>
+</file>
+
+<file path=ppt/notesSlides/notesSlide16.xml><?xml version="1.0" encoding="utf-8"?>
+<p:notes xmlns:a="http://schemas.openxmlformats.org/drawingml/2006/main" xmlns:r="http://schemas.openxmlformats.org/officeDocument/2006/relationships" xmlns:p="http://schemas.openxmlformats.org/presentationml/2006/main">
+  <p:cSld>
+    <p:spTree>
+      <p:nvGrpSpPr>
+        <p:cNvPr id="1" name=""/>
+        <p:cNvGrpSpPr/>
+        <p:nvPr/>
+      </p:nvGrpSpPr>
+      <p:grpSpPr>
+        <a:xfrm>
+          <a:off x="0" y="0"/>
+          <a:ext cx="0" cy="0"/>
+          <a:chOff x="0" y="0"/>
+          <a:chExt cx="0" cy="0"/>
+        </a:xfrm>
+      </p:grpSpPr>
+      <p:sp>
+        <p:nvSpPr>
+          <p:cNvPr id="2" name="Slide Image Placeholder 1"/>
+          <p:cNvSpPr>
+            <a:spLocks noGrp="1" noRot="1" noChangeAspect="1"/>
+          </p:cNvSpPr>
+          <p:nvPr>
+            <p:ph type="sldImg"/>
+          </p:nvPr>
+        </p:nvSpPr>
+        <p:spPr/>
+      </p:sp>
+      <p:sp>
+        <p:nvSpPr>
+          <p:cNvPr id="3" name="Notes Placeholder 2"/>
+          <p:cNvSpPr>
+            <a:spLocks noGrp="1"/>
+          </p:cNvSpPr>
+          <p:nvPr>
+            <p:ph type="body" idx="1"/>
+          </p:nvPr>
+        </p:nvSpPr>
+        <p:spPr/>
+        <p:txBody>
+          <a:bodyPr/>
+          <a:lstStyle/>
+          <a:p>
+            <a:r>
+              <a:rPr lang="en-US" dirty="0"/>
+              <a:t/>
+            </a:r>
+            <a:endParaRPr lang="en-US" dirty="0"/>
+          </a:p>
+        </p:txBody>
+      </p:sp>
+      <p:sp>
+        <p:nvSpPr>
+          <p:cNvPr id="4" name="Slide Number Placeholder 3"/>
+          <p:cNvSpPr>
+            <a:spLocks noGrp="1"/>
+          </p:cNvSpPr>
+          <p:nvPr>
+            <p:ph type="sldNum" sz="quarter" idx="10"/>
+          </p:nvPr>
+        </p:nvSpPr>
+        <p:spPr/>
+        <p:txBody>
+          <a:bodyPr/>
+          <a:lstStyle/>
+          <a:p>
+            <a:fld id="{F7021451-1387-4CA6-816F-3879F97B5CBC}" type="slidenum">
+              <a:rPr lang="en-US"/>
+              <a:t>16</a:t>
+            </a:fld>
+            <a:endParaRPr lang="en-US"/>
+          </a:p>
+        </p:txBody>
+      </p:sp>
+    </p:spTree>
+    <p:extLst>
+      <p:ext uri="{BB962C8B-B14F-4D97-AF65-F5344CB8AC3E}">
+        <p14:creationId xmlns:p14="http://schemas.microsoft.com/office/powerpoint/2010/main" val="1024086991"/>
+      </p:ext>
+    </p:extLst>
+  </p:cSld>
+  <p:clrMapOvr>
+    <a:masterClrMapping/>
+  </p:clrMapOvr>
+</p:notes>
+</file>
+
+<file path=ppt/notesSlides/notesSlide17.xml><?xml version="1.0" encoding="utf-8"?>
+<p:notes xmlns:a="http://schemas.openxmlformats.org/drawingml/2006/main" xmlns:r="http://schemas.openxmlformats.org/officeDocument/2006/relationships" xmlns:p="http://schemas.openxmlformats.org/presentationml/2006/main">
+  <p:cSld>
+    <p:spTree>
+      <p:nvGrpSpPr>
+        <p:cNvPr id="1" name=""/>
+        <p:cNvGrpSpPr/>
+        <p:nvPr/>
+      </p:nvGrpSpPr>
+      <p:grpSpPr>
+        <a:xfrm>
+          <a:off x="0" y="0"/>
+          <a:ext cx="0" cy="0"/>
+          <a:chOff x="0" y="0"/>
+          <a:chExt cx="0" cy="0"/>
+        </a:xfrm>
+      </p:grpSpPr>
+      <p:sp>
+        <p:nvSpPr>
+          <p:cNvPr id="2" name="Slide Image Placeholder 1"/>
+          <p:cNvSpPr>
+            <a:spLocks noGrp="1" noRot="1" noChangeAspect="1"/>
+          </p:cNvSpPr>
+          <p:nvPr>
+            <p:ph type="sldImg"/>
+          </p:nvPr>
+        </p:nvSpPr>
+        <p:spPr/>
+      </p:sp>
+      <p:sp>
+        <p:nvSpPr>
+          <p:cNvPr id="3" name="Notes Placeholder 2"/>
+          <p:cNvSpPr>
+            <a:spLocks noGrp="1"/>
+          </p:cNvSpPr>
+          <p:nvPr>
+            <p:ph type="body" idx="1"/>
+          </p:nvPr>
+        </p:nvSpPr>
+        <p:spPr/>
+        <p:txBody>
+          <a:bodyPr/>
+          <a:lstStyle/>
+          <a:p>
+            <a:r>
+              <a:rPr lang="en-US" dirty="0"/>
+              <a:t/>
+            </a:r>
+            <a:endParaRPr lang="en-US" dirty="0"/>
+          </a:p>
+        </p:txBody>
+      </p:sp>
+      <p:sp>
+        <p:nvSpPr>
+          <p:cNvPr id="4" name="Slide Number Placeholder 3"/>
+          <p:cNvSpPr>
+            <a:spLocks noGrp="1"/>
+          </p:cNvSpPr>
+          <p:nvPr>
+            <p:ph type="sldNum" sz="quarter" idx="10"/>
+          </p:nvPr>
+        </p:nvSpPr>
+        <p:spPr/>
+        <p:txBody>
+          <a:bodyPr/>
+          <a:lstStyle/>
+          <a:p>
+            <a:fld id="{F7021451-1387-4CA6-816F-3879F97B5CBC}" type="slidenum">
+              <a:rPr lang="en-US"/>
+              <a:t>17</a:t>
+            </a:fld>
+            <a:endParaRPr lang="en-US"/>
+          </a:p>
+        </p:txBody>
+      </p:sp>
+    </p:spTree>
+    <p:extLst>
+      <p:ext uri="{BB962C8B-B14F-4D97-AF65-F5344CB8AC3E}">
+        <p14:creationId xmlns:p14="http://schemas.microsoft.com/office/powerpoint/2010/main" val="1024086991"/>
+      </p:ext>
+    </p:extLst>
+  </p:cSld>
+  <p:clrMapOvr>
+    <a:masterClrMapping/>
+  </p:clrMapOvr>
+</p:notes>
+</file>
+
+<file path=ppt/notesSlides/notesSlide18.xml><?xml version="1.0" encoding="utf-8"?>
+<p:notes xmlns:a="http://schemas.openxmlformats.org/drawingml/2006/main" xmlns:r="http://schemas.openxmlformats.org/officeDocument/2006/relationships" xmlns:p="http://schemas.openxmlformats.org/presentationml/2006/main">
+  <p:cSld>
+    <p:spTree>
+      <p:nvGrpSpPr>
+        <p:cNvPr id="1" name=""/>
+        <p:cNvGrpSpPr/>
+        <p:nvPr/>
+      </p:nvGrpSpPr>
+      <p:grpSpPr>
+        <a:xfrm>
+          <a:off x="0" y="0"/>
+          <a:ext cx="0" cy="0"/>
+          <a:chOff x="0" y="0"/>
+          <a:chExt cx="0" cy="0"/>
+        </a:xfrm>
+      </p:grpSpPr>
+      <p:sp>
+        <p:nvSpPr>
+          <p:cNvPr id="2" name="Slide Image Placeholder 1"/>
+          <p:cNvSpPr>
+            <a:spLocks noGrp="1" noRot="1" noChangeAspect="1"/>
+          </p:cNvSpPr>
+          <p:nvPr>
+            <p:ph type="sldImg"/>
+          </p:nvPr>
+        </p:nvSpPr>
+        <p:spPr/>
+      </p:sp>
+      <p:sp>
+        <p:nvSpPr>
+          <p:cNvPr id="3" name="Notes Placeholder 2"/>
+          <p:cNvSpPr>
+            <a:spLocks noGrp="1"/>
+          </p:cNvSpPr>
+          <p:nvPr>
+            <p:ph type="body" idx="1"/>
+          </p:nvPr>
+        </p:nvSpPr>
+        <p:spPr/>
+        <p:txBody>
+          <a:bodyPr/>
+          <a:lstStyle/>
+          <a:p>
+            <a:r>
+              <a:rPr lang="en-US" dirty="0"/>
+              <a:t/>
+            </a:r>
+            <a:endParaRPr lang="en-US" dirty="0"/>
+          </a:p>
+        </p:txBody>
+      </p:sp>
+      <p:sp>
+        <p:nvSpPr>
+          <p:cNvPr id="4" name="Slide Number Placeholder 3"/>
+          <p:cNvSpPr>
+            <a:spLocks noGrp="1"/>
+          </p:cNvSpPr>
+          <p:nvPr>
+            <p:ph type="sldNum" sz="quarter" idx="10"/>
+          </p:nvPr>
+        </p:nvSpPr>
+        <p:spPr/>
+        <p:txBody>
+          <a:bodyPr/>
+          <a:lstStyle/>
+          <a:p>
+            <a:fld id="{F7021451-1387-4CA6-816F-3879F97B5CBC}" type="slidenum">
+              <a:rPr lang="en-US"/>
+              <a:t>18</a:t>
+            </a:fld>
+            <a:endParaRPr lang="en-US"/>
+          </a:p>
+        </p:txBody>
+      </p:sp>
+    </p:spTree>
+    <p:extLst>
+      <p:ext uri="{BB962C8B-B14F-4D97-AF65-F5344CB8AC3E}">
+        <p14:creationId xmlns:p14="http://schemas.microsoft.com/office/powerpoint/2010/main" val="1024086991"/>
+      </p:ext>
+    </p:extLst>
+  </p:cSld>
+  <p:clrMapOvr>
+    <a:masterClrMapping/>
+  </p:clrMapOvr>
+</p:notes>
+</file>
+
+<file path=ppt/notesSlides/notesSlide19.xml><?xml version="1.0" encoding="utf-8"?>
+<p:notes xmlns:a="http://schemas.openxmlformats.org/drawingml/2006/main" xmlns:r="http://schemas.openxmlformats.org/officeDocument/2006/relationships" xmlns:p="http://schemas.openxmlformats.org/presentationml/2006/main">
+  <p:cSld>
+    <p:spTree>
+      <p:nvGrpSpPr>
+        <p:cNvPr id="1" name=""/>
+        <p:cNvGrpSpPr/>
+        <p:nvPr/>
+      </p:nvGrpSpPr>
+      <p:grpSpPr>
+        <a:xfrm>
+          <a:off x="0" y="0"/>
+          <a:ext cx="0" cy="0"/>
+          <a:chOff x="0" y="0"/>
+          <a:chExt cx="0" cy="0"/>
+        </a:xfrm>
+      </p:grpSpPr>
+      <p:sp>
+        <p:nvSpPr>
+          <p:cNvPr id="2" name="Slide Image Placeholder 1"/>
+          <p:cNvSpPr>
+            <a:spLocks noGrp="1" noRot="1" noChangeAspect="1"/>
+          </p:cNvSpPr>
+          <p:nvPr>
+            <p:ph type="sldImg"/>
+          </p:nvPr>
+        </p:nvSpPr>
+        <p:spPr/>
+      </p:sp>
+      <p:sp>
+        <p:nvSpPr>
+          <p:cNvPr id="3" name="Notes Placeholder 2"/>
+          <p:cNvSpPr>
+            <a:spLocks noGrp="1"/>
+          </p:cNvSpPr>
+          <p:nvPr>
+            <p:ph type="body" idx="1"/>
+          </p:nvPr>
+        </p:nvSpPr>
+        <p:spPr/>
+        <p:txBody>
+          <a:bodyPr/>
+          <a:lstStyle/>
+          <a:p>
+            <a:r>
+              <a:rPr lang="en-US" dirty="0"/>
+              <a:t/>
+            </a:r>
+            <a:endParaRPr lang="en-US" dirty="0"/>
+          </a:p>
+        </p:txBody>
+      </p:sp>
+      <p:sp>
+        <p:nvSpPr>
+          <p:cNvPr id="4" name="Slide Number Placeholder 3"/>
+          <p:cNvSpPr>
+            <a:spLocks noGrp="1"/>
+          </p:cNvSpPr>
+          <p:nvPr>
+            <p:ph type="sldNum" sz="quarter" idx="10"/>
+          </p:nvPr>
+        </p:nvSpPr>
+        <p:spPr/>
+        <p:txBody>
+          <a:bodyPr/>
+          <a:lstStyle/>
+          <a:p>
+            <a:fld id="{F7021451-1387-4CA6-816F-3879F97B5CBC}" type="slidenum">
+              <a:rPr lang="en-US"/>
+              <a:t>19</a:t>
+            </a:fld>
+            <a:endParaRPr lang="en-US"/>
+          </a:p>
+        </p:txBody>
+      </p:sp>
+    </p:spTree>
+    <p:extLst>
+      <p:ext uri="{BB962C8B-B14F-4D97-AF65-F5344CB8AC3E}">
+        <p14:creationId xmlns:p14="http://schemas.microsoft.com/office/powerpoint/2010/main" val="1024086991"/>
+      </p:ext>
+    </p:extLst>
+  </p:cSld>
+  <p:clrMapOvr>
+    <a:masterClrMapping/>
+  </p:clrMapOvr>
+</p:notes>
+</file>
+
 <file path=ppt/notesSlides/notesSlide2.xml><?xml version="1.0" encoding="utf-8"?>
 <p:notes xmlns:a="http://schemas.openxmlformats.org/drawingml/2006/main" xmlns:r="http://schemas.openxmlformats.org/officeDocument/2006/relationships" xmlns:p="http://schemas.openxmlformats.org/presentationml/2006/main">
   <p:cSld>
@@ -889,6 +1515,270 @@
             <a:fld id="{F7021451-1387-4CA6-816F-3879F97B5CBC}" type="slidenum">
               <a:rPr lang="en-US"/>
               <a:t>2</a:t>
+            </a:fld>
+            <a:endParaRPr lang="en-US"/>
+          </a:p>
+        </p:txBody>
+      </p:sp>
+    </p:spTree>
+    <p:extLst>
+      <p:ext uri="{BB962C8B-B14F-4D97-AF65-F5344CB8AC3E}">
+        <p14:creationId xmlns:p14="http://schemas.microsoft.com/office/powerpoint/2010/main" val="1024086991"/>
+      </p:ext>
+    </p:extLst>
+  </p:cSld>
+  <p:clrMapOvr>
+    <a:masterClrMapping/>
+  </p:clrMapOvr>
+</p:notes>
+</file>
+
+<file path=ppt/notesSlides/notesSlide20.xml><?xml version="1.0" encoding="utf-8"?>
+<p:notes xmlns:a="http://schemas.openxmlformats.org/drawingml/2006/main" xmlns:r="http://schemas.openxmlformats.org/officeDocument/2006/relationships" xmlns:p="http://schemas.openxmlformats.org/presentationml/2006/main">
+  <p:cSld>
+    <p:spTree>
+      <p:nvGrpSpPr>
+        <p:cNvPr id="1" name=""/>
+        <p:cNvGrpSpPr/>
+        <p:nvPr/>
+      </p:nvGrpSpPr>
+      <p:grpSpPr>
+        <a:xfrm>
+          <a:off x="0" y="0"/>
+          <a:ext cx="0" cy="0"/>
+          <a:chOff x="0" y="0"/>
+          <a:chExt cx="0" cy="0"/>
+        </a:xfrm>
+      </p:grpSpPr>
+      <p:sp>
+        <p:nvSpPr>
+          <p:cNvPr id="2" name="Slide Image Placeholder 1"/>
+          <p:cNvSpPr>
+            <a:spLocks noGrp="1" noRot="1" noChangeAspect="1"/>
+          </p:cNvSpPr>
+          <p:nvPr>
+            <p:ph type="sldImg"/>
+          </p:nvPr>
+        </p:nvSpPr>
+        <p:spPr/>
+      </p:sp>
+      <p:sp>
+        <p:nvSpPr>
+          <p:cNvPr id="3" name="Notes Placeholder 2"/>
+          <p:cNvSpPr>
+            <a:spLocks noGrp="1"/>
+          </p:cNvSpPr>
+          <p:nvPr>
+            <p:ph type="body" idx="1"/>
+          </p:nvPr>
+        </p:nvSpPr>
+        <p:spPr/>
+        <p:txBody>
+          <a:bodyPr/>
+          <a:lstStyle/>
+          <a:p>
+            <a:r>
+              <a:rPr lang="en-US" dirty="0"/>
+              <a:t/>
+            </a:r>
+            <a:endParaRPr lang="en-US" dirty="0"/>
+          </a:p>
+        </p:txBody>
+      </p:sp>
+      <p:sp>
+        <p:nvSpPr>
+          <p:cNvPr id="4" name="Slide Number Placeholder 3"/>
+          <p:cNvSpPr>
+            <a:spLocks noGrp="1"/>
+          </p:cNvSpPr>
+          <p:nvPr>
+            <p:ph type="sldNum" sz="quarter" idx="10"/>
+          </p:nvPr>
+        </p:nvSpPr>
+        <p:spPr/>
+        <p:txBody>
+          <a:bodyPr/>
+          <a:lstStyle/>
+          <a:p>
+            <a:fld id="{F7021451-1387-4CA6-816F-3879F97B5CBC}" type="slidenum">
+              <a:rPr lang="en-US"/>
+              <a:t>20</a:t>
+            </a:fld>
+            <a:endParaRPr lang="en-US"/>
+          </a:p>
+        </p:txBody>
+      </p:sp>
+    </p:spTree>
+    <p:extLst>
+      <p:ext uri="{BB962C8B-B14F-4D97-AF65-F5344CB8AC3E}">
+        <p14:creationId xmlns:p14="http://schemas.microsoft.com/office/powerpoint/2010/main" val="1024086991"/>
+      </p:ext>
+    </p:extLst>
+  </p:cSld>
+  <p:clrMapOvr>
+    <a:masterClrMapping/>
+  </p:clrMapOvr>
+</p:notes>
+</file>
+
+<file path=ppt/notesSlides/notesSlide21.xml><?xml version="1.0" encoding="utf-8"?>
+<p:notes xmlns:a="http://schemas.openxmlformats.org/drawingml/2006/main" xmlns:r="http://schemas.openxmlformats.org/officeDocument/2006/relationships" xmlns:p="http://schemas.openxmlformats.org/presentationml/2006/main">
+  <p:cSld>
+    <p:spTree>
+      <p:nvGrpSpPr>
+        <p:cNvPr id="1" name=""/>
+        <p:cNvGrpSpPr/>
+        <p:nvPr/>
+      </p:nvGrpSpPr>
+      <p:grpSpPr>
+        <a:xfrm>
+          <a:off x="0" y="0"/>
+          <a:ext cx="0" cy="0"/>
+          <a:chOff x="0" y="0"/>
+          <a:chExt cx="0" cy="0"/>
+        </a:xfrm>
+      </p:grpSpPr>
+      <p:sp>
+        <p:nvSpPr>
+          <p:cNvPr id="2" name="Slide Image Placeholder 1"/>
+          <p:cNvSpPr>
+            <a:spLocks noGrp="1" noRot="1" noChangeAspect="1"/>
+          </p:cNvSpPr>
+          <p:nvPr>
+            <p:ph type="sldImg"/>
+          </p:nvPr>
+        </p:nvSpPr>
+        <p:spPr/>
+      </p:sp>
+      <p:sp>
+        <p:nvSpPr>
+          <p:cNvPr id="3" name="Notes Placeholder 2"/>
+          <p:cNvSpPr>
+            <a:spLocks noGrp="1"/>
+          </p:cNvSpPr>
+          <p:nvPr>
+            <p:ph type="body" idx="1"/>
+          </p:nvPr>
+        </p:nvSpPr>
+        <p:spPr/>
+        <p:txBody>
+          <a:bodyPr/>
+          <a:lstStyle/>
+          <a:p>
+            <a:r>
+              <a:rPr lang="en-US" dirty="0"/>
+              <a:t/>
+            </a:r>
+            <a:endParaRPr lang="en-US" dirty="0"/>
+          </a:p>
+        </p:txBody>
+      </p:sp>
+      <p:sp>
+        <p:nvSpPr>
+          <p:cNvPr id="4" name="Slide Number Placeholder 3"/>
+          <p:cNvSpPr>
+            <a:spLocks noGrp="1"/>
+          </p:cNvSpPr>
+          <p:nvPr>
+            <p:ph type="sldNum" sz="quarter" idx="10"/>
+          </p:nvPr>
+        </p:nvSpPr>
+        <p:spPr/>
+        <p:txBody>
+          <a:bodyPr/>
+          <a:lstStyle/>
+          <a:p>
+            <a:fld id="{F7021451-1387-4CA6-816F-3879F97B5CBC}" type="slidenum">
+              <a:rPr lang="en-US"/>
+              <a:t>21</a:t>
+            </a:fld>
+            <a:endParaRPr lang="en-US"/>
+          </a:p>
+        </p:txBody>
+      </p:sp>
+    </p:spTree>
+    <p:extLst>
+      <p:ext uri="{BB962C8B-B14F-4D97-AF65-F5344CB8AC3E}">
+        <p14:creationId xmlns:p14="http://schemas.microsoft.com/office/powerpoint/2010/main" val="1024086991"/>
+      </p:ext>
+    </p:extLst>
+  </p:cSld>
+  <p:clrMapOvr>
+    <a:masterClrMapping/>
+  </p:clrMapOvr>
+</p:notes>
+</file>
+
+<file path=ppt/notesSlides/notesSlide22.xml><?xml version="1.0" encoding="utf-8"?>
+<p:notes xmlns:a="http://schemas.openxmlformats.org/drawingml/2006/main" xmlns:r="http://schemas.openxmlformats.org/officeDocument/2006/relationships" xmlns:p="http://schemas.openxmlformats.org/presentationml/2006/main">
+  <p:cSld>
+    <p:spTree>
+      <p:nvGrpSpPr>
+        <p:cNvPr id="1" name=""/>
+        <p:cNvGrpSpPr/>
+        <p:nvPr/>
+      </p:nvGrpSpPr>
+      <p:grpSpPr>
+        <a:xfrm>
+          <a:off x="0" y="0"/>
+          <a:ext cx="0" cy="0"/>
+          <a:chOff x="0" y="0"/>
+          <a:chExt cx="0" cy="0"/>
+        </a:xfrm>
+      </p:grpSpPr>
+      <p:sp>
+        <p:nvSpPr>
+          <p:cNvPr id="2" name="Slide Image Placeholder 1"/>
+          <p:cNvSpPr>
+            <a:spLocks noGrp="1" noRot="1" noChangeAspect="1"/>
+          </p:cNvSpPr>
+          <p:nvPr>
+            <p:ph type="sldImg"/>
+          </p:nvPr>
+        </p:nvSpPr>
+        <p:spPr/>
+      </p:sp>
+      <p:sp>
+        <p:nvSpPr>
+          <p:cNvPr id="3" name="Notes Placeholder 2"/>
+          <p:cNvSpPr>
+            <a:spLocks noGrp="1"/>
+          </p:cNvSpPr>
+          <p:nvPr>
+            <p:ph type="body" idx="1"/>
+          </p:nvPr>
+        </p:nvSpPr>
+        <p:spPr/>
+        <p:txBody>
+          <a:bodyPr/>
+          <a:lstStyle/>
+          <a:p>
+            <a:r>
+              <a:rPr lang="en-US" dirty="0"/>
+              <a:t/>
+            </a:r>
+            <a:endParaRPr lang="en-US" dirty="0"/>
+          </a:p>
+        </p:txBody>
+      </p:sp>
+      <p:sp>
+        <p:nvSpPr>
+          <p:cNvPr id="4" name="Slide Number Placeholder 3"/>
+          <p:cNvSpPr>
+            <a:spLocks noGrp="1"/>
+          </p:cNvSpPr>
+          <p:nvPr>
+            <p:ph type="sldNum" sz="quarter" idx="10"/>
+          </p:nvPr>
+        </p:nvSpPr>
+        <p:spPr/>
+        <p:txBody>
+          <a:bodyPr/>
+          <a:lstStyle/>
+          <a:p>
+            <a:fld id="{F7021451-1387-4CA6-816F-3879F97B5CBC}" type="slidenum">
+              <a:rPr lang="en-US"/>
+              <a:t>22</a:t>
             </a:fld>
             <a:endParaRPr lang="en-US"/>
           </a:p>
@@ -2100,194 +2990,6 @@
         </p:nvSpPr>
         <p:spPr>
           <a:xfrm>
-            <a:off x="406301" y="1223963"/>
-            <a:ext cx="8498026" cy="274290"/>
-          </a:xfrm>
-          <a:prstGeom prst="rect">
-            <a:avLst/>
-          </a:prstGeom>
-          <a:noFill/>
-          <a:ln/>
-        </p:spPr>
-        <p:txBody>
-          <a:bodyPr wrap="square" lIns="0" tIns="0" rIns="0" bIns="0" rtlCol="0" anchor="t"/>
-          <a:lstStyle/>
-          <a:p>
-            <a:pPr algn="l" indent="0" marL="0">
-              <a:lnSpc>
-                <a:spcPts val="2160"/>
-              </a:lnSpc>
-              <a:spcBef>
-                <a:spcPts val="600"/>
-              </a:spcBef>
-              <a:spcAft>
-                <a:spcPts val="800"/>
-              </a:spcAft>
-              <a:buNone/>
-            </a:pPr>
-            <a:r>
-              <a:rPr lang="en-US" sz="1800" b="1" dirty="0">
-                <a:solidFill>
-                  <a:srgbClr val="FE4447"/>
-                </a:solidFill>
-                <a:latin typeface="Georgia" pitchFamily="34" charset="0"/>
-                <a:ea typeface="Georgia" pitchFamily="34" charset="-122"/>
-                <a:cs typeface="Georgia" pitchFamily="34" charset="-120"/>
-              </a:rPr>
-              <a:t>Learning objective</a:t>
-            </a:r>
-            <a:endParaRPr lang="en-US" sz="1800" dirty="0"/>
-          </a:p>
-        </p:txBody>
-      </p:sp>
-      <p:sp>
-        <p:nvSpPr>
-          <p:cNvPr id="6" name="Text 4"/>
-          <p:cNvSpPr/>
-          <p:nvPr/>
-        </p:nvSpPr>
-        <p:spPr>
-          <a:xfrm>
-            <a:off x="406301" y="1637854"/>
-            <a:ext cx="8498026" cy="426541"/>
-          </a:xfrm>
-          <a:prstGeom prst="rect">
-            <a:avLst/>
-          </a:prstGeom>
-          <a:noFill/>
-          <a:ln/>
-        </p:spPr>
-        <p:txBody>
-          <a:bodyPr wrap="square" lIns="0" tIns="0" rIns="0" bIns="0" rtlCol="0" anchor="t"/>
-          <a:lstStyle/>
-          <a:p>
-            <a:pPr algn="l" indent="0" marL="0">
-              <a:lnSpc>
-                <a:spcPts val="1680"/>
-              </a:lnSpc>
-              <a:spcBef>
-                <a:spcPts val="300"/>
-              </a:spcBef>
-              <a:spcAft>
-                <a:spcPts val="300"/>
-              </a:spcAft>
-              <a:buNone/>
-            </a:pPr>
-            <a:r>
-              <a:rPr lang="en-US" sz="1200" dirty="0">
-                <a:solidFill>
-                  <a:srgbClr val="1C2833"/>
-                </a:solidFill>
-                <a:latin typeface="Arial" pitchFamily="34" charset="0"/>
-                <a:ea typeface="Arial" pitchFamily="34" charset="-122"/>
-                <a:cs typeface="Arial" pitchFamily="34" charset="-120"/>
-              </a:rPr>
-              <a:t>Students will explain (with a diagram) why solar eclipses occur on </a:t>
-            </a:r>
-            <a:pPr algn="l" indent="0" marL="0">
-              <a:lnSpc>
-                <a:spcPts val="1680"/>
-              </a:lnSpc>
-              <a:spcBef>
-                <a:spcPts val="300"/>
-              </a:spcBef>
-              <a:spcAft>
-                <a:spcPts val="300"/>
-              </a:spcAft>
-              <a:buNone/>
-            </a:pPr>
-            <a:r>
-              <a:rPr lang="en-US" sz="1200" i="1" dirty="0">
-                <a:solidFill>
-                  <a:srgbClr val="1C2833"/>
-                </a:solidFill>
-                <a:latin typeface="Arial" pitchFamily="34" charset="0"/>
-                <a:ea typeface="Arial" pitchFamily="34" charset="-122"/>
-                <a:cs typeface="Arial" pitchFamily="34" charset="-120"/>
-              </a:rPr>
-              <a:t>amāvasyā</a:t>
-            </a:r>
-            <a:pPr algn="l" indent="0" marL="0">
-              <a:lnSpc>
-                <a:spcPts val="1680"/>
-              </a:lnSpc>
-              <a:spcBef>
-                <a:spcPts val="300"/>
-              </a:spcBef>
-              <a:spcAft>
-                <a:spcPts val="300"/>
-              </a:spcAft>
-              <a:buNone/>
-            </a:pPr>
-            <a:r>
-              <a:rPr lang="en-US" sz="1200" dirty="0">
-                <a:solidFill>
-                  <a:srgbClr val="1C2833"/>
-                </a:solidFill>
-                <a:latin typeface="Arial" pitchFamily="34" charset="0"/>
-                <a:ea typeface="Arial" pitchFamily="34" charset="-122"/>
-                <a:cs typeface="Arial" pitchFamily="34" charset="-120"/>
-              </a:rPr>
-              <a:t> and lunar eclipses on </a:t>
-            </a:r>
-            <a:pPr algn="l" indent="0" marL="0">
-              <a:lnSpc>
-                <a:spcPts val="1680"/>
-              </a:lnSpc>
-              <a:spcBef>
-                <a:spcPts val="300"/>
-              </a:spcBef>
-              <a:spcAft>
-                <a:spcPts val="300"/>
-              </a:spcAft>
-              <a:buNone/>
-            </a:pPr>
-            <a:r>
-              <a:rPr lang="en-US" sz="1200" i="1" dirty="0">
-                <a:solidFill>
-                  <a:srgbClr val="1C2833"/>
-                </a:solidFill>
-                <a:latin typeface="Arial" pitchFamily="34" charset="0"/>
-                <a:ea typeface="Arial" pitchFamily="34" charset="-122"/>
-                <a:cs typeface="Arial" pitchFamily="34" charset="-120"/>
-              </a:rPr>
-              <a:t>pūrṇimā</a:t>
-            </a:r>
-            <a:pPr algn="l" indent="0" marL="0">
-              <a:lnSpc>
-                <a:spcPts val="1680"/>
-              </a:lnSpc>
-              <a:spcBef>
-                <a:spcPts val="300"/>
-              </a:spcBef>
-              <a:spcAft>
-                <a:spcPts val="300"/>
-              </a:spcAft>
-              <a:buNone/>
-            </a:pPr>
-            <a:r>
-              <a:rPr lang="en-US" sz="1200" dirty="0">
-                <a:solidFill>
-                  <a:srgbClr val="1C2833"/>
-                </a:solidFill>
-                <a:latin typeface="Arial" pitchFamily="34" charset="0"/>
-                <a:ea typeface="Arial" pitchFamily="34" charset="-122"/>
-                <a:cs typeface="Arial" pitchFamily="34" charset="-120"/>
-              </a:rPr>
-              <a:t>, why eclipses do not happen every month, and what the safe ways to view a solar eclipse are.</a:t>
-            </a:r>
-            <a:endParaRPr lang="en-US" sz="1200" dirty="0"/>
-          </a:p>
-        </p:txBody>
-      </p:sp>
-      <p:sp>
-        <p:nvSpPr>
-          <p:cNvPr id="7" name="Text 5"/>
-          <p:cNvSpPr/>
-          <p:nvPr/>
-        </p:nvSpPr>
-        <p:spPr>
-          <a:xfrm>
             <a:off x="406301" y="4434929"/>
             <a:ext cx="8498026" cy="213271"/>
           </a:xfrm>
@@ -2432,7 +3134,7 @@
                 <a:ea typeface="Georgia" pitchFamily="34" charset="-122"/>
                 <a:cs typeface="Georgia" pitchFamily="34" charset="-120"/>
               </a:rPr>
-              <a:t>Differentiation</a:t>
+              <a:t>Core (25 min) (cont.)</a:t>
             </a:r>
             <a:endParaRPr lang="en-US" sz="1800" dirty="0"/>
           </a:p>
@@ -2446,8 +3148,8 @@
         </p:nvSpPr>
         <p:spPr>
           <a:xfrm>
-            <a:off x="634901" y="883593"/>
-            <a:ext cx="8102798" cy="1142702"/>
+            <a:off x="406301" y="870942"/>
+            <a:ext cx="8498026" cy="426541"/>
           </a:xfrm>
           <a:prstGeom prst="rect">
             <a:avLst/>
@@ -2459,15 +3161,88 @@
           <a:bodyPr wrap="square" lIns="0" tIns="0" rIns="0" bIns="0" rtlCol="0" anchor="t"/>
           <a:lstStyle/>
           <a:p>
-            <a:pPr algn="l" marL="342900" indent="-342900">
-              <a:lnSpc>
-                <a:spcPts val="1620"/>
-              </a:lnSpc>
-              <a:spcAft>
-                <a:spcPts val="300"/>
-              </a:spcAft>
-              <a:buSzPct val="100000"/>
-              <a:buChar char="•"/>
+            <a:pPr algn="l" indent="0" marL="0">
+              <a:lnSpc>
+                <a:spcPts val="1680"/>
+              </a:lnSpc>
+              <a:spcBef>
+                <a:spcPts val="300"/>
+              </a:spcBef>
+              <a:spcAft>
+                <a:spcPts val="300"/>
+              </a:spcAft>
+              <a:buNone/>
+            </a:pPr>
+            <a:r>
+              <a:rPr lang="en-US" sz="1200" i="1" dirty="0">
+                <a:solidFill>
+                  <a:srgbClr val="1C2833"/>
+                </a:solidFill>
+                <a:latin typeface="Arial" pitchFamily="34" charset="0"/>
+                <a:ea typeface="Arial" pitchFamily="34" charset="-122"/>
+                <a:cs typeface="Arial" pitchFamily="34" charset="-120"/>
+              </a:rPr>
+              <a:t>"Every month has an amāvasyā and a pūrṇimā. If geometry were the only thing, we'd have a solar eclipse every new moon and a lunar eclipse every full moon. Clearly we don't."</a:t>
+            </a:r>
+            <a:endParaRPr lang="en-US" sz="1200" dirty="0"/>
+          </a:p>
+        </p:txBody>
+      </p:sp>
+      <p:sp>
+        <p:nvSpPr>
+          <p:cNvPr id="5" name="Text 3"/>
+          <p:cNvSpPr/>
+          <p:nvPr/>
+        </p:nvSpPr>
+        <p:spPr>
+          <a:xfrm>
+            <a:off x="406301" y="1373684"/>
+            <a:ext cx="8498026" cy="426541"/>
+          </a:xfrm>
+          <a:prstGeom prst="rect">
+            <a:avLst/>
+          </a:prstGeom>
+          <a:noFill/>
+          <a:ln/>
+        </p:spPr>
+        <p:txBody>
+          <a:bodyPr wrap="square" lIns="0" tIns="0" rIns="0" bIns="0" rtlCol="0" anchor="t"/>
+          <a:lstStyle/>
+          <a:p>
+            <a:pPr algn="l" indent="0" marL="0">
+              <a:lnSpc>
+                <a:spcPts val="1680"/>
+              </a:lnSpc>
+              <a:spcBef>
+                <a:spcPts val="300"/>
+              </a:spcBef>
+              <a:spcAft>
+                <a:spcPts val="300"/>
+              </a:spcAft>
+              <a:buNone/>
+            </a:pPr>
+            <a:r>
+              <a:rPr lang="en-US" sz="1200" dirty="0">
+                <a:solidFill>
+                  <a:srgbClr val="1C2833"/>
+                </a:solidFill>
+                <a:latin typeface="Arial" pitchFamily="34" charset="0"/>
+                <a:ea typeface="Arial" pitchFamily="34" charset="-122"/>
+                <a:cs typeface="Arial" pitchFamily="34" charset="-120"/>
+              </a:rPr>
+              <a:t>The reason: </a:t>
+            </a:r>
+            <a:pPr algn="l" indent="0" marL="0">
+              <a:lnSpc>
+                <a:spcPts val="1680"/>
+              </a:lnSpc>
+              <a:spcBef>
+                <a:spcPts val="300"/>
+              </a:spcBef>
+              <a:spcAft>
+                <a:spcPts val="300"/>
+              </a:spcAft>
+              <a:buNone/>
             </a:pPr>
             <a:r>
               <a:rPr lang="en-US" sz="1200" b="1" dirty="0">
@@ -2478,12 +3253,15 @@
                 <a:ea typeface="Arial" pitchFamily="34" charset="-122"/>
                 <a:cs typeface="Arial" pitchFamily="34" charset="-120"/>
               </a:rPr>
-              <a:t>One tier up:</a:t>
-            </a:r>
-            <a:pPr algn="l" indent="0" marL="0">
-              <a:lnSpc>
-                <a:spcPts val="1620"/>
-              </a:lnSpc>
+              <a:t>the Moon's orbit is tilted by ~5° relative to Earth's orbit around the Sun.</a:t>
+            </a:r>
+            <a:pPr algn="l" indent="0" marL="0">
+              <a:lnSpc>
+                <a:spcPts val="1680"/>
+              </a:lnSpc>
+              <a:spcBef>
+                <a:spcPts val="300"/>
+              </a:spcBef>
               <a:spcAft>
                 <a:spcPts val="300"/>
               </a:spcAft>
@@ -2498,99 +3276,15 @@
                 <a:ea typeface="Arial" pitchFamily="34" charset="-122"/>
                 <a:cs typeface="Arial" pitchFamily="34" charset="-120"/>
               </a:rPr>
-              <a:t> Find the dates of the nodes for this year. (The two nodes drift backward through the ecliptic — they complete one full circuit in ~18.6 years. This is the </a:t>
-            </a:r>
-            <a:pPr algn="l" indent="0" marL="0">
-              <a:lnSpc>
-                <a:spcPts val="1620"/>
-              </a:lnSpc>
-              <a:spcAft>
-                <a:spcPts val="300"/>
-              </a:spcAft>
-              <a:buNone/>
-            </a:pPr>
-            <a:r>
-              <a:rPr lang="en-US" sz="1200" i="1" dirty="0">
-                <a:solidFill>
-                  <a:srgbClr val="1C2833"/>
-                </a:solidFill>
-                <a:latin typeface="Arial" pitchFamily="34" charset="0"/>
-                <a:ea typeface="Arial" pitchFamily="34" charset="-122"/>
-                <a:cs typeface="Arial" pitchFamily="34" charset="-120"/>
-              </a:rPr>
-              <a:t>Saros cycle</a:t>
-            </a:r>
-            <a:pPr algn="l" indent="0" marL="0">
-              <a:lnSpc>
-                <a:spcPts val="1620"/>
-              </a:lnSpc>
-              <a:spcAft>
-                <a:spcPts val="300"/>
-              </a:spcAft>
-              <a:buNone/>
-            </a:pPr>
-            <a:r>
-              <a:rPr lang="en-US" sz="1200" dirty="0">
-                <a:solidFill>
-                  <a:srgbClr val="1C2833"/>
-                </a:solidFill>
-                <a:latin typeface="Arial" pitchFamily="34" charset="0"/>
-                <a:ea typeface="Arial" pitchFamily="34" charset="-122"/>
-                <a:cs typeface="Arial" pitchFamily="34" charset="-120"/>
-              </a:rPr>
-              <a:t>'s underlying mechanism.) Why does this give us "eclipse seasons" twice a year?</a:t>
+              <a:t> Show this with the string and the two balls — Earth's orbit is one flat ring; the Moon's orbit is a smaller ring tilted by 5°.</a:t>
             </a:r>
             <a:endParaRPr lang="en-US" sz="1200" dirty="0"/>
           </a:p>
-          <a:p>
-            <a:pPr algn="l" marL="342900" indent="-342900">
-              <a:lnSpc>
-                <a:spcPts val="1620"/>
-              </a:lnSpc>
-              <a:spcAft>
-                <a:spcPts val="300"/>
-              </a:spcAft>
-              <a:buSzPct val="100000"/>
-              <a:buChar char="•"/>
-            </a:pPr>
-            <a:r>
-              <a:rPr lang="en-US" sz="1200" b="1" dirty="0">
-                <a:solidFill>
-                  <a:srgbClr val="1C2833"/>
-                </a:solidFill>
-                <a:latin typeface="Arial" pitchFamily="34" charset="0"/>
-                <a:ea typeface="Arial" pitchFamily="34" charset="-122"/>
-                <a:cs typeface="Arial" pitchFamily="34" charset="-120"/>
-              </a:rPr>
-              <a:t>One tier down:</a:t>
-            </a:r>
-            <a:pPr algn="l" indent="0" marL="0">
-              <a:lnSpc>
-                <a:spcPts val="1620"/>
-              </a:lnSpc>
-              <a:spcAft>
-                <a:spcPts val="300"/>
-              </a:spcAft>
-              <a:buNone/>
-            </a:pPr>
-            <a:r>
-              <a:rPr lang="en-US" sz="1200" dirty="0">
-                <a:solidFill>
-                  <a:srgbClr val="1C2833"/>
-                </a:solidFill>
-                <a:latin typeface="Arial" pitchFamily="34" charset="0"/>
-                <a:ea typeface="Arial" pitchFamily="34" charset="-122"/>
-                <a:cs typeface="Arial" pitchFamily="34" charset="-120"/>
-              </a:rPr>
-              <a:t> Skip the node-drift detail. Focus on: solar eclipse = amāvasyā + alignment, lunar eclipse = pūrṇimā + alignment. The "tilted orbit" is the key idea; the nodes are the precise version of it.</a:t>
-            </a:r>
-            <a:endParaRPr lang="en-US" sz="1200" dirty="0"/>
-          </a:p>
-        </p:txBody>
-      </p:sp>
-      <p:sp>
-        <p:nvSpPr>
-          <p:cNvPr id="5" name="Text 3"/>
+        </p:txBody>
+      </p:sp>
+      <p:sp>
+        <p:nvSpPr>
+          <p:cNvPr id="6" name="Text 4"/>
           <p:cNvSpPr/>
           <p:nvPr/>
         </p:nvSpPr>
@@ -2740,7 +3434,7 @@
                 <a:ea typeface="Georgia" pitchFamily="34" charset="-122"/>
                 <a:cs typeface="Georgia" pitchFamily="34" charset="-120"/>
               </a:rPr>
-              <a:t>Teacher notes</a:t>
+              <a:t>Core (25 min) (cont.)</a:t>
             </a:r>
             <a:endParaRPr lang="en-US" sz="1800" dirty="0"/>
           </a:p>
@@ -2755,7 +3449,7 @@
         <p:spPr>
           <a:xfrm>
             <a:off x="406301" y="870942"/>
-            <a:ext cx="8498026" cy="1279624"/>
+            <a:ext cx="8498026" cy="426541"/>
           </a:xfrm>
           <a:prstGeom prst="rect">
             <a:avLst/>
@@ -2788,7 +3482,7 @@
                 <a:ea typeface="Arial" pitchFamily="34" charset="-122"/>
                 <a:cs typeface="Arial" pitchFamily="34" charset="-120"/>
               </a:rPr>
-              <a:t>– This is the single highest-safety-risk day in the entire IKS curriculum if there's a solar eclipse during the school term. Even if there isn't one this term, drill the safety rule. Eclipses come around. – Some students will know the </a:t>
+              <a:t>Most months, when the Moon is at </a:t>
             </a:r>
             <a:pPr algn="l" indent="0" marL="0">
               <a:lnSpc>
@@ -2811,7 +3505,7 @@
                 <a:ea typeface="Arial" pitchFamily="34" charset="-122"/>
                 <a:cs typeface="Arial" pitchFamily="34" charset="-120"/>
               </a:rPr>
-              <a:t>Rāhu</a:t>
+              <a:t>amāvasyā</a:t>
             </a:r>
             <a:pPr algn="l" indent="0" marL="0">
               <a:lnSpc>
@@ -2834,7 +3528,7 @@
                 <a:ea typeface="Arial" pitchFamily="34" charset="-122"/>
                 <a:cs typeface="Arial" pitchFamily="34" charset="-120"/>
               </a:rPr>
-              <a:t> story (Rāhu the demon swallowing the Sun/Moon during eclipses). Acknowledge it as a pre-scientific narrative shared by many cultures, then return to the geometric explanation. Classical Indian astronomers like Āryabhaṭa explicitly rejected the </a:t>
+              <a:t> (between Earth and Sun), it's either above or below the Sun-Earth line — its shadow misses Earth. Same for </a:t>
             </a:r>
             <a:pPr algn="l" indent="0" marL="0">
               <a:lnSpc>
@@ -2857,7 +3551,7 @@
                 <a:ea typeface="Arial" pitchFamily="34" charset="-122"/>
                 <a:cs typeface="Arial" pitchFamily="34" charset="-120"/>
               </a:rPr>
-              <a:t>Rāhu</a:t>
+              <a:t>pūrṇimā</a:t>
             </a:r>
             <a:pPr algn="l" indent="0" marL="0">
               <a:lnSpc>
@@ -2880,7 +3574,7 @@
                 <a:ea typeface="Arial" pitchFamily="34" charset="-122"/>
                 <a:cs typeface="Arial" pitchFamily="34" charset="-120"/>
               </a:rPr>
-              <a:t> explanation in favour of the shadow-geometry account. – The "5° tilt" number is the key. Repeat it. Without it, the "why not every month" question has no answer.</a:t>
+              <a:t> — Earth's shadow misses the Moon.</a:t>
             </a:r>
             <a:endParaRPr lang="en-US" sz="1200" dirty="0"/>
           </a:p>
@@ -2889,6 +3583,192 @@
       <p:sp>
         <p:nvSpPr>
           <p:cNvPr id="5" name="Text 3"/>
+          <p:cNvSpPr/>
+          <p:nvPr/>
+        </p:nvSpPr>
+        <p:spPr>
+          <a:xfrm>
+            <a:off x="406301" y="1373684"/>
+            <a:ext cx="8498026" cy="639812"/>
+          </a:xfrm>
+          <a:prstGeom prst="rect">
+            <a:avLst/>
+          </a:prstGeom>
+          <a:noFill/>
+          <a:ln/>
+        </p:spPr>
+        <p:txBody>
+          <a:bodyPr wrap="square" lIns="0" tIns="0" rIns="0" bIns="0" rtlCol="0" anchor="t"/>
+          <a:lstStyle/>
+          <a:p>
+            <a:pPr algn="l" indent="0" marL="0">
+              <a:lnSpc>
+                <a:spcPts val="1680"/>
+              </a:lnSpc>
+              <a:spcBef>
+                <a:spcPts val="300"/>
+              </a:spcBef>
+              <a:spcAft>
+                <a:spcPts val="300"/>
+              </a:spcAft>
+              <a:buNone/>
+            </a:pPr>
+            <a:r>
+              <a:rPr lang="en-US" sz="1200" dirty="0">
+                <a:solidFill>
+                  <a:srgbClr val="1C2833"/>
+                </a:solidFill>
+                <a:latin typeface="Arial" pitchFamily="34" charset="0"/>
+                <a:ea typeface="Arial" pitchFamily="34" charset="-122"/>
+                <a:cs typeface="Arial" pitchFamily="34" charset="-120"/>
+              </a:rPr>
+              <a:t>*</a:t>
+            </a:r>
+            <a:pPr algn="l" indent="0" marL="0">
+              <a:lnSpc>
+                <a:spcPts val="1680"/>
+              </a:lnSpc>
+              <a:spcBef>
+                <a:spcPts val="300"/>
+              </a:spcBef>
+              <a:spcAft>
+                <a:spcPts val="300"/>
+              </a:spcAft>
+              <a:buNone/>
+            </a:pPr>
+            <a:r>
+              <a:rPr lang="en-US" sz="1200" i="1" dirty="0">
+                <a:solidFill>
+                  <a:srgbClr val="1C2833"/>
+                </a:solidFill>
+                <a:latin typeface="Arial" pitchFamily="34" charset="0"/>
+                <a:ea typeface="Arial" pitchFamily="34" charset="-122"/>
+                <a:cs typeface="Arial" pitchFamily="34" charset="-120"/>
+              </a:rPr>
+              <a:t>An eclipse only happens when the Moon is at</a:t>
+            </a:r>
+            <a:pPr algn="l" indent="0" marL="0">
+              <a:lnSpc>
+                <a:spcPts val="1680"/>
+              </a:lnSpc>
+              <a:spcBef>
+                <a:spcPts val="300"/>
+              </a:spcBef>
+              <a:spcAft>
+                <a:spcPts val="300"/>
+              </a:spcAft>
+              <a:buNone/>
+            </a:pPr>
+            <a:r>
+              <a:rPr lang="en-US" sz="1200" dirty="0">
+                <a:solidFill>
+                  <a:srgbClr val="1C2833"/>
+                </a:solidFill>
+                <a:latin typeface="Arial" pitchFamily="34" charset="0"/>
+                <a:ea typeface="Arial" pitchFamily="34" charset="-122"/>
+                <a:cs typeface="Arial" pitchFamily="34" charset="-120"/>
+              </a:rPr>
+              <a:t>amāvasyā</a:t>
+            </a:r>
+            <a:pPr algn="l" indent="0" marL="0">
+              <a:lnSpc>
+                <a:spcPts val="1680"/>
+              </a:lnSpc>
+              <a:spcBef>
+                <a:spcPts val="300"/>
+              </a:spcBef>
+              <a:spcAft>
+                <a:spcPts val="300"/>
+              </a:spcAft>
+              <a:buNone/>
+            </a:pPr>
+            <a:r>
+              <a:rPr lang="en-US" sz="1200" i="1" dirty="0">
+                <a:solidFill>
+                  <a:srgbClr val="1C2833"/>
+                </a:solidFill>
+                <a:latin typeface="Arial" pitchFamily="34" charset="0"/>
+                <a:ea typeface="Arial" pitchFamily="34" charset="-122"/>
+                <a:cs typeface="Arial" pitchFamily="34" charset="-120"/>
+              </a:rPr>
+              <a:t> OR</a:t>
+            </a:r>
+            <a:pPr algn="l" indent="0" marL="0">
+              <a:lnSpc>
+                <a:spcPts val="1680"/>
+              </a:lnSpc>
+              <a:spcBef>
+                <a:spcPts val="300"/>
+              </a:spcBef>
+              <a:spcAft>
+                <a:spcPts val="300"/>
+              </a:spcAft>
+              <a:buNone/>
+            </a:pPr>
+            <a:r>
+              <a:rPr lang="en-US" sz="1200" dirty="0">
+                <a:solidFill>
+                  <a:srgbClr val="1C2833"/>
+                </a:solidFill>
+                <a:latin typeface="Arial" pitchFamily="34" charset="0"/>
+                <a:ea typeface="Arial" pitchFamily="34" charset="-122"/>
+                <a:cs typeface="Arial" pitchFamily="34" charset="-120"/>
+              </a:rPr>
+              <a:t>pūrṇimā</a:t>
+            </a:r>
+            <a:pPr algn="l" indent="0" marL="0">
+              <a:lnSpc>
+                <a:spcPts val="1680"/>
+              </a:lnSpc>
+              <a:spcBef>
+                <a:spcPts val="300"/>
+              </a:spcBef>
+              <a:spcAft>
+                <a:spcPts val="300"/>
+              </a:spcAft>
+              <a:buNone/>
+            </a:pPr>
+            <a:r>
+              <a:rPr lang="en-US" sz="1200" i="1" dirty="0">
+                <a:solidFill>
+                  <a:srgbClr val="1C2833"/>
+                </a:solidFill>
+                <a:latin typeface="Arial" pitchFamily="34" charset="0"/>
+                <a:ea typeface="Arial" pitchFamily="34" charset="-122"/>
+                <a:cs typeface="Arial" pitchFamily="34" charset="-120"/>
+              </a:rPr>
+              <a:t> AND it's near one of the two nodes</a:t>
+            </a:r>
+            <a:pPr algn="l" indent="0" marL="0">
+              <a:lnSpc>
+                <a:spcPts val="1680"/>
+              </a:lnSpc>
+              <a:spcBef>
+                <a:spcPts val="300"/>
+              </a:spcBef>
+              <a:spcAft>
+                <a:spcPts val="300"/>
+              </a:spcAft>
+              <a:buNone/>
+            </a:pPr>
+            <a:r>
+              <a:rPr lang="en-US" sz="1200" dirty="0">
+                <a:solidFill>
+                  <a:srgbClr val="1C2833"/>
+                </a:solidFill>
+                <a:latin typeface="Arial" pitchFamily="34" charset="0"/>
+                <a:ea typeface="Arial" pitchFamily="34" charset="-122"/>
+                <a:cs typeface="Arial" pitchFamily="34" charset="-120"/>
+              </a:rPr>
+              <a:t>* (the points where the Moon's tilted orbit crosses the flat ecliptic plane). That's why eclipses come in pairs (a solar and a lunar within ~14 days) and in "eclipse seasons" twice a year.</a:t>
+            </a:r>
+            <a:endParaRPr lang="en-US" sz="1200" dirty="0"/>
+          </a:p>
+        </p:txBody>
+      </p:sp>
+      <p:sp>
+        <p:nvSpPr>
+          <p:cNvPr id="6" name="Text 4"/>
           <p:cNvSpPr/>
           <p:nvPr/>
         </p:nvSpPr>
@@ -3038,7 +3918,7 @@
                 <a:ea typeface="Georgia" pitchFamily="34" charset="-122"/>
                 <a:cs typeface="Georgia" pitchFamily="34" charset="-120"/>
               </a:rPr>
-              <a:t>Citation(s) used in this lesson</a:t>
+              <a:t>Core (25 min) (cont.)</a:t>
             </a:r>
             <a:endParaRPr lang="en-US" sz="1800" dirty="0"/>
           </a:p>
@@ -3052,8 +3932,8 @@
         </p:nvSpPr>
         <p:spPr>
           <a:xfrm>
-            <a:off x="406301" y="870942"/>
-            <a:ext cx="8498026" cy="639812"/>
+            <a:off x="634901" y="883593"/>
+            <a:ext cx="8102798" cy="281880"/>
           </a:xfrm>
           <a:prstGeom prst="rect">
             <a:avLst/>
@@ -3065,6 +3945,192 @@
           <a:bodyPr wrap="square" lIns="0" tIns="0" rIns="0" bIns="0" rtlCol="0" anchor="t"/>
           <a:lstStyle/>
           <a:p>
+            <a:pPr algn="l" marL="342900" indent="-342900">
+              <a:lnSpc>
+                <a:spcPts val="1620"/>
+              </a:lnSpc>
+              <a:spcAft>
+                <a:spcPts val="300"/>
+              </a:spcAft>
+              <a:buSzPct val="100000"/>
+              <a:buChar char="•"/>
+            </a:pPr>
+            <a:r>
+              <a:rPr lang="en-US" sz="1200" b="1" dirty="0">
+                <a:solidFill>
+                  <a:srgbClr val="1C2833"/>
+                </a:solidFill>
+                <a:latin typeface="Arial" pitchFamily="34" charset="0"/>
+                <a:ea typeface="Arial" pitchFamily="34" charset="-122"/>
+                <a:cs typeface="Arial" pitchFamily="34" charset="-120"/>
+              </a:rPr>
+              <a:t>How many eclipses per year?</a:t>
+            </a:r>
+            <a:endParaRPr lang="en-US" sz="1200" dirty="0"/>
+          </a:p>
+        </p:txBody>
+      </p:sp>
+      <p:sp>
+        <p:nvSpPr>
+          <p:cNvPr id="5" name="Text 3"/>
+          <p:cNvSpPr/>
+          <p:nvPr/>
+        </p:nvSpPr>
+        <p:spPr>
+          <a:xfrm>
+            <a:off x="634901" y="1266974"/>
+            <a:ext cx="8102798" cy="975122"/>
+          </a:xfrm>
+          <a:prstGeom prst="rect">
+            <a:avLst/>
+          </a:prstGeom>
+          <a:noFill/>
+          <a:ln/>
+        </p:spPr>
+        <p:txBody>
+          <a:bodyPr wrap="square" lIns="0" tIns="0" rIns="0" bIns="0" rtlCol="0" anchor="t"/>
+          <a:lstStyle/>
+          <a:p>
+            <a:pPr algn="l" marL="342900" indent="-342900">
+              <a:lnSpc>
+                <a:spcPts val="1620"/>
+              </a:lnSpc>
+              <a:spcAft>
+                <a:spcPts val="300"/>
+              </a:spcAft>
+              <a:buSzPct val="100000"/>
+              <a:buChar char="•"/>
+            </a:pPr>
+            <a:r>
+              <a:rPr lang="en-US" sz="1200" dirty="0">
+                <a:solidFill>
+                  <a:srgbClr val="1C2833"/>
+                </a:solidFill>
+                <a:latin typeface="Arial" pitchFamily="34" charset="0"/>
+                <a:ea typeface="Arial" pitchFamily="34" charset="-122"/>
+                <a:cs typeface="Arial" pitchFamily="34" charset="-120"/>
+              </a:rPr>
+              <a:t>Solar: 2 to 5 per year, somewhere on Earth.</a:t>
+            </a:r>
+            <a:endParaRPr lang="en-US" sz="1200" dirty="0"/>
+          </a:p>
+          <a:p>
+            <a:pPr algn="l" marL="342900" indent="-342900">
+              <a:lnSpc>
+                <a:spcPts val="1620"/>
+              </a:lnSpc>
+              <a:spcAft>
+                <a:spcPts val="300"/>
+              </a:spcAft>
+              <a:buSzPct val="100000"/>
+              <a:buChar char="•"/>
+            </a:pPr>
+            <a:r>
+              <a:rPr lang="en-US" sz="1200" dirty="0">
+                <a:solidFill>
+                  <a:srgbClr val="1C2833"/>
+                </a:solidFill>
+                <a:latin typeface="Arial" pitchFamily="34" charset="0"/>
+                <a:ea typeface="Arial" pitchFamily="34" charset="-122"/>
+                <a:cs typeface="Arial" pitchFamily="34" charset="-120"/>
+              </a:rPr>
+              <a:t>Lunar: 0 to 3 per year.</a:t>
+            </a:r>
+            <a:endParaRPr lang="en-US" sz="1200" dirty="0"/>
+          </a:p>
+          <a:p>
+            <a:pPr algn="l" marL="342900" indent="-342900">
+              <a:lnSpc>
+                <a:spcPts val="1620"/>
+              </a:lnSpc>
+              <a:spcAft>
+                <a:spcPts val="300"/>
+              </a:spcAft>
+              <a:buSzPct val="100000"/>
+              <a:buChar char="•"/>
+            </a:pPr>
+            <a:r>
+              <a:rPr lang="en-US" sz="1200" dirty="0">
+                <a:solidFill>
+                  <a:srgbClr val="1C2833"/>
+                </a:solidFill>
+                <a:latin typeface="Arial" pitchFamily="34" charset="0"/>
+                <a:ea typeface="Arial" pitchFamily="34" charset="-122"/>
+                <a:cs typeface="Arial" pitchFamily="34" charset="-120"/>
+              </a:rPr>
+              <a:t>From any one location, a total solar eclipse is rare — the path of totality is narrow, and most observers see only partial eclipses.</a:t>
+            </a:r>
+            <a:endParaRPr lang="en-US" sz="1200" dirty="0"/>
+          </a:p>
+        </p:txBody>
+      </p:sp>
+      <p:sp>
+        <p:nvSpPr>
+          <p:cNvPr id="6" name="Text 4"/>
+          <p:cNvSpPr/>
+          <p:nvPr/>
+        </p:nvSpPr>
+        <p:spPr>
+          <a:xfrm>
+            <a:off x="634901" y="2343596"/>
+            <a:ext cx="8102798" cy="281880"/>
+          </a:xfrm>
+          <a:prstGeom prst="rect">
+            <a:avLst/>
+          </a:prstGeom>
+          <a:noFill/>
+          <a:ln/>
+        </p:spPr>
+        <p:txBody>
+          <a:bodyPr wrap="square" lIns="0" tIns="0" rIns="0" bIns="0" rtlCol="0" anchor="t"/>
+          <a:lstStyle/>
+          <a:p>
+            <a:pPr algn="l" marL="342900" indent="-342900">
+              <a:lnSpc>
+                <a:spcPts val="1620"/>
+              </a:lnSpc>
+              <a:spcAft>
+                <a:spcPts val="300"/>
+              </a:spcAft>
+              <a:buSzPct val="100000"/>
+              <a:buChar char="•"/>
+            </a:pPr>
+            <a:r>
+              <a:rPr lang="en-US" sz="1200" b="1" dirty="0">
+                <a:solidFill>
+                  <a:srgbClr val="1C2833"/>
+                </a:solidFill>
+                <a:latin typeface="Arial" pitchFamily="34" charset="0"/>
+                <a:ea typeface="Arial" pitchFamily="34" charset="-122"/>
+                <a:cs typeface="Arial" pitchFamily="34" charset="-120"/>
+              </a:rPr>
+              <a:t>Solar vs. lunar — what they look like.</a:t>
+            </a:r>
+            <a:endParaRPr lang="en-US" sz="1200" dirty="0"/>
+          </a:p>
+        </p:txBody>
+      </p:sp>
+      <p:sp>
+        <p:nvSpPr>
+          <p:cNvPr id="7" name="Text 5"/>
+          <p:cNvSpPr/>
+          <p:nvPr/>
+        </p:nvSpPr>
+        <p:spPr>
+          <a:xfrm>
+            <a:off x="406301" y="4434929"/>
+            <a:ext cx="8498026" cy="213271"/>
+          </a:xfrm>
+          <a:prstGeom prst="rect">
+            <a:avLst/>
+          </a:prstGeom>
+          <a:noFill/>
+          <a:ln/>
+        </p:spPr>
+        <p:txBody>
+          <a:bodyPr wrap="square" lIns="0" tIns="0" rIns="0" bIns="0" rtlCol="0" anchor="t"/>
+          <a:lstStyle/>
+          <a:p>
             <a:pPr algn="l" indent="0" marL="0">
               <a:lnSpc>
                 <a:spcPts val="1680"/>
@@ -3086,8 +4152,253 @@
                 <a:ea typeface="Arial" pitchFamily="34" charset="-122"/>
                 <a:cs typeface="Arial" pitchFamily="34" charset="-120"/>
               </a:rPr>
-              <a:t>– Paraphrase from </a:t>
-            </a:r>
+              <a:t>Middle ·  · IKS Curriculum</a:t>
+            </a:r>
+            <a:endParaRPr lang="en-US" sz="1200" dirty="0"/>
+          </a:p>
+        </p:txBody>
+      </p:sp>
+    </p:spTree>
+  </p:cSld>
+  <p:clrMapOvr>
+    <a:masterClrMapping/>
+  </p:clrMapOvr>
+</p:sld>
+</file>
+
+<file path=ppt/slides/slide13.xml><?xml version="1.0" encoding="utf-8"?>
+<p:sld xmlns:a="http://schemas.openxmlformats.org/drawingml/2006/main" xmlns:r="http://schemas.openxmlformats.org/officeDocument/2006/relationships" xmlns:p="http://schemas.openxmlformats.org/presentationml/2006/main">
+  <p:cSld name="Slide 13">
+    <p:bg>
+      <p:bgPr>
+        <a:solidFill>
+          <a:srgbClr val="FFFFFF"/>
+        </a:solidFill>
+      </p:bgPr>
+    </p:bg>
+    <p:spTree>
+      <p:nvGrpSpPr>
+        <p:cNvPr id="1" name=""/>
+        <p:cNvGrpSpPr/>
+        <p:nvPr/>
+      </p:nvGrpSpPr>
+      <p:grpSpPr>
+        <a:xfrm>
+          <a:off x="0" y="0"/>
+          <a:ext cx="0" cy="0"/>
+          <a:chOff x="0" y="0"/>
+          <a:chExt cx="0" cy="0"/>
+        </a:xfrm>
+      </p:grpSpPr>
+      <p:sp>
+        <p:nvSpPr>
+          <p:cNvPr id="2" name="Text 0"/>
+          <p:cNvSpPr/>
+          <p:nvPr/>
+        </p:nvSpPr>
+        <p:spPr>
+          <a:xfrm>
+            <a:off x="0" y="0"/>
+            <a:ext cx="9144000" cy="101501"/>
+          </a:xfrm>
+          <a:prstGeom prst="rect">
+            <a:avLst/>
+          </a:prstGeom>
+          <a:solidFill>
+            <a:srgbClr val="277884"/>
+          </a:solidFill>
+          <a:ln/>
+        </p:spPr>
+        <p:txBody>
+          <a:bodyPr wrap="square" rtlCol="0" anchor="ctr"/>
+          <a:lstStyle/>
+          <a:p>
+            <a:pPr indent="0" marL="0">
+              <a:buNone/>
+            </a:pPr>
+            <a:endParaRPr lang="en-US" dirty="0"/>
+          </a:p>
+        </p:txBody>
+      </p:sp>
+      <p:sp>
+        <p:nvSpPr>
+          <p:cNvPr id="3" name="Text 1"/>
+          <p:cNvSpPr/>
+          <p:nvPr/>
+        </p:nvSpPr>
+        <p:spPr>
+          <a:xfrm>
+            <a:off x="406301" y="457051"/>
+            <a:ext cx="8498026" cy="274290"/>
+          </a:xfrm>
+          <a:prstGeom prst="rect">
+            <a:avLst/>
+          </a:prstGeom>
+          <a:noFill/>
+          <a:ln/>
+        </p:spPr>
+        <p:txBody>
+          <a:bodyPr wrap="square" lIns="0" tIns="0" rIns="0" bIns="0" rtlCol="0" anchor="t"/>
+          <a:lstStyle/>
+          <a:p>
+            <a:pPr algn="l" indent="0" marL="0">
+              <a:lnSpc>
+                <a:spcPts val="2160"/>
+              </a:lnSpc>
+              <a:spcBef>
+                <a:spcPts val="600"/>
+              </a:spcBef>
+              <a:spcAft>
+                <a:spcPts val="800"/>
+              </a:spcAft>
+              <a:buNone/>
+            </a:pPr>
+            <a:r>
+              <a:rPr lang="en-US" sz="1800" b="1" dirty="0">
+                <a:solidFill>
+                  <a:srgbClr val="FE4447"/>
+                </a:solidFill>
+                <a:latin typeface="Georgia" pitchFamily="34" charset="0"/>
+                <a:ea typeface="Georgia" pitchFamily="34" charset="-122"/>
+                <a:cs typeface="Georgia" pitchFamily="34" charset="-120"/>
+              </a:rPr>
+              <a:t>Core (25 min) (cont.)</a:t>
+            </a:r>
+            <a:endParaRPr lang="en-US" sz="1800" dirty="0"/>
+          </a:p>
+        </p:txBody>
+      </p:sp>
+      <p:sp>
+        <p:nvSpPr>
+          <p:cNvPr id="4" name="Text 2"/>
+          <p:cNvSpPr/>
+          <p:nvPr/>
+        </p:nvSpPr>
+        <p:spPr>
+          <a:xfrm>
+            <a:off x="634901" y="883593"/>
+            <a:ext cx="8102798" cy="937022"/>
+          </a:xfrm>
+          <a:prstGeom prst="rect">
+            <a:avLst/>
+          </a:prstGeom>
+          <a:noFill/>
+          <a:ln/>
+        </p:spPr>
+        <p:txBody>
+          <a:bodyPr wrap="square" lIns="0" tIns="0" rIns="0" bIns="0" rtlCol="0" anchor="t"/>
+          <a:lstStyle/>
+          <a:p>
+            <a:pPr algn="l" marL="342900" indent="-342900">
+              <a:lnSpc>
+                <a:spcPts val="1620"/>
+              </a:lnSpc>
+              <a:spcAft>
+                <a:spcPts val="300"/>
+              </a:spcAft>
+              <a:buSzPct val="100000"/>
+              <a:buChar char="•"/>
+            </a:pPr>
+            <a:r>
+              <a:rPr lang="en-US" sz="1200" b="1" dirty="0">
+                <a:solidFill>
+                  <a:srgbClr val="1C2833"/>
+                </a:solidFill>
+                <a:latin typeface="Arial" pitchFamily="34" charset="0"/>
+                <a:ea typeface="Arial" pitchFamily="34" charset="-122"/>
+                <a:cs typeface="Arial" pitchFamily="34" charset="-120"/>
+              </a:rPr>
+              <a:t>Solar eclipse</a:t>
+            </a:r>
+            <a:pPr algn="l" indent="0" marL="0">
+              <a:lnSpc>
+                <a:spcPts val="1620"/>
+              </a:lnSpc>
+              <a:spcAft>
+                <a:spcPts val="300"/>
+              </a:spcAft>
+              <a:buNone/>
+            </a:pPr>
+            <a:r>
+              <a:rPr lang="en-US" sz="1200" dirty="0">
+                <a:solidFill>
+                  <a:srgbClr val="1C2833"/>
+                </a:solidFill>
+                <a:latin typeface="Arial" pitchFamily="34" charset="0"/>
+                <a:ea typeface="Arial" pitchFamily="34" charset="-122"/>
+                <a:cs typeface="Arial" pitchFamily="34" charset="-120"/>
+              </a:rPr>
+              <a:t>: the Sun briefly turns into a "ring of fire" (annular) or vanishes completely (total). Daylight goes blue-grey. Birds may roost. Only visible from the narrow shadow strip.</a:t>
+            </a:r>
+            <a:endParaRPr lang="en-US" sz="1200" dirty="0"/>
+          </a:p>
+          <a:p>
+            <a:pPr algn="l" marL="342900" indent="-342900">
+              <a:lnSpc>
+                <a:spcPts val="1620"/>
+              </a:lnSpc>
+              <a:spcAft>
+                <a:spcPts val="300"/>
+              </a:spcAft>
+              <a:buSzPct val="100000"/>
+              <a:buChar char="•"/>
+            </a:pPr>
+            <a:r>
+              <a:rPr lang="en-US" sz="1200" b="1" dirty="0">
+                <a:solidFill>
+                  <a:srgbClr val="1C2833"/>
+                </a:solidFill>
+                <a:latin typeface="Arial" pitchFamily="34" charset="0"/>
+                <a:ea typeface="Arial" pitchFamily="34" charset="-122"/>
+                <a:cs typeface="Arial" pitchFamily="34" charset="-120"/>
+              </a:rPr>
+              <a:t>Lunar eclipse</a:t>
+            </a:r>
+            <a:pPr algn="l" indent="0" marL="0">
+              <a:lnSpc>
+                <a:spcPts val="1620"/>
+              </a:lnSpc>
+              <a:spcAft>
+                <a:spcPts val="300"/>
+              </a:spcAft>
+              <a:buNone/>
+            </a:pPr>
+            <a:r>
+              <a:rPr lang="en-US" sz="1200" dirty="0">
+                <a:solidFill>
+                  <a:srgbClr val="1C2833"/>
+                </a:solidFill>
+                <a:latin typeface="Arial" pitchFamily="34" charset="0"/>
+                <a:ea typeface="Arial" pitchFamily="34" charset="-122"/>
+                <a:cs typeface="Arial" pitchFamily="34" charset="-120"/>
+              </a:rPr>
+              <a:t>: the Moon turns dim coppery-red ("blood moon") because the only sunlight reaching it is sunlight bent through Earth's atmosphere. Visible from the entire night-side of Earth. Lasts up to ~100 minutes.</a:t>
+            </a:r>
+            <a:endParaRPr lang="en-US" sz="1200" dirty="0"/>
+          </a:p>
+        </p:txBody>
+      </p:sp>
+      <p:sp>
+        <p:nvSpPr>
+          <p:cNvPr id="5" name="Text 3"/>
+          <p:cNvSpPr/>
+          <p:nvPr/>
+        </p:nvSpPr>
+        <p:spPr>
+          <a:xfrm>
+            <a:off x="406301" y="4434929"/>
+            <a:ext cx="8498026" cy="213271"/>
+          </a:xfrm>
+          <a:prstGeom prst="rect">
+            <a:avLst/>
+          </a:prstGeom>
+          <a:noFill/>
+          <a:ln/>
+        </p:spPr>
+        <p:txBody>
+          <a:bodyPr wrap="square" lIns="0" tIns="0" rIns="0" bIns="0" rtlCol="0" anchor="t"/>
+          <a:lstStyle/>
+          <a:p>
             <a:pPr algn="l" indent="0" marL="0">
               <a:lnSpc>
                 <a:spcPts val="1680"/>
@@ -3101,6 +4412,202 @@
               <a:buNone/>
             </a:pPr>
             <a:r>
+              <a:rPr lang="en-US" sz="1200" dirty="0">
+                <a:solidFill>
+                  <a:srgbClr val="1C2833"/>
+                </a:solidFill>
+                <a:latin typeface="Arial" pitchFamily="34" charset="0"/>
+                <a:ea typeface="Arial" pitchFamily="34" charset="-122"/>
+                <a:cs typeface="Arial" pitchFamily="34" charset="-120"/>
+              </a:rPr>
+              <a:t>Middle ·  · IKS Curriculum</a:t>
+            </a:r>
+            <a:endParaRPr lang="en-US" sz="1200" dirty="0"/>
+          </a:p>
+        </p:txBody>
+      </p:sp>
+    </p:spTree>
+  </p:cSld>
+  <p:clrMapOvr>
+    <a:masterClrMapping/>
+  </p:clrMapOvr>
+</p:sld>
+</file>
+
+<file path=ppt/slides/slide14.xml><?xml version="1.0" encoding="utf-8"?>
+<p:sld xmlns:a="http://schemas.openxmlformats.org/drawingml/2006/main" xmlns:r="http://schemas.openxmlformats.org/officeDocument/2006/relationships" xmlns:p="http://schemas.openxmlformats.org/presentationml/2006/main">
+  <p:cSld name="Slide 14">
+    <p:bg>
+      <p:bgPr>
+        <a:solidFill>
+          <a:srgbClr val="FFFFFF"/>
+        </a:solidFill>
+      </p:bgPr>
+    </p:bg>
+    <p:spTree>
+      <p:nvGrpSpPr>
+        <p:cNvPr id="1" name=""/>
+        <p:cNvGrpSpPr/>
+        <p:nvPr/>
+      </p:nvGrpSpPr>
+      <p:grpSpPr>
+        <a:xfrm>
+          <a:off x="0" y="0"/>
+          <a:ext cx="0" cy="0"/>
+          <a:chOff x="0" y="0"/>
+          <a:chExt cx="0" cy="0"/>
+        </a:xfrm>
+      </p:grpSpPr>
+      <p:sp>
+        <p:nvSpPr>
+          <p:cNvPr id="2" name="Text 0"/>
+          <p:cNvSpPr/>
+          <p:nvPr/>
+        </p:nvSpPr>
+        <p:spPr>
+          <a:xfrm>
+            <a:off x="0" y="0"/>
+            <a:ext cx="9144000" cy="101501"/>
+          </a:xfrm>
+          <a:prstGeom prst="rect">
+            <a:avLst/>
+          </a:prstGeom>
+          <a:solidFill>
+            <a:srgbClr val="277884"/>
+          </a:solidFill>
+          <a:ln/>
+        </p:spPr>
+        <p:txBody>
+          <a:bodyPr wrap="square" rtlCol="0" anchor="ctr"/>
+          <a:lstStyle/>
+          <a:p>
+            <a:pPr indent="0" marL="0">
+              <a:buNone/>
+            </a:pPr>
+            <a:endParaRPr lang="en-US" dirty="0"/>
+          </a:p>
+        </p:txBody>
+      </p:sp>
+      <p:sp>
+        <p:nvSpPr>
+          <p:cNvPr id="3" name="Text 1"/>
+          <p:cNvSpPr/>
+          <p:nvPr/>
+        </p:nvSpPr>
+        <p:spPr>
+          <a:xfrm>
+            <a:off x="406301" y="457051"/>
+            <a:ext cx="8498026" cy="274290"/>
+          </a:xfrm>
+          <a:prstGeom prst="rect">
+            <a:avLst/>
+          </a:prstGeom>
+          <a:noFill/>
+          <a:ln/>
+        </p:spPr>
+        <p:txBody>
+          <a:bodyPr wrap="square" lIns="0" tIns="0" rIns="0" bIns="0" rtlCol="0" anchor="t"/>
+          <a:lstStyle/>
+          <a:p>
+            <a:pPr algn="l" indent="0" marL="0">
+              <a:lnSpc>
+                <a:spcPts val="2160"/>
+              </a:lnSpc>
+              <a:spcBef>
+                <a:spcPts val="600"/>
+              </a:spcBef>
+              <a:spcAft>
+                <a:spcPts val="800"/>
+              </a:spcAft>
+              <a:buNone/>
+            </a:pPr>
+            <a:r>
+              <a:rPr lang="en-US" sz="1800" b="1" dirty="0">
+                <a:solidFill>
+                  <a:srgbClr val="FE4447"/>
+                </a:solidFill>
+                <a:latin typeface="Georgia" pitchFamily="34" charset="0"/>
+                <a:ea typeface="Georgia" pitchFamily="34" charset="-122"/>
+                <a:cs typeface="Georgia" pitchFamily="34" charset="-120"/>
+              </a:rPr>
+              <a:t>Core (25 min) (cont.)</a:t>
+            </a:r>
+            <a:endParaRPr lang="en-US" sz="1800" dirty="0"/>
+          </a:p>
+        </p:txBody>
+      </p:sp>
+      <p:sp>
+        <p:nvSpPr>
+          <p:cNvPr id="4" name="Text 2"/>
+          <p:cNvSpPr/>
+          <p:nvPr/>
+        </p:nvSpPr>
+        <p:spPr>
+          <a:xfrm>
+            <a:off x="634901" y="883593"/>
+            <a:ext cx="8102798" cy="898922"/>
+          </a:xfrm>
+          <a:prstGeom prst="rect">
+            <a:avLst/>
+          </a:prstGeom>
+          <a:noFill/>
+          <a:ln/>
+        </p:spPr>
+        <p:txBody>
+          <a:bodyPr wrap="square" lIns="0" tIns="0" rIns="0" bIns="0" rtlCol="0" anchor="t"/>
+          <a:lstStyle/>
+          <a:p>
+            <a:pPr algn="l" marL="342900" indent="-342900">
+              <a:lnSpc>
+                <a:spcPts val="1620"/>
+              </a:lnSpc>
+              <a:spcAft>
+                <a:spcPts val="300"/>
+              </a:spcAft>
+              <a:buSzPct val="100000"/>
+              <a:buChar char="•"/>
+            </a:pPr>
+            <a:r>
+              <a:rPr lang="en-US" sz="1200" b="1" dirty="0">
+                <a:solidFill>
+                  <a:srgbClr val="1C2833"/>
+                </a:solidFill>
+                <a:latin typeface="Arial" pitchFamily="34" charset="0"/>
+                <a:ea typeface="Arial" pitchFamily="34" charset="-122"/>
+                <a:cs typeface="Arial" pitchFamily="34" charset="-120"/>
+              </a:rPr>
+              <a:t>Indian astronomical sources knew this.</a:t>
+            </a:r>
+            <a:pPr algn="l" indent="0" marL="0">
+              <a:lnSpc>
+                <a:spcPts val="1620"/>
+              </a:lnSpc>
+              <a:spcAft>
+                <a:spcPts val="300"/>
+              </a:spcAft>
+              <a:buNone/>
+            </a:pPr>
+            <a:r>
+              <a:rPr lang="en-US" sz="1200" dirty="0">
+                <a:solidFill>
+                  <a:srgbClr val="1C2833"/>
+                </a:solidFill>
+                <a:latin typeface="Arial" pitchFamily="34" charset="0"/>
+                <a:ea typeface="Arial" pitchFamily="34" charset="-122"/>
+                <a:cs typeface="Arial" pitchFamily="34" charset="-120"/>
+              </a:rPr>
+              <a:t> The </a:t>
+            </a:r>
+            <a:pPr algn="l" indent="0" marL="0">
+              <a:lnSpc>
+                <a:spcPts val="1620"/>
+              </a:lnSpc>
+              <a:spcAft>
+                <a:spcPts val="300"/>
+              </a:spcAft>
+              <a:buNone/>
+            </a:pPr>
+            <a:r>
               <a:rPr lang="en-US" sz="1200" i="1" dirty="0">
                 <a:solidFill>
                   <a:srgbClr val="1C2833"/>
@@ -3113,6 +4620,51 @@
             </a:r>
             <a:pPr algn="l" indent="0" marL="0">
               <a:lnSpc>
+                <a:spcPts val="1620"/>
+              </a:lnSpc>
+              <a:spcAft>
+                <a:spcPts val="300"/>
+              </a:spcAft>
+              <a:buNone/>
+            </a:pPr>
+            <a:r>
+              <a:rPr lang="en-US" sz="1200" dirty="0">
+                <a:solidFill>
+                  <a:srgbClr val="1C2833"/>
+                </a:solidFill>
+                <a:latin typeface="Arial" pitchFamily="34" charset="0"/>
+                <a:ea typeface="Arial" pitchFamily="34" charset="-122"/>
+                <a:cs typeface="Arial" pitchFamily="34" charset="-120"/>
+              </a:rPr>
+              <a:t> (c. 5th–10th c. CE) gives algorithms for eclipse prediction — start time, duration, magnitude. Āryabhaṭa (5th c. CE) had a clear understanding of eclipse geometry (Moon's shadow, Earth's shadow, ecliptic plane) and rejected mythological explanations (the "Rāhu swallowing the Sun" story is older and pre-scientific; classical Indian astronomers had a separate, mathematical account).</a:t>
+            </a:r>
+            <a:endParaRPr lang="en-US" sz="1200" dirty="0"/>
+          </a:p>
+        </p:txBody>
+      </p:sp>
+      <p:sp>
+        <p:nvSpPr>
+          <p:cNvPr id="5" name="Text 3"/>
+          <p:cNvSpPr/>
+          <p:nvPr/>
+        </p:nvSpPr>
+        <p:spPr>
+          <a:xfrm>
+            <a:off x="406301" y="4434929"/>
+            <a:ext cx="8498026" cy="213271"/>
+          </a:xfrm>
+          <a:prstGeom prst="rect">
+            <a:avLst/>
+          </a:prstGeom>
+          <a:noFill/>
+          <a:ln/>
+        </p:spPr>
+        <p:txBody>
+          <a:bodyPr wrap="square" lIns="0" tIns="0" rIns="0" bIns="0" rtlCol="0" anchor="t"/>
+          <a:lstStyle/>
+          <a:p>
+            <a:pPr algn="l" indent="0" marL="0">
+              <a:lnSpc>
                 <a:spcPts val="1680"/>
               </a:lnSpc>
               <a:spcBef>
@@ -3132,7 +4684,1833 @@
                 <a:ea typeface="Arial" pitchFamily="34" charset="-122"/>
                 <a:cs typeface="Arial" pitchFamily="34" charset="-120"/>
               </a:rPr>
-              <a:t>, chapters 4–5 (computation of solar and lunar eclipses): the text gives detailed algorithms for predicting eclipse timing using the geometry of the Moon's nodes. Cited by text and chapter range only. – Modern reference: NASA's eclipse pages (search "NASA Eclipse Website" — official, free).</a:t>
+              <a:t>Middle ·  · IKS Curriculum</a:t>
+            </a:r>
+            <a:endParaRPr lang="en-US" sz="1200" dirty="0"/>
+          </a:p>
+        </p:txBody>
+      </p:sp>
+    </p:spTree>
+  </p:cSld>
+  <p:clrMapOvr>
+    <a:masterClrMapping/>
+  </p:clrMapOvr>
+</p:sld>
+</file>
+
+<file path=ppt/slides/slide15.xml><?xml version="1.0" encoding="utf-8"?>
+<p:sld xmlns:a="http://schemas.openxmlformats.org/drawingml/2006/main" xmlns:r="http://schemas.openxmlformats.org/officeDocument/2006/relationships" xmlns:p="http://schemas.openxmlformats.org/presentationml/2006/main">
+  <p:cSld name="Slide 15">
+    <p:bg>
+      <p:bgPr>
+        <a:solidFill>
+          <a:srgbClr val="FFFFFF"/>
+        </a:solidFill>
+      </p:bgPr>
+    </p:bg>
+    <p:spTree>
+      <p:nvGrpSpPr>
+        <p:cNvPr id="1" name=""/>
+        <p:cNvGrpSpPr/>
+        <p:nvPr/>
+      </p:nvGrpSpPr>
+      <p:grpSpPr>
+        <a:xfrm>
+          <a:off x="0" y="0"/>
+          <a:ext cx="0" cy="0"/>
+          <a:chOff x="0" y="0"/>
+          <a:chExt cx="0" cy="0"/>
+        </a:xfrm>
+      </p:grpSpPr>
+      <p:sp>
+        <p:nvSpPr>
+          <p:cNvPr id="2" name="Text 0"/>
+          <p:cNvSpPr/>
+          <p:nvPr/>
+        </p:nvSpPr>
+        <p:spPr>
+          <a:xfrm>
+            <a:off x="0" y="0"/>
+            <a:ext cx="9144000" cy="101501"/>
+          </a:xfrm>
+          <a:prstGeom prst="rect">
+            <a:avLst/>
+          </a:prstGeom>
+          <a:solidFill>
+            <a:srgbClr val="277884"/>
+          </a:solidFill>
+          <a:ln/>
+        </p:spPr>
+        <p:txBody>
+          <a:bodyPr wrap="square" rtlCol="0" anchor="ctr"/>
+          <a:lstStyle/>
+          <a:p>
+            <a:pPr indent="0" marL="0">
+              <a:buNone/>
+            </a:pPr>
+            <a:endParaRPr lang="en-US" dirty="0"/>
+          </a:p>
+        </p:txBody>
+      </p:sp>
+      <p:sp>
+        <p:nvSpPr>
+          <p:cNvPr id="3" name="Text 1"/>
+          <p:cNvSpPr/>
+          <p:nvPr/>
+        </p:nvSpPr>
+        <p:spPr>
+          <a:xfrm>
+            <a:off x="406301" y="457051"/>
+            <a:ext cx="8498026" cy="274290"/>
+          </a:xfrm>
+          <a:prstGeom prst="rect">
+            <a:avLst/>
+          </a:prstGeom>
+          <a:noFill/>
+          <a:ln/>
+        </p:spPr>
+        <p:txBody>
+          <a:bodyPr wrap="square" lIns="0" tIns="0" rIns="0" bIns="0" rtlCol="0" anchor="t"/>
+          <a:lstStyle/>
+          <a:p>
+            <a:pPr algn="l" indent="0" marL="0">
+              <a:lnSpc>
+                <a:spcPts val="2160"/>
+              </a:lnSpc>
+              <a:spcBef>
+                <a:spcPts val="600"/>
+              </a:spcBef>
+              <a:spcAft>
+                <a:spcPts val="800"/>
+              </a:spcAft>
+              <a:buNone/>
+            </a:pPr>
+            <a:r>
+              <a:rPr lang="en-US" sz="1800" b="1" dirty="0">
+                <a:solidFill>
+                  <a:srgbClr val="FE4447"/>
+                </a:solidFill>
+                <a:latin typeface="Georgia" pitchFamily="34" charset="0"/>
+                <a:ea typeface="Georgia" pitchFamily="34" charset="-122"/>
+                <a:cs typeface="Georgia" pitchFamily="34" charset="-120"/>
+              </a:rPr>
+              <a:t>Activity (10 min) — Diagram the geometry</a:t>
+            </a:r>
+            <a:endParaRPr lang="en-US" sz="1800" dirty="0"/>
+          </a:p>
+        </p:txBody>
+      </p:sp>
+      <p:sp>
+        <p:nvSpPr>
+          <p:cNvPr id="4" name="Text 2"/>
+          <p:cNvSpPr/>
+          <p:nvPr/>
+        </p:nvSpPr>
+        <p:spPr>
+          <a:xfrm>
+            <a:off x="406301" y="870942"/>
+            <a:ext cx="8498026" cy="222796"/>
+          </a:xfrm>
+          <a:prstGeom prst="rect">
+            <a:avLst/>
+          </a:prstGeom>
+          <a:noFill/>
+          <a:ln/>
+        </p:spPr>
+        <p:txBody>
+          <a:bodyPr wrap="square" lIns="0" tIns="0" rIns="0" bIns="0" rtlCol="0" anchor="t"/>
+          <a:lstStyle/>
+          <a:p>
+            <a:pPr algn="l" indent="0" marL="0">
+              <a:lnSpc>
+                <a:spcPts val="1680"/>
+              </a:lnSpc>
+              <a:spcBef>
+                <a:spcPts val="300"/>
+              </a:spcBef>
+              <a:spcAft>
+                <a:spcPts val="300"/>
+              </a:spcAft>
+              <a:buNone/>
+            </a:pPr>
+            <a:r>
+              <a:rPr lang="en-US" sz="1200" dirty="0">
+                <a:solidFill>
+                  <a:srgbClr val="1C2833"/>
+                </a:solidFill>
+                <a:latin typeface="Arial" pitchFamily="34" charset="0"/>
+                <a:ea typeface="Arial" pitchFamily="34" charset="-122"/>
+                <a:cs typeface="Arial" pitchFamily="34" charset="-120"/>
+              </a:rPr>
+              <a:t>This is </a:t>
+            </a:r>
+            <a:pPr algn="l" indent="0" marL="0">
+              <a:lnSpc>
+                <a:spcPts val="1680"/>
+              </a:lnSpc>
+              <a:spcBef>
+                <a:spcPts val="300"/>
+              </a:spcBef>
+              <a:spcAft>
+                <a:spcPts val="300"/>
+              </a:spcAft>
+              <a:buNone/>
+            </a:pPr>
+            <a:r>
+              <a:rPr lang="en-US" sz="1200" dirty="0">
+                <a:solidFill>
+                  <a:srgbClr val="1C2833"/>
+                </a:solidFill>
+                <a:latin typeface="Arial" pitchFamily="34" charset="0"/>
+                <a:ea typeface="Arial" pitchFamily="34" charset="-122"/>
+                <a:cs typeface="Arial" pitchFamily="34" charset="-120"/>
+              </a:rPr>
+              <a:t>activities/activity-02-eclipse-geometry.md</a:t>
+            </a:r>
+            <a:pPr algn="l" indent="0" marL="0">
+              <a:lnSpc>
+                <a:spcPts val="1680"/>
+              </a:lnSpc>
+              <a:spcBef>
+                <a:spcPts val="300"/>
+              </a:spcBef>
+              <a:spcAft>
+                <a:spcPts val="300"/>
+              </a:spcAft>
+              <a:buNone/>
+            </a:pPr>
+            <a:r>
+              <a:rPr lang="en-US" sz="1200" dirty="0">
+                <a:solidFill>
+                  <a:srgbClr val="1C2833"/>
+                </a:solidFill>
+                <a:latin typeface="Arial" pitchFamily="34" charset="0"/>
+                <a:ea typeface="Arial" pitchFamily="34" charset="-122"/>
+                <a:cs typeface="Arial" pitchFamily="34" charset="-120"/>
+              </a:rPr>
+              <a:t> in full. Students:</a:t>
+            </a:r>
+            <a:endParaRPr lang="en-US" sz="1200" dirty="0"/>
+          </a:p>
+        </p:txBody>
+      </p:sp>
+      <p:sp>
+        <p:nvSpPr>
+          <p:cNvPr id="5" name="Text 3"/>
+          <p:cNvSpPr/>
+          <p:nvPr/>
+        </p:nvSpPr>
+        <p:spPr>
+          <a:xfrm>
+            <a:off x="406301" y="4434929"/>
+            <a:ext cx="8498026" cy="213271"/>
+          </a:xfrm>
+          <a:prstGeom prst="rect">
+            <a:avLst/>
+          </a:prstGeom>
+          <a:noFill/>
+          <a:ln/>
+        </p:spPr>
+        <p:txBody>
+          <a:bodyPr wrap="square" lIns="0" tIns="0" rIns="0" bIns="0" rtlCol="0" anchor="t"/>
+          <a:lstStyle/>
+          <a:p>
+            <a:pPr algn="l" indent="0" marL="0">
+              <a:lnSpc>
+                <a:spcPts val="1680"/>
+              </a:lnSpc>
+              <a:spcBef>
+                <a:spcPts val="300"/>
+              </a:spcBef>
+              <a:spcAft>
+                <a:spcPts val="300"/>
+              </a:spcAft>
+              <a:buNone/>
+            </a:pPr>
+            <a:r>
+              <a:rPr lang="en-US" sz="1200" dirty="0">
+                <a:solidFill>
+                  <a:srgbClr val="1C2833"/>
+                </a:solidFill>
+                <a:latin typeface="Arial" pitchFamily="34" charset="0"/>
+                <a:ea typeface="Arial" pitchFamily="34" charset="-122"/>
+                <a:cs typeface="Arial" pitchFamily="34" charset="-120"/>
+              </a:rPr>
+              <a:t>Middle ·  · IKS Curriculum</a:t>
+            </a:r>
+            <a:endParaRPr lang="en-US" sz="1200" dirty="0"/>
+          </a:p>
+        </p:txBody>
+      </p:sp>
+    </p:spTree>
+  </p:cSld>
+  <p:clrMapOvr>
+    <a:masterClrMapping/>
+  </p:clrMapOvr>
+</p:sld>
+</file>
+
+<file path=ppt/slides/slide16.xml><?xml version="1.0" encoding="utf-8"?>
+<p:sld xmlns:a="http://schemas.openxmlformats.org/drawingml/2006/main" xmlns:r="http://schemas.openxmlformats.org/officeDocument/2006/relationships" xmlns:p="http://schemas.openxmlformats.org/presentationml/2006/main">
+  <p:cSld name="Slide 16">
+    <p:bg>
+      <p:bgPr>
+        <a:solidFill>
+          <a:srgbClr val="FFFFFF"/>
+        </a:solidFill>
+      </p:bgPr>
+    </p:bg>
+    <p:spTree>
+      <p:nvGrpSpPr>
+        <p:cNvPr id="1" name=""/>
+        <p:cNvGrpSpPr/>
+        <p:nvPr/>
+      </p:nvGrpSpPr>
+      <p:grpSpPr>
+        <a:xfrm>
+          <a:off x="0" y="0"/>
+          <a:ext cx="0" cy="0"/>
+          <a:chOff x="0" y="0"/>
+          <a:chExt cx="0" cy="0"/>
+        </a:xfrm>
+      </p:grpSpPr>
+      <p:sp>
+        <p:nvSpPr>
+          <p:cNvPr id="2" name="Text 0"/>
+          <p:cNvSpPr/>
+          <p:nvPr/>
+        </p:nvSpPr>
+        <p:spPr>
+          <a:xfrm>
+            <a:off x="0" y="0"/>
+            <a:ext cx="9144000" cy="101501"/>
+          </a:xfrm>
+          <a:prstGeom prst="rect">
+            <a:avLst/>
+          </a:prstGeom>
+          <a:solidFill>
+            <a:srgbClr val="277884"/>
+          </a:solidFill>
+          <a:ln/>
+        </p:spPr>
+        <p:txBody>
+          <a:bodyPr wrap="square" rtlCol="0" anchor="ctr"/>
+          <a:lstStyle/>
+          <a:p>
+            <a:pPr indent="0" marL="0">
+              <a:buNone/>
+            </a:pPr>
+            <a:endParaRPr lang="en-US" dirty="0"/>
+          </a:p>
+        </p:txBody>
+      </p:sp>
+      <p:sp>
+        <p:nvSpPr>
+          <p:cNvPr id="3" name="Text 1"/>
+          <p:cNvSpPr/>
+          <p:nvPr/>
+        </p:nvSpPr>
+        <p:spPr>
+          <a:xfrm>
+            <a:off x="406301" y="457051"/>
+            <a:ext cx="8498026" cy="274290"/>
+          </a:xfrm>
+          <a:prstGeom prst="rect">
+            <a:avLst/>
+          </a:prstGeom>
+          <a:noFill/>
+          <a:ln/>
+        </p:spPr>
+        <p:txBody>
+          <a:bodyPr wrap="square" lIns="0" tIns="0" rIns="0" bIns="0" rtlCol="0" anchor="t"/>
+          <a:lstStyle/>
+          <a:p>
+            <a:pPr algn="l" indent="0" marL="0">
+              <a:lnSpc>
+                <a:spcPts val="2160"/>
+              </a:lnSpc>
+              <a:spcBef>
+                <a:spcPts val="600"/>
+              </a:spcBef>
+              <a:spcAft>
+                <a:spcPts val="800"/>
+              </a:spcAft>
+              <a:buNone/>
+            </a:pPr>
+            <a:r>
+              <a:rPr lang="en-US" sz="1800" b="1" dirty="0">
+                <a:solidFill>
+                  <a:srgbClr val="FE4447"/>
+                </a:solidFill>
+                <a:latin typeface="Georgia" pitchFamily="34" charset="0"/>
+                <a:ea typeface="Georgia" pitchFamily="34" charset="-122"/>
+                <a:cs typeface="Georgia" pitchFamily="34" charset="-120"/>
+              </a:rPr>
+              <a:t>Activity (10 min) — Diagram the geometry (cont.)</a:t>
+            </a:r>
+            <a:endParaRPr lang="en-US" sz="1800" dirty="0"/>
+          </a:p>
+        </p:txBody>
+      </p:sp>
+      <p:sp>
+        <p:nvSpPr>
+          <p:cNvPr id="4" name="Text 2"/>
+          <p:cNvSpPr/>
+          <p:nvPr/>
+        </p:nvSpPr>
+        <p:spPr>
+          <a:xfrm>
+            <a:off x="634901" y="883593"/>
+            <a:ext cx="8102798" cy="1668363"/>
+          </a:xfrm>
+          <a:prstGeom prst="rect">
+            <a:avLst/>
+          </a:prstGeom>
+          <a:noFill/>
+          <a:ln/>
+        </p:spPr>
+        <p:txBody>
+          <a:bodyPr wrap="square" lIns="0" tIns="0" rIns="0" bIns="0" rtlCol="0" anchor="t"/>
+          <a:lstStyle/>
+          <a:p>
+            <a:pPr algn="l" marL="342900" indent="-342900">
+              <a:lnSpc>
+                <a:spcPts val="1620"/>
+              </a:lnSpc>
+              <a:spcAft>
+                <a:spcPts val="300"/>
+              </a:spcAft>
+              <a:buSzPct val="100000"/>
+              <a:buChar char="•"/>
+            </a:pPr>
+            <a:r>
+              <a:rPr lang="en-US" sz="1200" dirty="0">
+                <a:solidFill>
+                  <a:srgbClr val="1C2833"/>
+                </a:solidFill>
+                <a:latin typeface="Arial" pitchFamily="34" charset="0"/>
+                <a:ea typeface="Arial" pitchFamily="34" charset="-122"/>
+                <a:cs typeface="Arial" pitchFamily="34" charset="-120"/>
+              </a:rPr>
+              <a:t>Receive the activity sheet (with two unfinished diagrams — Sun in one position, Earth in another, Moon's orbit drawn around Earth).</a:t>
+            </a:r>
+            <a:endParaRPr lang="en-US" sz="1200" dirty="0"/>
+          </a:p>
+          <a:p>
+            <a:pPr algn="l" marL="342900" indent="-342900">
+              <a:lnSpc>
+                <a:spcPts val="1620"/>
+              </a:lnSpc>
+              <a:spcAft>
+                <a:spcPts val="300"/>
+              </a:spcAft>
+              <a:buSzPct val="100000"/>
+              <a:buChar char="•"/>
+            </a:pPr>
+            <a:r>
+              <a:rPr lang="en-US" sz="1200" dirty="0">
+                <a:solidFill>
+                  <a:srgbClr val="1C2833"/>
+                </a:solidFill>
+                <a:latin typeface="Arial" pitchFamily="34" charset="0"/>
+                <a:ea typeface="Arial" pitchFamily="34" charset="-122"/>
+                <a:cs typeface="Arial" pitchFamily="34" charset="-120"/>
+              </a:rPr>
+              <a:t>Place the Moon (a sticker or a drawn circle) at the eclipse positions: between Sun and Earth (solar) and opposite (lunar).</a:t>
+            </a:r>
+            <a:endParaRPr lang="en-US" sz="1200" dirty="0"/>
+          </a:p>
+          <a:p>
+            <a:pPr algn="l" marL="342900" indent="-342900">
+              <a:lnSpc>
+                <a:spcPts val="1620"/>
+              </a:lnSpc>
+              <a:spcAft>
+                <a:spcPts val="300"/>
+              </a:spcAft>
+              <a:buSzPct val="100000"/>
+              <a:buChar char="•"/>
+            </a:pPr>
+            <a:r>
+              <a:rPr lang="en-US" sz="1200" dirty="0">
+                <a:solidFill>
+                  <a:srgbClr val="1C2833"/>
+                </a:solidFill>
+                <a:latin typeface="Arial" pitchFamily="34" charset="0"/>
+                <a:ea typeface="Arial" pitchFamily="34" charset="-122"/>
+                <a:cs typeface="Arial" pitchFamily="34" charset="-120"/>
+              </a:rPr>
+              <a:t>Draw the shadow cones.</a:t>
+            </a:r>
+            <a:endParaRPr lang="en-US" sz="1200" dirty="0"/>
+          </a:p>
+          <a:p>
+            <a:pPr algn="l" marL="342900" indent="-342900">
+              <a:lnSpc>
+                <a:spcPts val="1620"/>
+              </a:lnSpc>
+              <a:spcAft>
+                <a:spcPts val="300"/>
+              </a:spcAft>
+              <a:buSzPct val="100000"/>
+              <a:buChar char="•"/>
+            </a:pPr>
+            <a:r>
+              <a:rPr lang="en-US" sz="1200" dirty="0">
+                <a:solidFill>
+                  <a:srgbClr val="1C2833"/>
+                </a:solidFill>
+                <a:latin typeface="Arial" pitchFamily="34" charset="0"/>
+                <a:ea typeface="Arial" pitchFamily="34" charset="-122"/>
+                <a:cs typeface="Arial" pitchFamily="34" charset="-120"/>
+              </a:rPr>
+              <a:t>Mark the two nodes on the Moon's orbit and shade the regions where an eclipse is possible.</a:t>
+            </a:r>
+            <a:endParaRPr lang="en-US" sz="1200" dirty="0"/>
+          </a:p>
+          <a:p>
+            <a:pPr algn="l" marL="342900" indent="-342900">
+              <a:lnSpc>
+                <a:spcPts val="1620"/>
+              </a:lnSpc>
+              <a:spcAft>
+                <a:spcPts val="300"/>
+              </a:spcAft>
+              <a:buSzPct val="100000"/>
+              <a:buChar char="•"/>
+            </a:pPr>
+            <a:r>
+              <a:rPr lang="en-US" sz="1200" dirty="0">
+                <a:solidFill>
+                  <a:srgbClr val="1C2833"/>
+                </a:solidFill>
+                <a:latin typeface="Arial" pitchFamily="34" charset="0"/>
+                <a:ea typeface="Arial" pitchFamily="34" charset="-122"/>
+                <a:cs typeface="Arial" pitchFamily="34" charset="-120"/>
+              </a:rPr>
+              <a:t>Below the diagram, in 3 sentences, explain: </a:t>
+            </a:r>
+            <a:pPr algn="l" indent="0" marL="0">
+              <a:lnSpc>
+                <a:spcPts val="1620"/>
+              </a:lnSpc>
+              <a:spcAft>
+                <a:spcPts val="300"/>
+              </a:spcAft>
+              <a:buNone/>
+            </a:pPr>
+            <a:r>
+              <a:rPr lang="en-US" sz="1200" i="1" dirty="0">
+                <a:solidFill>
+                  <a:srgbClr val="1C2833"/>
+                </a:solidFill>
+                <a:latin typeface="Arial" pitchFamily="34" charset="0"/>
+                <a:ea typeface="Arial" pitchFamily="34" charset="-122"/>
+                <a:cs typeface="Arial" pitchFamily="34" charset="-120"/>
+              </a:rPr>
+              <a:t>why does an eclipse not happen every amāvasyā / pūrṇimā?</a:t>
+            </a:r>
+            <a:endParaRPr lang="en-US" sz="1200" dirty="0"/>
+          </a:p>
+        </p:txBody>
+      </p:sp>
+      <p:sp>
+        <p:nvSpPr>
+          <p:cNvPr id="5" name="Text 3"/>
+          <p:cNvSpPr/>
+          <p:nvPr/>
+        </p:nvSpPr>
+        <p:spPr>
+          <a:xfrm>
+            <a:off x="406301" y="4434929"/>
+            <a:ext cx="8498026" cy="213271"/>
+          </a:xfrm>
+          <a:prstGeom prst="rect">
+            <a:avLst/>
+          </a:prstGeom>
+          <a:noFill/>
+          <a:ln/>
+        </p:spPr>
+        <p:txBody>
+          <a:bodyPr wrap="square" lIns="0" tIns="0" rIns="0" bIns="0" rtlCol="0" anchor="t"/>
+          <a:lstStyle/>
+          <a:p>
+            <a:pPr algn="l" indent="0" marL="0">
+              <a:lnSpc>
+                <a:spcPts val="1680"/>
+              </a:lnSpc>
+              <a:spcBef>
+                <a:spcPts val="300"/>
+              </a:spcBef>
+              <a:spcAft>
+                <a:spcPts val="300"/>
+              </a:spcAft>
+              <a:buNone/>
+            </a:pPr>
+            <a:r>
+              <a:rPr lang="en-US" sz="1200" dirty="0">
+                <a:solidFill>
+                  <a:srgbClr val="1C2833"/>
+                </a:solidFill>
+                <a:latin typeface="Arial" pitchFamily="34" charset="0"/>
+                <a:ea typeface="Arial" pitchFamily="34" charset="-122"/>
+                <a:cs typeface="Arial" pitchFamily="34" charset="-120"/>
+              </a:rPr>
+              <a:t>Middle ·  · IKS Curriculum</a:t>
+            </a:r>
+            <a:endParaRPr lang="en-US" sz="1200" dirty="0"/>
+          </a:p>
+        </p:txBody>
+      </p:sp>
+    </p:spTree>
+  </p:cSld>
+  <p:clrMapOvr>
+    <a:masterClrMapping/>
+  </p:clrMapOvr>
+</p:sld>
+</file>
+
+<file path=ppt/slides/slide17.xml><?xml version="1.0" encoding="utf-8"?>
+<p:sld xmlns:a="http://schemas.openxmlformats.org/drawingml/2006/main" xmlns:r="http://schemas.openxmlformats.org/officeDocument/2006/relationships" xmlns:p="http://schemas.openxmlformats.org/presentationml/2006/main">
+  <p:cSld name="Slide 17">
+    <p:bg>
+      <p:bgPr>
+        <a:solidFill>
+          <a:srgbClr val="FFFFFF"/>
+        </a:solidFill>
+      </p:bgPr>
+    </p:bg>
+    <p:spTree>
+      <p:nvGrpSpPr>
+        <p:cNvPr id="1" name=""/>
+        <p:cNvGrpSpPr/>
+        <p:nvPr/>
+      </p:nvGrpSpPr>
+      <p:grpSpPr>
+        <a:xfrm>
+          <a:off x="0" y="0"/>
+          <a:ext cx="0" cy="0"/>
+          <a:chOff x="0" y="0"/>
+          <a:chExt cx="0" cy="0"/>
+        </a:xfrm>
+      </p:grpSpPr>
+      <p:sp>
+        <p:nvSpPr>
+          <p:cNvPr id="2" name="Text 0"/>
+          <p:cNvSpPr/>
+          <p:nvPr/>
+        </p:nvSpPr>
+        <p:spPr>
+          <a:xfrm>
+            <a:off x="0" y="0"/>
+            <a:ext cx="9144000" cy="101501"/>
+          </a:xfrm>
+          <a:prstGeom prst="rect">
+            <a:avLst/>
+          </a:prstGeom>
+          <a:solidFill>
+            <a:srgbClr val="277884"/>
+          </a:solidFill>
+          <a:ln/>
+        </p:spPr>
+        <p:txBody>
+          <a:bodyPr wrap="square" rtlCol="0" anchor="ctr"/>
+          <a:lstStyle/>
+          <a:p>
+            <a:pPr indent="0" marL="0">
+              <a:buNone/>
+            </a:pPr>
+            <a:endParaRPr lang="en-US" dirty="0"/>
+          </a:p>
+        </p:txBody>
+      </p:sp>
+      <p:sp>
+        <p:nvSpPr>
+          <p:cNvPr id="3" name="Text 1"/>
+          <p:cNvSpPr/>
+          <p:nvPr/>
+        </p:nvSpPr>
+        <p:spPr>
+          <a:xfrm>
+            <a:off x="406301" y="457051"/>
+            <a:ext cx="8498026" cy="274290"/>
+          </a:xfrm>
+          <a:prstGeom prst="rect">
+            <a:avLst/>
+          </a:prstGeom>
+          <a:noFill/>
+          <a:ln/>
+        </p:spPr>
+        <p:txBody>
+          <a:bodyPr wrap="square" lIns="0" tIns="0" rIns="0" bIns="0" rtlCol="0" anchor="t"/>
+          <a:lstStyle/>
+          <a:p>
+            <a:pPr algn="l" indent="0" marL="0">
+              <a:lnSpc>
+                <a:spcPts val="2160"/>
+              </a:lnSpc>
+              <a:spcBef>
+                <a:spcPts val="600"/>
+              </a:spcBef>
+              <a:spcAft>
+                <a:spcPts val="800"/>
+              </a:spcAft>
+              <a:buNone/>
+            </a:pPr>
+            <a:r>
+              <a:rPr lang="en-US" sz="1800" b="1" dirty="0">
+                <a:solidFill>
+                  <a:srgbClr val="FE4447"/>
+                </a:solidFill>
+                <a:latin typeface="Georgia" pitchFamily="34" charset="0"/>
+                <a:ea typeface="Georgia" pitchFamily="34" charset="-122"/>
+                <a:cs typeface="Georgia" pitchFamily="34" charset="-120"/>
+              </a:rPr>
+              <a:t>Wrap-up (5 min)</a:t>
+            </a:r>
+            <a:endParaRPr lang="en-US" sz="1800" dirty="0"/>
+          </a:p>
+        </p:txBody>
+      </p:sp>
+      <p:sp>
+        <p:nvSpPr>
+          <p:cNvPr id="4" name="Text 2"/>
+          <p:cNvSpPr/>
+          <p:nvPr/>
+        </p:nvSpPr>
+        <p:spPr>
+          <a:xfrm>
+            <a:off x="634901" y="883593"/>
+            <a:ext cx="8102798" cy="975122"/>
+          </a:xfrm>
+          <a:prstGeom prst="rect">
+            <a:avLst/>
+          </a:prstGeom>
+          <a:noFill/>
+          <a:ln/>
+        </p:spPr>
+        <p:txBody>
+          <a:bodyPr wrap="square" lIns="0" tIns="0" rIns="0" bIns="0" rtlCol="0" anchor="t"/>
+          <a:lstStyle/>
+          <a:p>
+            <a:pPr algn="l" marL="342900" indent="-342900">
+              <a:lnSpc>
+                <a:spcPts val="1620"/>
+              </a:lnSpc>
+              <a:spcAft>
+                <a:spcPts val="300"/>
+              </a:spcAft>
+              <a:buSzPct val="100000"/>
+              <a:buChar char="•"/>
+            </a:pPr>
+            <a:r>
+              <a:rPr lang="en-US" sz="1200" dirty="0">
+                <a:solidFill>
+                  <a:srgbClr val="1C2833"/>
+                </a:solidFill>
+                <a:latin typeface="Arial" pitchFamily="34" charset="0"/>
+                <a:ea typeface="Arial" pitchFamily="34" charset="-122"/>
+                <a:cs typeface="Arial" pitchFamily="34" charset="-120"/>
+              </a:rPr>
+              <a:t>Read the safety rule aloud as a class. Once more.</a:t>
+            </a:r>
+            <a:endParaRPr lang="en-US" sz="1200" dirty="0"/>
+          </a:p>
+          <a:p>
+            <a:pPr algn="l" marL="342900" indent="-342900">
+              <a:lnSpc>
+                <a:spcPts val="1620"/>
+              </a:lnSpc>
+              <a:spcAft>
+                <a:spcPts val="300"/>
+              </a:spcAft>
+              <a:buSzPct val="100000"/>
+              <a:buChar char="•"/>
+            </a:pPr>
+            <a:r>
+              <a:rPr lang="en-US" sz="1200" dirty="0">
+                <a:solidFill>
+                  <a:srgbClr val="1C2833"/>
+                </a:solidFill>
+                <a:latin typeface="Arial" pitchFamily="34" charset="0"/>
+                <a:ea typeface="Arial" pitchFamily="34" charset="-122"/>
+                <a:cs typeface="Arial" pitchFamily="34" charset="-120"/>
+              </a:rPr>
+              <a:t>Ask: </a:t>
+            </a:r>
+            <a:pPr algn="l" indent="0" marL="0">
+              <a:lnSpc>
+                <a:spcPts val="1620"/>
+              </a:lnSpc>
+              <a:spcAft>
+                <a:spcPts val="300"/>
+              </a:spcAft>
+              <a:buNone/>
+            </a:pPr>
+            <a:r>
+              <a:rPr lang="en-US" sz="1200" i="1" dirty="0">
+                <a:solidFill>
+                  <a:srgbClr val="1C2833"/>
+                </a:solidFill>
+                <a:latin typeface="Arial" pitchFamily="34" charset="0"/>
+                <a:ea typeface="Arial" pitchFamily="34" charset="-122"/>
+                <a:cs typeface="Arial" pitchFamily="34" charset="-120"/>
+              </a:rPr>
+              <a:t>"What's the safest way to watch a solar eclipse?"</a:t>
+            </a:r>
+            <a:pPr algn="l" indent="0" marL="0">
+              <a:lnSpc>
+                <a:spcPts val="1620"/>
+              </a:lnSpc>
+              <a:spcAft>
+                <a:spcPts val="300"/>
+              </a:spcAft>
+              <a:buNone/>
+            </a:pPr>
+            <a:r>
+              <a:rPr lang="en-US" sz="1200" dirty="0">
+                <a:solidFill>
+                  <a:srgbClr val="1C2833"/>
+                </a:solidFill>
+                <a:latin typeface="Arial" pitchFamily="34" charset="0"/>
+                <a:ea typeface="Arial" pitchFamily="34" charset="-122"/>
+                <a:cs typeface="Arial" pitchFamily="34" charset="-120"/>
+              </a:rPr>
+              <a:t> (Eclipse glasses with ISO certification; or pinhole projection.) </a:t>
+            </a:r>
+            <a:pPr algn="l" indent="0" marL="0">
+              <a:lnSpc>
+                <a:spcPts val="1620"/>
+              </a:lnSpc>
+              <a:spcAft>
+                <a:spcPts val="300"/>
+              </a:spcAft>
+              <a:buNone/>
+            </a:pPr>
+            <a:r>
+              <a:rPr lang="en-US" sz="1200" i="1" dirty="0">
+                <a:solidFill>
+                  <a:srgbClr val="1C2833"/>
+                </a:solidFill>
+                <a:latin typeface="Arial" pitchFamily="34" charset="0"/>
+                <a:ea typeface="Arial" pitchFamily="34" charset="-122"/>
+                <a:cs typeface="Arial" pitchFamily="34" charset="-120"/>
+              </a:rPr>
+              <a:t>"What about a lunar eclipse?"</a:t>
+            </a:r>
+            <a:pPr algn="l" indent="0" marL="0">
+              <a:lnSpc>
+                <a:spcPts val="1620"/>
+              </a:lnSpc>
+              <a:spcAft>
+                <a:spcPts val="300"/>
+              </a:spcAft>
+              <a:buNone/>
+            </a:pPr>
+            <a:r>
+              <a:rPr lang="en-US" sz="1200" dirty="0">
+                <a:solidFill>
+                  <a:srgbClr val="1C2833"/>
+                </a:solidFill>
+                <a:latin typeface="Arial" pitchFamily="34" charset="0"/>
+                <a:ea typeface="Arial" pitchFamily="34" charset="-122"/>
+                <a:cs typeface="Arial" pitchFamily="34" charset="-120"/>
+              </a:rPr>
+              <a:t> (Look directly — no danger.)</a:t>
+            </a:r>
+            <a:endParaRPr lang="en-US" sz="1200" dirty="0"/>
+          </a:p>
+          <a:p>
+            <a:pPr algn="l" marL="342900" indent="-342900">
+              <a:lnSpc>
+                <a:spcPts val="1620"/>
+              </a:lnSpc>
+              <a:spcAft>
+                <a:spcPts val="300"/>
+              </a:spcAft>
+              <a:buSzPct val="100000"/>
+              <a:buChar char="•"/>
+            </a:pPr>
+            <a:r>
+              <a:rPr lang="en-US" sz="1200" b="1" dirty="0">
+                <a:solidFill>
+                  <a:srgbClr val="1C2833"/>
+                </a:solidFill>
+                <a:latin typeface="Arial" pitchFamily="34" charset="0"/>
+                <a:ea typeface="Arial" pitchFamily="34" charset="-122"/>
+                <a:cs typeface="Arial" pitchFamily="34" charset="-120"/>
+              </a:rPr>
+              <a:t>Preview Day 8:</a:t>
+            </a:r>
+            <a:pPr algn="l" indent="0" marL="0">
+              <a:lnSpc>
+                <a:spcPts val="1620"/>
+              </a:lnSpc>
+              <a:spcAft>
+                <a:spcPts val="300"/>
+              </a:spcAft>
+              <a:buNone/>
+            </a:pPr>
+            <a:r>
+              <a:rPr lang="en-US" sz="1200" dirty="0">
+                <a:solidFill>
+                  <a:srgbClr val="1C2833"/>
+                </a:solidFill>
+                <a:latin typeface="Arial" pitchFamily="34" charset="0"/>
+                <a:ea typeface="Arial" pitchFamily="34" charset="-122"/>
+                <a:cs typeface="Arial" pitchFamily="34" charset="-120"/>
+              </a:rPr>
+              <a:t> </a:t>
+            </a:r>
+            <a:pPr algn="l" indent="0" marL="0">
+              <a:lnSpc>
+                <a:spcPts val="1620"/>
+              </a:lnSpc>
+              <a:spcAft>
+                <a:spcPts val="300"/>
+              </a:spcAft>
+              <a:buNone/>
+            </a:pPr>
+            <a:r>
+              <a:rPr lang="en-US" sz="1200" i="1" dirty="0">
+                <a:solidFill>
+                  <a:srgbClr val="1C2833"/>
+                </a:solidFill>
+                <a:latin typeface="Arial" pitchFamily="34" charset="0"/>
+                <a:ea typeface="Arial" pitchFamily="34" charset="-122"/>
+                <a:cs typeface="Arial" pitchFamily="34" charset="-120"/>
+              </a:rPr>
+              <a:t>"Tomorrow you start your project."</a:t>
+            </a:r>
+            <a:endParaRPr lang="en-US" sz="1200" dirty="0"/>
+          </a:p>
+        </p:txBody>
+      </p:sp>
+      <p:sp>
+        <p:nvSpPr>
+          <p:cNvPr id="5" name="Text 3"/>
+          <p:cNvSpPr/>
+          <p:nvPr/>
+        </p:nvSpPr>
+        <p:spPr>
+          <a:xfrm>
+            <a:off x="406301" y="4434929"/>
+            <a:ext cx="8498026" cy="213271"/>
+          </a:xfrm>
+          <a:prstGeom prst="rect">
+            <a:avLst/>
+          </a:prstGeom>
+          <a:noFill/>
+          <a:ln/>
+        </p:spPr>
+        <p:txBody>
+          <a:bodyPr wrap="square" lIns="0" tIns="0" rIns="0" bIns="0" rtlCol="0" anchor="t"/>
+          <a:lstStyle/>
+          <a:p>
+            <a:pPr algn="l" indent="0" marL="0">
+              <a:lnSpc>
+                <a:spcPts val="1680"/>
+              </a:lnSpc>
+              <a:spcBef>
+                <a:spcPts val="300"/>
+              </a:spcBef>
+              <a:spcAft>
+                <a:spcPts val="300"/>
+              </a:spcAft>
+              <a:buNone/>
+            </a:pPr>
+            <a:r>
+              <a:rPr lang="en-US" sz="1200" dirty="0">
+                <a:solidFill>
+                  <a:srgbClr val="1C2833"/>
+                </a:solidFill>
+                <a:latin typeface="Arial" pitchFamily="34" charset="0"/>
+                <a:ea typeface="Arial" pitchFamily="34" charset="-122"/>
+                <a:cs typeface="Arial" pitchFamily="34" charset="-120"/>
+              </a:rPr>
+              <a:t>Middle ·  · IKS Curriculum</a:t>
+            </a:r>
+            <a:endParaRPr lang="en-US" sz="1200" dirty="0"/>
+          </a:p>
+        </p:txBody>
+      </p:sp>
+    </p:spTree>
+  </p:cSld>
+  <p:clrMapOvr>
+    <a:masterClrMapping/>
+  </p:clrMapOvr>
+</p:sld>
+</file>
+
+<file path=ppt/slides/slide18.xml><?xml version="1.0" encoding="utf-8"?>
+<p:sld xmlns:a="http://schemas.openxmlformats.org/drawingml/2006/main" xmlns:r="http://schemas.openxmlformats.org/officeDocument/2006/relationships" xmlns:p="http://schemas.openxmlformats.org/presentationml/2006/main">
+  <p:cSld name="Slide 18">
+    <p:bg>
+      <p:bgPr>
+        <a:solidFill>
+          <a:srgbClr val="FFFFFF"/>
+        </a:solidFill>
+      </p:bgPr>
+    </p:bg>
+    <p:spTree>
+      <p:nvGrpSpPr>
+        <p:cNvPr id="1" name=""/>
+        <p:cNvGrpSpPr/>
+        <p:nvPr/>
+      </p:nvGrpSpPr>
+      <p:grpSpPr>
+        <a:xfrm>
+          <a:off x="0" y="0"/>
+          <a:ext cx="0" cy="0"/>
+          <a:chOff x="0" y="0"/>
+          <a:chExt cx="0" cy="0"/>
+        </a:xfrm>
+      </p:grpSpPr>
+      <p:sp>
+        <p:nvSpPr>
+          <p:cNvPr id="2" name="Text 0"/>
+          <p:cNvSpPr/>
+          <p:nvPr/>
+        </p:nvSpPr>
+        <p:spPr>
+          <a:xfrm>
+            <a:off x="0" y="0"/>
+            <a:ext cx="9144000" cy="101501"/>
+          </a:xfrm>
+          <a:prstGeom prst="rect">
+            <a:avLst/>
+          </a:prstGeom>
+          <a:solidFill>
+            <a:srgbClr val="277884"/>
+          </a:solidFill>
+          <a:ln/>
+        </p:spPr>
+        <p:txBody>
+          <a:bodyPr wrap="square" rtlCol="0" anchor="ctr"/>
+          <a:lstStyle/>
+          <a:p>
+            <a:pPr indent="0" marL="0">
+              <a:buNone/>
+            </a:pPr>
+            <a:endParaRPr lang="en-US" dirty="0"/>
+          </a:p>
+        </p:txBody>
+      </p:sp>
+      <p:sp>
+        <p:nvSpPr>
+          <p:cNvPr id="3" name="Text 1"/>
+          <p:cNvSpPr/>
+          <p:nvPr/>
+        </p:nvSpPr>
+        <p:spPr>
+          <a:xfrm>
+            <a:off x="406301" y="457051"/>
+            <a:ext cx="8498026" cy="274290"/>
+          </a:xfrm>
+          <a:prstGeom prst="rect">
+            <a:avLst/>
+          </a:prstGeom>
+          <a:noFill/>
+          <a:ln/>
+        </p:spPr>
+        <p:txBody>
+          <a:bodyPr wrap="square" lIns="0" tIns="0" rIns="0" bIns="0" rtlCol="0" anchor="t"/>
+          <a:lstStyle/>
+          <a:p>
+            <a:pPr algn="l" indent="0" marL="0">
+              <a:lnSpc>
+                <a:spcPts val="2160"/>
+              </a:lnSpc>
+              <a:spcBef>
+                <a:spcPts val="600"/>
+              </a:spcBef>
+              <a:spcAft>
+                <a:spcPts val="800"/>
+              </a:spcAft>
+              <a:buNone/>
+            </a:pPr>
+            <a:r>
+              <a:rPr lang="en-US" sz="1800" b="1" dirty="0">
+                <a:solidFill>
+                  <a:srgbClr val="FE4447"/>
+                </a:solidFill>
+                <a:latin typeface="Georgia" pitchFamily="34" charset="0"/>
+                <a:ea typeface="Georgia" pitchFamily="34" charset="-122"/>
+                <a:cs typeface="Georgia" pitchFamily="34" charset="-120"/>
+              </a:rPr>
+              <a:t>Student-facing content</a:t>
+            </a:r>
+            <a:endParaRPr lang="en-US" sz="1800" dirty="0"/>
+          </a:p>
+        </p:txBody>
+      </p:sp>
+      <p:sp>
+        <p:nvSpPr>
+          <p:cNvPr id="4" name="Text 2"/>
+          <p:cNvSpPr/>
+          <p:nvPr/>
+        </p:nvSpPr>
+        <p:spPr>
+          <a:xfrm>
+            <a:off x="406301" y="883593"/>
+            <a:ext cx="8331398" cy="3036094"/>
+          </a:xfrm>
+          <a:prstGeom prst="rect">
+            <a:avLst/>
+          </a:prstGeom>
+          <a:solidFill>
+            <a:srgbClr val="F4F8F9"/>
+          </a:solidFill>
+          <a:ln/>
+        </p:spPr>
+        <p:txBody>
+          <a:bodyPr wrap="square" rtlCol="0" anchor="ctr"/>
+          <a:lstStyle/>
+          <a:p>
+            <a:pPr indent="0" marL="0">
+              <a:buNone/>
+            </a:pPr>
+            <a:endParaRPr lang="en-US" dirty="0"/>
+          </a:p>
+        </p:txBody>
+      </p:sp>
+      <p:sp>
+        <p:nvSpPr>
+          <p:cNvPr id="5" name="Shape 3"/>
+          <p:cNvSpPr/>
+          <p:nvPr/>
+        </p:nvSpPr>
+        <p:spPr>
+          <a:xfrm>
+            <a:off x="434876" y="883593"/>
+            <a:ext cx="0" cy="3036094"/>
+          </a:xfrm>
+          <a:prstGeom prst="line">
+            <a:avLst/>
+          </a:prstGeom>
+          <a:noFill/>
+          <a:ln w="57150">
+            <a:solidFill>
+              <a:srgbClr val="FE4447"/>
+            </a:solidFill>
+            <a:prstDash val="solid"/>
+          </a:ln>
+        </p:spPr>
+      </p:sp>
+      <p:sp>
+        <p:nvSpPr>
+          <p:cNvPr id="6" name="Text 4"/>
+          <p:cNvSpPr/>
+          <p:nvPr/>
+        </p:nvSpPr>
+        <p:spPr>
+          <a:xfrm>
+            <a:off x="692051" y="1074093"/>
+            <a:ext cx="7973389" cy="461963"/>
+          </a:xfrm>
+          <a:prstGeom prst="rect">
+            <a:avLst/>
+          </a:prstGeom>
+          <a:noFill/>
+          <a:ln/>
+        </p:spPr>
+        <p:txBody>
+          <a:bodyPr wrap="square" lIns="0" tIns="0" rIns="0" bIns="0" rtlCol="0" anchor="t"/>
+          <a:lstStyle/>
+          <a:p>
+            <a:pPr algn="l" indent="0" marL="0">
+              <a:lnSpc>
+                <a:spcPts val="1820"/>
+              </a:lnSpc>
+              <a:spcBef>
+                <a:spcPts val="300"/>
+              </a:spcBef>
+              <a:spcAft>
+                <a:spcPts val="300"/>
+              </a:spcAft>
+              <a:buNone/>
+            </a:pPr>
+            <a:r>
+              <a:rPr lang="en-US" sz="1300" b="1" i="1" dirty="0">
+                <a:solidFill>
+                  <a:srgbClr val="1C2833"/>
+                </a:solidFill>
+                <a:latin typeface="Georgia" pitchFamily="34" charset="0"/>
+                <a:ea typeface="Georgia" pitchFamily="34" charset="-122"/>
+                <a:cs typeface="Georgia" pitchFamily="34" charset="-120"/>
+              </a:rPr>
+              <a:t>Solar eclipse:</a:t>
+            </a:r>
+            <a:pPr algn="l" indent="0" marL="0">
+              <a:lnSpc>
+                <a:spcPts val="1820"/>
+              </a:lnSpc>
+              <a:spcBef>
+                <a:spcPts val="300"/>
+              </a:spcBef>
+              <a:spcAft>
+                <a:spcPts val="300"/>
+              </a:spcAft>
+              <a:buNone/>
+            </a:pPr>
+            <a:r>
+              <a:rPr lang="en-US" sz="1300" dirty="0">
+                <a:solidFill>
+                  <a:srgbClr val="1C2833"/>
+                </a:solidFill>
+                <a:latin typeface="Georgia" pitchFamily="34" charset="0"/>
+                <a:ea typeface="Georgia" pitchFamily="34" charset="-122"/>
+                <a:cs typeface="Georgia" pitchFamily="34" charset="-120"/>
+              </a:rPr>
+              <a:t> Sun, Moon, Earth in line (Moon in middle). Happens on </a:t>
+            </a:r>
+            <a:pPr algn="l" indent="0" marL="0">
+              <a:lnSpc>
+                <a:spcPts val="1820"/>
+              </a:lnSpc>
+              <a:spcBef>
+                <a:spcPts val="300"/>
+              </a:spcBef>
+              <a:spcAft>
+                <a:spcPts val="300"/>
+              </a:spcAft>
+              <a:buNone/>
+            </a:pPr>
+            <a:r>
+              <a:rPr lang="en-US" sz="1300" i="1" dirty="0">
+                <a:solidFill>
+                  <a:srgbClr val="1C2833"/>
+                </a:solidFill>
+                <a:latin typeface="Georgia" pitchFamily="34" charset="0"/>
+                <a:ea typeface="Georgia" pitchFamily="34" charset="-122"/>
+                <a:cs typeface="Georgia" pitchFamily="34" charset="-120"/>
+              </a:rPr>
+              <a:t>amāvasyā</a:t>
+            </a:r>
+            <a:pPr algn="l" indent="0" marL="0">
+              <a:lnSpc>
+                <a:spcPts val="1820"/>
+              </a:lnSpc>
+              <a:spcBef>
+                <a:spcPts val="300"/>
+              </a:spcBef>
+              <a:spcAft>
+                <a:spcPts val="300"/>
+              </a:spcAft>
+              <a:buNone/>
+            </a:pPr>
+            <a:r>
+              <a:rPr lang="en-US" sz="1300" dirty="0">
+                <a:solidFill>
+                  <a:srgbClr val="1C2833"/>
+                </a:solidFill>
+                <a:latin typeface="Georgia" pitchFamily="34" charset="0"/>
+                <a:ea typeface="Georgia" pitchFamily="34" charset="-122"/>
+                <a:cs typeface="Georgia" pitchFamily="34" charset="-120"/>
+              </a:rPr>
+              <a:t>. Moon's shadow falls on Earth.</a:t>
+            </a:r>
+            <a:endParaRPr lang="en-US" sz="1300" dirty="0"/>
+          </a:p>
+        </p:txBody>
+      </p:sp>
+      <p:sp>
+        <p:nvSpPr>
+          <p:cNvPr id="7" name="Text 5"/>
+          <p:cNvSpPr/>
+          <p:nvPr/>
+        </p:nvSpPr>
+        <p:spPr>
+          <a:xfrm>
+            <a:off x="692051" y="1574155"/>
+            <a:ext cx="7973389" cy="461963"/>
+          </a:xfrm>
+          <a:prstGeom prst="rect">
+            <a:avLst/>
+          </a:prstGeom>
+          <a:noFill/>
+          <a:ln/>
+        </p:spPr>
+        <p:txBody>
+          <a:bodyPr wrap="square" lIns="0" tIns="0" rIns="0" bIns="0" rtlCol="0" anchor="t"/>
+          <a:lstStyle/>
+          <a:p>
+            <a:pPr algn="l" indent="0" marL="0">
+              <a:lnSpc>
+                <a:spcPts val="1820"/>
+              </a:lnSpc>
+              <a:spcBef>
+                <a:spcPts val="300"/>
+              </a:spcBef>
+              <a:spcAft>
+                <a:spcPts val="300"/>
+              </a:spcAft>
+              <a:buNone/>
+            </a:pPr>
+            <a:r>
+              <a:rPr lang="en-US" sz="1300" b="1" i="1" dirty="0">
+                <a:solidFill>
+                  <a:srgbClr val="1C2833"/>
+                </a:solidFill>
+                <a:latin typeface="Georgia" pitchFamily="34" charset="0"/>
+                <a:ea typeface="Georgia" pitchFamily="34" charset="-122"/>
+                <a:cs typeface="Georgia" pitchFamily="34" charset="-120"/>
+              </a:rPr>
+              <a:t>Lunar eclipse:</a:t>
+            </a:r>
+            <a:pPr algn="l" indent="0" marL="0">
+              <a:lnSpc>
+                <a:spcPts val="1820"/>
+              </a:lnSpc>
+              <a:spcBef>
+                <a:spcPts val="300"/>
+              </a:spcBef>
+              <a:spcAft>
+                <a:spcPts val="300"/>
+              </a:spcAft>
+              <a:buNone/>
+            </a:pPr>
+            <a:r>
+              <a:rPr lang="en-US" sz="1300" dirty="0">
+                <a:solidFill>
+                  <a:srgbClr val="1C2833"/>
+                </a:solidFill>
+                <a:latin typeface="Georgia" pitchFamily="34" charset="0"/>
+                <a:ea typeface="Georgia" pitchFamily="34" charset="-122"/>
+                <a:cs typeface="Georgia" pitchFamily="34" charset="-120"/>
+              </a:rPr>
+              <a:t> Sun, Earth, Moon in line (Earth in middle). Happens on </a:t>
+            </a:r>
+            <a:pPr algn="l" indent="0" marL="0">
+              <a:lnSpc>
+                <a:spcPts val="1820"/>
+              </a:lnSpc>
+              <a:spcBef>
+                <a:spcPts val="300"/>
+              </a:spcBef>
+              <a:spcAft>
+                <a:spcPts val="300"/>
+              </a:spcAft>
+              <a:buNone/>
+            </a:pPr>
+            <a:r>
+              <a:rPr lang="en-US" sz="1300" i="1" dirty="0">
+                <a:solidFill>
+                  <a:srgbClr val="1C2833"/>
+                </a:solidFill>
+                <a:latin typeface="Georgia" pitchFamily="34" charset="0"/>
+                <a:ea typeface="Georgia" pitchFamily="34" charset="-122"/>
+                <a:cs typeface="Georgia" pitchFamily="34" charset="-120"/>
+              </a:rPr>
+              <a:t>pūrṇimā</a:t>
+            </a:r>
+            <a:pPr algn="l" indent="0" marL="0">
+              <a:lnSpc>
+                <a:spcPts val="1820"/>
+              </a:lnSpc>
+              <a:spcBef>
+                <a:spcPts val="300"/>
+              </a:spcBef>
+              <a:spcAft>
+                <a:spcPts val="300"/>
+              </a:spcAft>
+              <a:buNone/>
+            </a:pPr>
+            <a:r>
+              <a:rPr lang="en-US" sz="1300" dirty="0">
+                <a:solidFill>
+                  <a:srgbClr val="1C2833"/>
+                </a:solidFill>
+                <a:latin typeface="Georgia" pitchFamily="34" charset="0"/>
+                <a:ea typeface="Georgia" pitchFamily="34" charset="-122"/>
+                <a:cs typeface="Georgia" pitchFamily="34" charset="-120"/>
+              </a:rPr>
+              <a:t>. Earth's shadow falls on Moon.</a:t>
+            </a:r>
+            <a:endParaRPr lang="en-US" sz="1300" dirty="0"/>
+          </a:p>
+        </p:txBody>
+      </p:sp>
+      <p:sp>
+        <p:nvSpPr>
+          <p:cNvPr id="8" name="Text 6"/>
+          <p:cNvSpPr/>
+          <p:nvPr/>
+        </p:nvSpPr>
+        <p:spPr>
+          <a:xfrm>
+            <a:off x="692051" y="2074218"/>
+            <a:ext cx="7973389" cy="923925"/>
+          </a:xfrm>
+          <a:prstGeom prst="rect">
+            <a:avLst/>
+          </a:prstGeom>
+          <a:noFill/>
+          <a:ln/>
+        </p:spPr>
+        <p:txBody>
+          <a:bodyPr wrap="square" lIns="0" tIns="0" rIns="0" bIns="0" rtlCol="0" anchor="t"/>
+          <a:lstStyle/>
+          <a:p>
+            <a:pPr algn="l" indent="0" marL="0">
+              <a:lnSpc>
+                <a:spcPts val="1820"/>
+              </a:lnSpc>
+              <a:spcBef>
+                <a:spcPts val="300"/>
+              </a:spcBef>
+              <a:spcAft>
+                <a:spcPts val="300"/>
+              </a:spcAft>
+              <a:buNone/>
+            </a:pPr>
+            <a:r>
+              <a:rPr lang="en-US" sz="1300" b="1" i="1" dirty="0">
+                <a:solidFill>
+                  <a:srgbClr val="1C2833"/>
+                </a:solidFill>
+                <a:latin typeface="Georgia" pitchFamily="34" charset="0"/>
+                <a:ea typeface="Georgia" pitchFamily="34" charset="-122"/>
+                <a:cs typeface="Georgia" pitchFamily="34" charset="-120"/>
+              </a:rPr>
+              <a:t>Why not every month?</a:t>
+            </a:r>
+            <a:pPr algn="l" indent="0" marL="0">
+              <a:lnSpc>
+                <a:spcPts val="1820"/>
+              </a:lnSpc>
+              <a:spcBef>
+                <a:spcPts val="300"/>
+              </a:spcBef>
+              <a:spcAft>
+                <a:spcPts val="300"/>
+              </a:spcAft>
+              <a:buNone/>
+            </a:pPr>
+            <a:r>
+              <a:rPr lang="en-US" sz="1300" dirty="0">
+                <a:solidFill>
+                  <a:srgbClr val="1C2833"/>
+                </a:solidFill>
+                <a:latin typeface="Georgia" pitchFamily="34" charset="0"/>
+                <a:ea typeface="Georgia" pitchFamily="34" charset="-122"/>
+                <a:cs typeface="Georgia" pitchFamily="34" charset="-120"/>
+              </a:rPr>
+              <a:t> The Moon's orbit is tilted ~5° from Earth's orbit around the Sun. So usually the Moon's shadow misses Earth (at amāvasyā) or Earth's shadow misses the Moon (at pūrṇimā). Eclipses happen only when the Moon is </a:t>
+            </a:r>
+            <a:pPr algn="l" indent="0" marL="0">
+              <a:lnSpc>
+                <a:spcPts val="1820"/>
+              </a:lnSpc>
+              <a:spcBef>
+                <a:spcPts val="300"/>
+              </a:spcBef>
+              <a:spcAft>
+                <a:spcPts val="300"/>
+              </a:spcAft>
+              <a:buNone/>
+            </a:pPr>
+            <a:r>
+              <a:rPr lang="en-US" sz="1300" i="1" dirty="0">
+                <a:solidFill>
+                  <a:srgbClr val="1C2833"/>
+                </a:solidFill>
+                <a:latin typeface="Georgia" pitchFamily="34" charset="0"/>
+                <a:ea typeface="Georgia" pitchFamily="34" charset="-122"/>
+                <a:cs typeface="Georgia" pitchFamily="34" charset="-120"/>
+              </a:rPr>
+              <a:t>both</a:t>
+            </a:r>
+            <a:pPr algn="l" indent="0" marL="0">
+              <a:lnSpc>
+                <a:spcPts val="1820"/>
+              </a:lnSpc>
+              <a:spcBef>
+                <a:spcPts val="300"/>
+              </a:spcBef>
+              <a:spcAft>
+                <a:spcPts val="300"/>
+              </a:spcAft>
+              <a:buNone/>
+            </a:pPr>
+            <a:r>
+              <a:rPr lang="en-US" sz="1300" dirty="0">
+                <a:solidFill>
+                  <a:srgbClr val="1C2833"/>
+                </a:solidFill>
+                <a:latin typeface="Georgia" pitchFamily="34" charset="0"/>
+                <a:ea typeface="Georgia" pitchFamily="34" charset="-122"/>
+                <a:cs typeface="Georgia" pitchFamily="34" charset="-120"/>
+              </a:rPr>
+              <a:t> at amāvasyā/pūrṇimā </a:t>
+            </a:r>
+            <a:pPr algn="l" indent="0" marL="0">
+              <a:lnSpc>
+                <a:spcPts val="1820"/>
+              </a:lnSpc>
+              <a:spcBef>
+                <a:spcPts val="300"/>
+              </a:spcBef>
+              <a:spcAft>
+                <a:spcPts val="300"/>
+              </a:spcAft>
+              <a:buNone/>
+            </a:pPr>
+            <a:r>
+              <a:rPr lang="en-US" sz="1300" i="1" dirty="0">
+                <a:solidFill>
+                  <a:srgbClr val="1C2833"/>
+                </a:solidFill>
+                <a:latin typeface="Georgia" pitchFamily="34" charset="0"/>
+                <a:ea typeface="Georgia" pitchFamily="34" charset="-122"/>
+                <a:cs typeface="Georgia" pitchFamily="34" charset="-120"/>
+              </a:rPr>
+              <a:t>and</a:t>
+            </a:r>
+            <a:pPr algn="l" indent="0" marL="0">
+              <a:lnSpc>
+                <a:spcPts val="1820"/>
+              </a:lnSpc>
+              <a:spcBef>
+                <a:spcPts val="300"/>
+              </a:spcBef>
+              <a:spcAft>
+                <a:spcPts val="300"/>
+              </a:spcAft>
+              <a:buNone/>
+            </a:pPr>
+            <a:r>
+              <a:rPr lang="en-US" sz="1300" dirty="0">
+                <a:solidFill>
+                  <a:srgbClr val="1C2833"/>
+                </a:solidFill>
+                <a:latin typeface="Georgia" pitchFamily="34" charset="0"/>
+                <a:ea typeface="Georgia" pitchFamily="34" charset="-122"/>
+                <a:cs typeface="Georgia" pitchFamily="34" charset="-120"/>
+              </a:rPr>
+              <a:t> close to one of the two nodes (where the two orbital planes cross).</a:t>
+            </a:r>
+            <a:endParaRPr lang="en-US" sz="1300" dirty="0"/>
+          </a:p>
+        </p:txBody>
+      </p:sp>
+      <p:sp>
+        <p:nvSpPr>
+          <p:cNvPr id="9" name="Text 7"/>
+          <p:cNvSpPr/>
+          <p:nvPr/>
+        </p:nvSpPr>
+        <p:spPr>
+          <a:xfrm>
+            <a:off x="692051" y="3036243"/>
+            <a:ext cx="7973389" cy="692944"/>
+          </a:xfrm>
+          <a:prstGeom prst="rect">
+            <a:avLst/>
+          </a:prstGeom>
+          <a:noFill/>
+          <a:ln/>
+        </p:spPr>
+        <p:txBody>
+          <a:bodyPr wrap="square" lIns="0" tIns="0" rIns="0" bIns="0" rtlCol="0" anchor="t"/>
+          <a:lstStyle/>
+          <a:p>
+            <a:pPr algn="l" indent="0" marL="0">
+              <a:lnSpc>
+                <a:spcPts val="1820"/>
+              </a:lnSpc>
+              <a:spcBef>
+                <a:spcPts val="300"/>
+              </a:spcBef>
+              <a:spcAft>
+                <a:spcPts val="300"/>
+              </a:spcAft>
+              <a:buNone/>
+            </a:pPr>
+            <a:r>
+              <a:rPr lang="en-US" sz="1300" dirty="0">
+                <a:solidFill>
+                  <a:srgbClr val="1C2833"/>
+                </a:solidFill>
+                <a:latin typeface="Georgia" pitchFamily="34" charset="0"/>
+                <a:ea typeface="Georgia" pitchFamily="34" charset="-122"/>
+                <a:cs typeface="Georgia" pitchFamily="34" charset="-120"/>
+              </a:rPr>
+              <a:t>⚠️ </a:t>
+            </a:r>
+            <a:pPr algn="l" indent="0" marL="0">
+              <a:lnSpc>
+                <a:spcPts val="1820"/>
+              </a:lnSpc>
+              <a:spcBef>
+                <a:spcPts val="300"/>
+              </a:spcBef>
+              <a:spcAft>
+                <a:spcPts val="300"/>
+              </a:spcAft>
+              <a:buNone/>
+            </a:pPr>
+            <a:r>
+              <a:rPr lang="en-US" sz="1300" b="1" i="1" dirty="0">
+                <a:solidFill>
+                  <a:srgbClr val="1C2833"/>
+                </a:solidFill>
+                <a:latin typeface="Georgia" pitchFamily="34" charset="0"/>
+                <a:ea typeface="Georgia" pitchFamily="34" charset="-122"/>
+                <a:cs typeface="Georgia" pitchFamily="34" charset="-120"/>
+              </a:rPr>
+              <a:t>NEVER look directly at a solar eclipse.</a:t>
+            </a:r>
+            <a:pPr algn="l" indent="0" marL="0">
+              <a:lnSpc>
+                <a:spcPts val="1820"/>
+              </a:lnSpc>
+              <a:spcBef>
+                <a:spcPts val="300"/>
+              </a:spcBef>
+              <a:spcAft>
+                <a:spcPts val="300"/>
+              </a:spcAft>
+              <a:buNone/>
+            </a:pPr>
+            <a:r>
+              <a:rPr lang="en-US" sz="1300" dirty="0">
+                <a:solidFill>
+                  <a:srgbClr val="1C2833"/>
+                </a:solidFill>
+                <a:latin typeface="Georgia" pitchFamily="34" charset="0"/>
+                <a:ea typeface="Georgia" pitchFamily="34" charset="-122"/>
+                <a:cs typeface="Georgia" pitchFamily="34" charset="-120"/>
+              </a:rPr>
+              <a:t> Use ISO 12312-2 certified eclipse glasses, or project the Sun through a pinhole onto paper. Sunglasses, smoked glass, photographic film do not work. Lunar eclipses are safe to view directly.</a:t>
+            </a:r>
+            <a:endParaRPr lang="en-US" sz="1300" dirty="0"/>
+          </a:p>
+        </p:txBody>
+      </p:sp>
+      <p:sp>
+        <p:nvSpPr>
+          <p:cNvPr id="10" name="Text 8"/>
+          <p:cNvSpPr/>
+          <p:nvPr/>
+        </p:nvSpPr>
+        <p:spPr>
+          <a:xfrm>
+            <a:off x="406301" y="4434929"/>
+            <a:ext cx="8498026" cy="213271"/>
+          </a:xfrm>
+          <a:prstGeom prst="rect">
+            <a:avLst/>
+          </a:prstGeom>
+          <a:noFill/>
+          <a:ln/>
+        </p:spPr>
+        <p:txBody>
+          <a:bodyPr wrap="square" lIns="0" tIns="0" rIns="0" bIns="0" rtlCol="0" anchor="t"/>
+          <a:lstStyle/>
+          <a:p>
+            <a:pPr algn="l" indent="0" marL="0">
+              <a:lnSpc>
+                <a:spcPts val="1680"/>
+              </a:lnSpc>
+              <a:spcBef>
+                <a:spcPts val="300"/>
+              </a:spcBef>
+              <a:spcAft>
+                <a:spcPts val="300"/>
+              </a:spcAft>
+              <a:buNone/>
+            </a:pPr>
+            <a:r>
+              <a:rPr lang="en-US" sz="1200" dirty="0">
+                <a:solidFill>
+                  <a:srgbClr val="1C2833"/>
+                </a:solidFill>
+                <a:latin typeface="Arial" pitchFamily="34" charset="0"/>
+                <a:ea typeface="Arial" pitchFamily="34" charset="-122"/>
+                <a:cs typeface="Arial" pitchFamily="34" charset="-120"/>
+              </a:rPr>
+              <a:t>Middle ·  · IKS Curriculum</a:t>
+            </a:r>
+            <a:endParaRPr lang="en-US" sz="1200" dirty="0"/>
+          </a:p>
+        </p:txBody>
+      </p:sp>
+    </p:spTree>
+  </p:cSld>
+  <p:clrMapOvr>
+    <a:masterClrMapping/>
+  </p:clrMapOvr>
+</p:sld>
+</file>
+
+<file path=ppt/slides/slide19.xml><?xml version="1.0" encoding="utf-8"?>
+<p:sld xmlns:a="http://schemas.openxmlformats.org/drawingml/2006/main" xmlns:r="http://schemas.openxmlformats.org/officeDocument/2006/relationships" xmlns:p="http://schemas.openxmlformats.org/presentationml/2006/main">
+  <p:cSld name="Slide 19">
+    <p:bg>
+      <p:bgPr>
+        <a:solidFill>
+          <a:srgbClr val="FFFFFF"/>
+        </a:solidFill>
+      </p:bgPr>
+    </p:bg>
+    <p:spTree>
+      <p:nvGrpSpPr>
+        <p:cNvPr id="1" name=""/>
+        <p:cNvGrpSpPr/>
+        <p:nvPr/>
+      </p:nvGrpSpPr>
+      <p:grpSpPr>
+        <a:xfrm>
+          <a:off x="0" y="0"/>
+          <a:ext cx="0" cy="0"/>
+          <a:chOff x="0" y="0"/>
+          <a:chExt cx="0" cy="0"/>
+        </a:xfrm>
+      </p:grpSpPr>
+      <p:sp>
+        <p:nvSpPr>
+          <p:cNvPr id="2" name="Text 0"/>
+          <p:cNvSpPr/>
+          <p:nvPr/>
+        </p:nvSpPr>
+        <p:spPr>
+          <a:xfrm>
+            <a:off x="0" y="0"/>
+            <a:ext cx="9144000" cy="101501"/>
+          </a:xfrm>
+          <a:prstGeom prst="rect">
+            <a:avLst/>
+          </a:prstGeom>
+          <a:solidFill>
+            <a:srgbClr val="277884"/>
+          </a:solidFill>
+          <a:ln/>
+        </p:spPr>
+        <p:txBody>
+          <a:bodyPr wrap="square" rtlCol="0" anchor="ctr"/>
+          <a:lstStyle/>
+          <a:p>
+            <a:pPr indent="0" marL="0">
+              <a:buNone/>
+            </a:pPr>
+            <a:endParaRPr lang="en-US" dirty="0"/>
+          </a:p>
+        </p:txBody>
+      </p:sp>
+      <p:sp>
+        <p:nvSpPr>
+          <p:cNvPr id="3" name="Text 1"/>
+          <p:cNvSpPr/>
+          <p:nvPr/>
+        </p:nvSpPr>
+        <p:spPr>
+          <a:xfrm>
+            <a:off x="406301" y="457051"/>
+            <a:ext cx="8498026" cy="274290"/>
+          </a:xfrm>
+          <a:prstGeom prst="rect">
+            <a:avLst/>
+          </a:prstGeom>
+          <a:noFill/>
+          <a:ln/>
+        </p:spPr>
+        <p:txBody>
+          <a:bodyPr wrap="square" lIns="0" tIns="0" rIns="0" bIns="0" rtlCol="0" anchor="t"/>
+          <a:lstStyle/>
+          <a:p>
+            <a:pPr algn="l" indent="0" marL="0">
+              <a:lnSpc>
+                <a:spcPts val="2160"/>
+              </a:lnSpc>
+              <a:spcBef>
+                <a:spcPts val="600"/>
+              </a:spcBef>
+              <a:spcAft>
+                <a:spcPts val="800"/>
+              </a:spcAft>
+              <a:buNone/>
+            </a:pPr>
+            <a:r>
+              <a:rPr lang="en-US" sz="1800" b="1" dirty="0">
+                <a:solidFill>
+                  <a:srgbClr val="FE4447"/>
+                </a:solidFill>
+                <a:latin typeface="Georgia" pitchFamily="34" charset="0"/>
+                <a:ea typeface="Georgia" pitchFamily="34" charset="-122"/>
+                <a:cs typeface="Georgia" pitchFamily="34" charset="-120"/>
+              </a:rPr>
+              <a:t>Homework</a:t>
+            </a:r>
+            <a:endParaRPr lang="en-US" sz="1800" dirty="0"/>
+          </a:p>
+        </p:txBody>
+      </p:sp>
+      <p:sp>
+        <p:nvSpPr>
+          <p:cNvPr id="4" name="Text 2"/>
+          <p:cNvSpPr/>
+          <p:nvPr/>
+        </p:nvSpPr>
+        <p:spPr>
+          <a:xfrm>
+            <a:off x="634901" y="883593"/>
+            <a:ext cx="8102798" cy="525661"/>
+          </a:xfrm>
+          <a:prstGeom prst="rect">
+            <a:avLst/>
+          </a:prstGeom>
+          <a:noFill/>
+          <a:ln/>
+        </p:spPr>
+        <p:txBody>
+          <a:bodyPr wrap="square" lIns="0" tIns="0" rIns="0" bIns="0" rtlCol="0" anchor="t"/>
+          <a:lstStyle/>
+          <a:p>
+            <a:pPr algn="l" marL="342900" indent="-342900">
+              <a:lnSpc>
+                <a:spcPts val="1620"/>
+              </a:lnSpc>
+              <a:spcAft>
+                <a:spcPts val="300"/>
+              </a:spcAft>
+              <a:buSzPct val="100000"/>
+              <a:buChar char="•"/>
+            </a:pPr>
+            <a:r>
+              <a:rPr lang="en-US" sz="1200" dirty="0">
+                <a:solidFill>
+                  <a:srgbClr val="1C2833"/>
+                </a:solidFill>
+                <a:latin typeface="Arial" pitchFamily="34" charset="0"/>
+                <a:ea typeface="Arial" pitchFamily="34" charset="-122"/>
+                <a:cs typeface="Arial" pitchFamily="34" charset="-120"/>
+              </a:rPr>
+              <a:t>Continue the Moon diary.</a:t>
+            </a:r>
+            <a:endParaRPr lang="en-US" sz="1200" dirty="0"/>
+          </a:p>
+          <a:p>
+            <a:pPr algn="l" marL="342900" indent="-342900">
+              <a:lnSpc>
+                <a:spcPts val="1620"/>
+              </a:lnSpc>
+              <a:spcAft>
+                <a:spcPts val="300"/>
+              </a:spcAft>
+              <a:buSzPct val="100000"/>
+              <a:buChar char="•"/>
+            </a:pPr>
+            <a:r>
+              <a:rPr lang="en-US" sz="1200" dirty="0">
+                <a:solidFill>
+                  <a:srgbClr val="1C2833"/>
+                </a:solidFill>
+                <a:latin typeface="Arial" pitchFamily="34" charset="0"/>
+                <a:ea typeface="Arial" pitchFamily="34" charset="-122"/>
+                <a:cs typeface="Arial" pitchFamily="34" charset="-120"/>
+              </a:rPr>
+              <a:t>Look up: what is the date of the next solar eclipse and the next lunar eclipse visible from India? Note in your workbook.</a:t>
             </a:r>
             <a:endParaRPr lang="en-US" sz="1200" dirty="0"/>
           </a:p>
@@ -3290,7 +6668,7 @@
                 <a:ea typeface="Georgia" pitchFamily="34" charset="-122"/>
                 <a:cs typeface="Georgia" pitchFamily="34" charset="-120"/>
               </a:rPr>
-              <a:t>Materials</a:t>
+              <a:t>Learning objective</a:t>
             </a:r>
             <a:endParaRPr lang="en-US" sz="1800" dirty="0"/>
           </a:p>
@@ -3338,7 +6716,1007 @@
                 <a:ea typeface="Arial" pitchFamily="34" charset="-122"/>
                 <a:cs typeface="Arial" pitchFamily="34" charset="-120"/>
               </a:rPr>
-              <a:t>– A small globe (or a large white ball — the Earth) – A smaller dark ball (a tennis ball, painted dark — the Moon) – A torch (the Sun) – Two metres of string (to mark orbits) – The activity-02 handout for the diagramming exercise – Notebooks</a:t>
+              <a:t>Students will explain (with a diagram) why solar eclipses occur on </a:t>
+            </a:r>
+            <a:pPr algn="l" indent="0" marL="0">
+              <a:lnSpc>
+                <a:spcPts val="1680"/>
+              </a:lnSpc>
+              <a:spcBef>
+                <a:spcPts val="300"/>
+              </a:spcBef>
+              <a:spcAft>
+                <a:spcPts val="300"/>
+              </a:spcAft>
+              <a:buNone/>
+            </a:pPr>
+            <a:r>
+              <a:rPr lang="en-US" sz="1200" i="1" dirty="0">
+                <a:solidFill>
+                  <a:srgbClr val="1C2833"/>
+                </a:solidFill>
+                <a:latin typeface="Arial" pitchFamily="34" charset="0"/>
+                <a:ea typeface="Arial" pitchFamily="34" charset="-122"/>
+                <a:cs typeface="Arial" pitchFamily="34" charset="-120"/>
+              </a:rPr>
+              <a:t>amāvasyā</a:t>
+            </a:r>
+            <a:pPr algn="l" indent="0" marL="0">
+              <a:lnSpc>
+                <a:spcPts val="1680"/>
+              </a:lnSpc>
+              <a:spcBef>
+                <a:spcPts val="300"/>
+              </a:spcBef>
+              <a:spcAft>
+                <a:spcPts val="300"/>
+              </a:spcAft>
+              <a:buNone/>
+            </a:pPr>
+            <a:r>
+              <a:rPr lang="en-US" sz="1200" dirty="0">
+                <a:solidFill>
+                  <a:srgbClr val="1C2833"/>
+                </a:solidFill>
+                <a:latin typeface="Arial" pitchFamily="34" charset="0"/>
+                <a:ea typeface="Arial" pitchFamily="34" charset="-122"/>
+                <a:cs typeface="Arial" pitchFamily="34" charset="-120"/>
+              </a:rPr>
+              <a:t> and lunar eclipses on </a:t>
+            </a:r>
+            <a:pPr algn="l" indent="0" marL="0">
+              <a:lnSpc>
+                <a:spcPts val="1680"/>
+              </a:lnSpc>
+              <a:spcBef>
+                <a:spcPts val="300"/>
+              </a:spcBef>
+              <a:spcAft>
+                <a:spcPts val="300"/>
+              </a:spcAft>
+              <a:buNone/>
+            </a:pPr>
+            <a:r>
+              <a:rPr lang="en-US" sz="1200" i="1" dirty="0">
+                <a:solidFill>
+                  <a:srgbClr val="1C2833"/>
+                </a:solidFill>
+                <a:latin typeface="Arial" pitchFamily="34" charset="0"/>
+                <a:ea typeface="Arial" pitchFamily="34" charset="-122"/>
+                <a:cs typeface="Arial" pitchFamily="34" charset="-120"/>
+              </a:rPr>
+              <a:t>pūrṇimā</a:t>
+            </a:r>
+            <a:pPr algn="l" indent="0" marL="0">
+              <a:lnSpc>
+                <a:spcPts val="1680"/>
+              </a:lnSpc>
+              <a:spcBef>
+                <a:spcPts val="300"/>
+              </a:spcBef>
+              <a:spcAft>
+                <a:spcPts val="300"/>
+              </a:spcAft>
+              <a:buNone/>
+            </a:pPr>
+            <a:r>
+              <a:rPr lang="en-US" sz="1200" dirty="0">
+                <a:solidFill>
+                  <a:srgbClr val="1C2833"/>
+                </a:solidFill>
+                <a:latin typeface="Arial" pitchFamily="34" charset="0"/>
+                <a:ea typeface="Arial" pitchFamily="34" charset="-122"/>
+                <a:cs typeface="Arial" pitchFamily="34" charset="-120"/>
+              </a:rPr>
+              <a:t>, why eclipses do not happen every month, and what the safe ways to view a solar eclipse are.</a:t>
+            </a:r>
+            <a:endParaRPr lang="en-US" sz="1200" dirty="0"/>
+          </a:p>
+        </p:txBody>
+      </p:sp>
+      <p:sp>
+        <p:nvSpPr>
+          <p:cNvPr id="5" name="Text 3"/>
+          <p:cNvSpPr/>
+          <p:nvPr/>
+        </p:nvSpPr>
+        <p:spPr>
+          <a:xfrm>
+            <a:off x="406301" y="4434929"/>
+            <a:ext cx="8498026" cy="213271"/>
+          </a:xfrm>
+          <a:prstGeom prst="rect">
+            <a:avLst/>
+          </a:prstGeom>
+          <a:noFill/>
+          <a:ln/>
+        </p:spPr>
+        <p:txBody>
+          <a:bodyPr wrap="square" lIns="0" tIns="0" rIns="0" bIns="0" rtlCol="0" anchor="t"/>
+          <a:lstStyle/>
+          <a:p>
+            <a:pPr algn="l" indent="0" marL="0">
+              <a:lnSpc>
+                <a:spcPts val="1680"/>
+              </a:lnSpc>
+              <a:spcBef>
+                <a:spcPts val="300"/>
+              </a:spcBef>
+              <a:spcAft>
+                <a:spcPts val="300"/>
+              </a:spcAft>
+              <a:buNone/>
+            </a:pPr>
+            <a:r>
+              <a:rPr lang="en-US" sz="1200" dirty="0">
+                <a:solidFill>
+                  <a:srgbClr val="1C2833"/>
+                </a:solidFill>
+                <a:latin typeface="Arial" pitchFamily="34" charset="0"/>
+                <a:ea typeface="Arial" pitchFamily="34" charset="-122"/>
+                <a:cs typeface="Arial" pitchFamily="34" charset="-120"/>
+              </a:rPr>
+              <a:t>Middle ·  · IKS Curriculum</a:t>
+            </a:r>
+            <a:endParaRPr lang="en-US" sz="1200" dirty="0"/>
+          </a:p>
+        </p:txBody>
+      </p:sp>
+    </p:spTree>
+  </p:cSld>
+  <p:clrMapOvr>
+    <a:masterClrMapping/>
+  </p:clrMapOvr>
+</p:sld>
+</file>
+
+<file path=ppt/slides/slide20.xml><?xml version="1.0" encoding="utf-8"?>
+<p:sld xmlns:a="http://schemas.openxmlformats.org/drawingml/2006/main" xmlns:r="http://schemas.openxmlformats.org/officeDocument/2006/relationships" xmlns:p="http://schemas.openxmlformats.org/presentationml/2006/main">
+  <p:cSld name="Slide 20">
+    <p:bg>
+      <p:bgPr>
+        <a:solidFill>
+          <a:srgbClr val="FFFFFF"/>
+        </a:solidFill>
+      </p:bgPr>
+    </p:bg>
+    <p:spTree>
+      <p:nvGrpSpPr>
+        <p:cNvPr id="1" name=""/>
+        <p:cNvGrpSpPr/>
+        <p:nvPr/>
+      </p:nvGrpSpPr>
+      <p:grpSpPr>
+        <a:xfrm>
+          <a:off x="0" y="0"/>
+          <a:ext cx="0" cy="0"/>
+          <a:chOff x="0" y="0"/>
+          <a:chExt cx="0" cy="0"/>
+        </a:xfrm>
+      </p:grpSpPr>
+      <p:sp>
+        <p:nvSpPr>
+          <p:cNvPr id="2" name="Text 0"/>
+          <p:cNvSpPr/>
+          <p:nvPr/>
+        </p:nvSpPr>
+        <p:spPr>
+          <a:xfrm>
+            <a:off x="0" y="0"/>
+            <a:ext cx="9144000" cy="101501"/>
+          </a:xfrm>
+          <a:prstGeom prst="rect">
+            <a:avLst/>
+          </a:prstGeom>
+          <a:solidFill>
+            <a:srgbClr val="277884"/>
+          </a:solidFill>
+          <a:ln/>
+        </p:spPr>
+        <p:txBody>
+          <a:bodyPr wrap="square" rtlCol="0" anchor="ctr"/>
+          <a:lstStyle/>
+          <a:p>
+            <a:pPr indent="0" marL="0">
+              <a:buNone/>
+            </a:pPr>
+            <a:endParaRPr lang="en-US" dirty="0"/>
+          </a:p>
+        </p:txBody>
+      </p:sp>
+      <p:sp>
+        <p:nvSpPr>
+          <p:cNvPr id="3" name="Text 1"/>
+          <p:cNvSpPr/>
+          <p:nvPr/>
+        </p:nvSpPr>
+        <p:spPr>
+          <a:xfrm>
+            <a:off x="406301" y="457051"/>
+            <a:ext cx="8498026" cy="274290"/>
+          </a:xfrm>
+          <a:prstGeom prst="rect">
+            <a:avLst/>
+          </a:prstGeom>
+          <a:noFill/>
+          <a:ln/>
+        </p:spPr>
+        <p:txBody>
+          <a:bodyPr wrap="square" lIns="0" tIns="0" rIns="0" bIns="0" rtlCol="0" anchor="t"/>
+          <a:lstStyle/>
+          <a:p>
+            <a:pPr algn="l" indent="0" marL="0">
+              <a:lnSpc>
+                <a:spcPts val="2160"/>
+              </a:lnSpc>
+              <a:spcBef>
+                <a:spcPts val="600"/>
+              </a:spcBef>
+              <a:spcAft>
+                <a:spcPts val="800"/>
+              </a:spcAft>
+              <a:buNone/>
+            </a:pPr>
+            <a:r>
+              <a:rPr lang="en-US" sz="1800" b="1" dirty="0">
+                <a:solidFill>
+                  <a:srgbClr val="FE4447"/>
+                </a:solidFill>
+                <a:latin typeface="Georgia" pitchFamily="34" charset="0"/>
+                <a:ea typeface="Georgia" pitchFamily="34" charset="-122"/>
+                <a:cs typeface="Georgia" pitchFamily="34" charset="-120"/>
+              </a:rPr>
+              <a:t>Differentiation</a:t>
+            </a:r>
+            <a:endParaRPr lang="en-US" sz="1800" dirty="0"/>
+          </a:p>
+        </p:txBody>
+      </p:sp>
+      <p:sp>
+        <p:nvSpPr>
+          <p:cNvPr id="4" name="Text 2"/>
+          <p:cNvSpPr/>
+          <p:nvPr/>
+        </p:nvSpPr>
+        <p:spPr>
+          <a:xfrm>
+            <a:off x="634901" y="883593"/>
+            <a:ext cx="8102798" cy="1142702"/>
+          </a:xfrm>
+          <a:prstGeom prst="rect">
+            <a:avLst/>
+          </a:prstGeom>
+          <a:noFill/>
+          <a:ln/>
+        </p:spPr>
+        <p:txBody>
+          <a:bodyPr wrap="square" lIns="0" tIns="0" rIns="0" bIns="0" rtlCol="0" anchor="t"/>
+          <a:lstStyle/>
+          <a:p>
+            <a:pPr algn="l" marL="342900" indent="-342900">
+              <a:lnSpc>
+                <a:spcPts val="1620"/>
+              </a:lnSpc>
+              <a:spcAft>
+                <a:spcPts val="300"/>
+              </a:spcAft>
+              <a:buSzPct val="100000"/>
+              <a:buChar char="•"/>
+            </a:pPr>
+            <a:r>
+              <a:rPr lang="en-US" sz="1200" b="1" dirty="0">
+                <a:solidFill>
+                  <a:srgbClr val="1C2833"/>
+                </a:solidFill>
+                <a:latin typeface="Arial" pitchFamily="34" charset="0"/>
+                <a:ea typeface="Arial" pitchFamily="34" charset="-122"/>
+                <a:cs typeface="Arial" pitchFamily="34" charset="-120"/>
+              </a:rPr>
+              <a:t>One tier up:</a:t>
+            </a:r>
+            <a:pPr algn="l" indent="0" marL="0">
+              <a:lnSpc>
+                <a:spcPts val="1620"/>
+              </a:lnSpc>
+              <a:spcAft>
+                <a:spcPts val="300"/>
+              </a:spcAft>
+              <a:buNone/>
+            </a:pPr>
+            <a:r>
+              <a:rPr lang="en-US" sz="1200" dirty="0">
+                <a:solidFill>
+                  <a:srgbClr val="1C2833"/>
+                </a:solidFill>
+                <a:latin typeface="Arial" pitchFamily="34" charset="0"/>
+                <a:ea typeface="Arial" pitchFamily="34" charset="-122"/>
+                <a:cs typeface="Arial" pitchFamily="34" charset="-120"/>
+              </a:rPr>
+              <a:t> Find the dates of the nodes for this year. (The two nodes drift backward through the ecliptic — they complete one full circuit in ~18.6 years. This is the </a:t>
+            </a:r>
+            <a:pPr algn="l" indent="0" marL="0">
+              <a:lnSpc>
+                <a:spcPts val="1620"/>
+              </a:lnSpc>
+              <a:spcAft>
+                <a:spcPts val="300"/>
+              </a:spcAft>
+              <a:buNone/>
+            </a:pPr>
+            <a:r>
+              <a:rPr lang="en-US" sz="1200" i="1" dirty="0">
+                <a:solidFill>
+                  <a:srgbClr val="1C2833"/>
+                </a:solidFill>
+                <a:latin typeface="Arial" pitchFamily="34" charset="0"/>
+                <a:ea typeface="Arial" pitchFamily="34" charset="-122"/>
+                <a:cs typeface="Arial" pitchFamily="34" charset="-120"/>
+              </a:rPr>
+              <a:t>Saros cycle</a:t>
+            </a:r>
+            <a:pPr algn="l" indent="0" marL="0">
+              <a:lnSpc>
+                <a:spcPts val="1620"/>
+              </a:lnSpc>
+              <a:spcAft>
+                <a:spcPts val="300"/>
+              </a:spcAft>
+              <a:buNone/>
+            </a:pPr>
+            <a:r>
+              <a:rPr lang="en-US" sz="1200" dirty="0">
+                <a:solidFill>
+                  <a:srgbClr val="1C2833"/>
+                </a:solidFill>
+                <a:latin typeface="Arial" pitchFamily="34" charset="0"/>
+                <a:ea typeface="Arial" pitchFamily="34" charset="-122"/>
+                <a:cs typeface="Arial" pitchFamily="34" charset="-120"/>
+              </a:rPr>
+              <a:t>'s underlying mechanism.) Why does this give us "eclipse seasons" twice a year?</a:t>
+            </a:r>
+            <a:endParaRPr lang="en-US" sz="1200" dirty="0"/>
+          </a:p>
+          <a:p>
+            <a:pPr algn="l" marL="342900" indent="-342900">
+              <a:lnSpc>
+                <a:spcPts val="1620"/>
+              </a:lnSpc>
+              <a:spcAft>
+                <a:spcPts val="300"/>
+              </a:spcAft>
+              <a:buSzPct val="100000"/>
+              <a:buChar char="•"/>
+            </a:pPr>
+            <a:r>
+              <a:rPr lang="en-US" sz="1200" b="1" dirty="0">
+                <a:solidFill>
+                  <a:srgbClr val="1C2833"/>
+                </a:solidFill>
+                <a:latin typeface="Arial" pitchFamily="34" charset="0"/>
+                <a:ea typeface="Arial" pitchFamily="34" charset="-122"/>
+                <a:cs typeface="Arial" pitchFamily="34" charset="-120"/>
+              </a:rPr>
+              <a:t>One tier down:</a:t>
+            </a:r>
+            <a:pPr algn="l" indent="0" marL="0">
+              <a:lnSpc>
+                <a:spcPts val="1620"/>
+              </a:lnSpc>
+              <a:spcAft>
+                <a:spcPts val="300"/>
+              </a:spcAft>
+              <a:buNone/>
+            </a:pPr>
+            <a:r>
+              <a:rPr lang="en-US" sz="1200" dirty="0">
+                <a:solidFill>
+                  <a:srgbClr val="1C2833"/>
+                </a:solidFill>
+                <a:latin typeface="Arial" pitchFamily="34" charset="0"/>
+                <a:ea typeface="Arial" pitchFamily="34" charset="-122"/>
+                <a:cs typeface="Arial" pitchFamily="34" charset="-120"/>
+              </a:rPr>
+              <a:t> Skip the node-drift detail. Focus on: solar eclipse = amāvasyā + alignment, lunar eclipse = pūrṇimā + alignment. The "tilted orbit" is the key idea; the nodes are the precise version of it.</a:t>
+            </a:r>
+            <a:endParaRPr lang="en-US" sz="1200" dirty="0"/>
+          </a:p>
+        </p:txBody>
+      </p:sp>
+      <p:sp>
+        <p:nvSpPr>
+          <p:cNvPr id="5" name="Text 3"/>
+          <p:cNvSpPr/>
+          <p:nvPr/>
+        </p:nvSpPr>
+        <p:spPr>
+          <a:xfrm>
+            <a:off x="406301" y="4434929"/>
+            <a:ext cx="8498026" cy="213271"/>
+          </a:xfrm>
+          <a:prstGeom prst="rect">
+            <a:avLst/>
+          </a:prstGeom>
+          <a:noFill/>
+          <a:ln/>
+        </p:spPr>
+        <p:txBody>
+          <a:bodyPr wrap="square" lIns="0" tIns="0" rIns="0" bIns="0" rtlCol="0" anchor="t"/>
+          <a:lstStyle/>
+          <a:p>
+            <a:pPr algn="l" indent="0" marL="0">
+              <a:lnSpc>
+                <a:spcPts val="1680"/>
+              </a:lnSpc>
+              <a:spcBef>
+                <a:spcPts val="300"/>
+              </a:spcBef>
+              <a:spcAft>
+                <a:spcPts val="300"/>
+              </a:spcAft>
+              <a:buNone/>
+            </a:pPr>
+            <a:r>
+              <a:rPr lang="en-US" sz="1200" dirty="0">
+                <a:solidFill>
+                  <a:srgbClr val="1C2833"/>
+                </a:solidFill>
+                <a:latin typeface="Arial" pitchFamily="34" charset="0"/>
+                <a:ea typeface="Arial" pitchFamily="34" charset="-122"/>
+                <a:cs typeface="Arial" pitchFamily="34" charset="-120"/>
+              </a:rPr>
+              <a:t>Middle ·  · IKS Curriculum</a:t>
+            </a:r>
+            <a:endParaRPr lang="en-US" sz="1200" dirty="0"/>
+          </a:p>
+        </p:txBody>
+      </p:sp>
+    </p:spTree>
+  </p:cSld>
+  <p:clrMapOvr>
+    <a:masterClrMapping/>
+  </p:clrMapOvr>
+</p:sld>
+</file>
+
+<file path=ppt/slides/slide21.xml><?xml version="1.0" encoding="utf-8"?>
+<p:sld xmlns:a="http://schemas.openxmlformats.org/drawingml/2006/main" xmlns:r="http://schemas.openxmlformats.org/officeDocument/2006/relationships" xmlns:p="http://schemas.openxmlformats.org/presentationml/2006/main">
+  <p:cSld name="Slide 21">
+    <p:bg>
+      <p:bgPr>
+        <a:solidFill>
+          <a:srgbClr val="FFFFFF"/>
+        </a:solidFill>
+      </p:bgPr>
+    </p:bg>
+    <p:spTree>
+      <p:nvGrpSpPr>
+        <p:cNvPr id="1" name=""/>
+        <p:cNvGrpSpPr/>
+        <p:nvPr/>
+      </p:nvGrpSpPr>
+      <p:grpSpPr>
+        <a:xfrm>
+          <a:off x="0" y="0"/>
+          <a:ext cx="0" cy="0"/>
+          <a:chOff x="0" y="0"/>
+          <a:chExt cx="0" cy="0"/>
+        </a:xfrm>
+      </p:grpSpPr>
+      <p:sp>
+        <p:nvSpPr>
+          <p:cNvPr id="2" name="Text 0"/>
+          <p:cNvSpPr/>
+          <p:nvPr/>
+        </p:nvSpPr>
+        <p:spPr>
+          <a:xfrm>
+            <a:off x="0" y="0"/>
+            <a:ext cx="9144000" cy="101501"/>
+          </a:xfrm>
+          <a:prstGeom prst="rect">
+            <a:avLst/>
+          </a:prstGeom>
+          <a:solidFill>
+            <a:srgbClr val="277884"/>
+          </a:solidFill>
+          <a:ln/>
+        </p:spPr>
+        <p:txBody>
+          <a:bodyPr wrap="square" rtlCol="0" anchor="ctr"/>
+          <a:lstStyle/>
+          <a:p>
+            <a:pPr indent="0" marL="0">
+              <a:buNone/>
+            </a:pPr>
+            <a:endParaRPr lang="en-US" dirty="0"/>
+          </a:p>
+        </p:txBody>
+      </p:sp>
+      <p:sp>
+        <p:nvSpPr>
+          <p:cNvPr id="3" name="Text 1"/>
+          <p:cNvSpPr/>
+          <p:nvPr/>
+        </p:nvSpPr>
+        <p:spPr>
+          <a:xfrm>
+            <a:off x="406301" y="457051"/>
+            <a:ext cx="8498026" cy="274290"/>
+          </a:xfrm>
+          <a:prstGeom prst="rect">
+            <a:avLst/>
+          </a:prstGeom>
+          <a:noFill/>
+          <a:ln/>
+        </p:spPr>
+        <p:txBody>
+          <a:bodyPr wrap="square" lIns="0" tIns="0" rIns="0" bIns="0" rtlCol="0" anchor="t"/>
+          <a:lstStyle/>
+          <a:p>
+            <a:pPr algn="l" indent="0" marL="0">
+              <a:lnSpc>
+                <a:spcPts val="2160"/>
+              </a:lnSpc>
+              <a:spcBef>
+                <a:spcPts val="600"/>
+              </a:spcBef>
+              <a:spcAft>
+                <a:spcPts val="800"/>
+              </a:spcAft>
+              <a:buNone/>
+            </a:pPr>
+            <a:r>
+              <a:rPr lang="en-US" sz="1800" b="1" dirty="0">
+                <a:solidFill>
+                  <a:srgbClr val="FE4447"/>
+                </a:solidFill>
+                <a:latin typeface="Georgia" pitchFamily="34" charset="0"/>
+                <a:ea typeface="Georgia" pitchFamily="34" charset="-122"/>
+                <a:cs typeface="Georgia" pitchFamily="34" charset="-120"/>
+              </a:rPr>
+              <a:t>Teacher notes</a:t>
+            </a:r>
+            <a:endParaRPr lang="en-US" sz="1800" dirty="0"/>
+          </a:p>
+        </p:txBody>
+      </p:sp>
+      <p:sp>
+        <p:nvSpPr>
+          <p:cNvPr id="4" name="Text 2"/>
+          <p:cNvSpPr/>
+          <p:nvPr/>
+        </p:nvSpPr>
+        <p:spPr>
+          <a:xfrm>
+            <a:off x="634901" y="883593"/>
+            <a:ext cx="8102798" cy="1386483"/>
+          </a:xfrm>
+          <a:prstGeom prst="rect">
+            <a:avLst/>
+          </a:prstGeom>
+          <a:noFill/>
+          <a:ln/>
+        </p:spPr>
+        <p:txBody>
+          <a:bodyPr wrap="square" lIns="0" tIns="0" rIns="0" bIns="0" rtlCol="0" anchor="t"/>
+          <a:lstStyle/>
+          <a:p>
+            <a:pPr algn="l" marL="342900" indent="-342900">
+              <a:lnSpc>
+                <a:spcPts val="1620"/>
+              </a:lnSpc>
+              <a:spcAft>
+                <a:spcPts val="300"/>
+              </a:spcAft>
+              <a:buSzPct val="100000"/>
+              <a:buChar char="•"/>
+            </a:pPr>
+            <a:r>
+              <a:rPr lang="en-US" sz="1200" dirty="0">
+                <a:solidFill>
+                  <a:srgbClr val="1C2833"/>
+                </a:solidFill>
+                <a:latin typeface="Arial" pitchFamily="34" charset="0"/>
+                <a:ea typeface="Arial" pitchFamily="34" charset="-122"/>
+                <a:cs typeface="Arial" pitchFamily="34" charset="-120"/>
+              </a:rPr>
+              <a:t>This is the single highest-safety-risk day in the entire IKS curriculum if there's a solar eclipse during the school term. Even if there isn't one this term, drill the safety rule. Eclipses come around.</a:t>
+            </a:r>
+            <a:endParaRPr lang="en-US" sz="1200" dirty="0"/>
+          </a:p>
+          <a:p>
+            <a:pPr algn="l" marL="342900" indent="-342900">
+              <a:lnSpc>
+                <a:spcPts val="1620"/>
+              </a:lnSpc>
+              <a:spcAft>
+                <a:spcPts val="300"/>
+              </a:spcAft>
+              <a:buSzPct val="100000"/>
+              <a:buChar char="•"/>
+            </a:pPr>
+            <a:r>
+              <a:rPr lang="en-US" sz="1200" dirty="0">
+                <a:solidFill>
+                  <a:srgbClr val="1C2833"/>
+                </a:solidFill>
+                <a:latin typeface="Arial" pitchFamily="34" charset="0"/>
+                <a:ea typeface="Arial" pitchFamily="34" charset="-122"/>
+                <a:cs typeface="Arial" pitchFamily="34" charset="-120"/>
+              </a:rPr>
+              <a:t>Some students will know the </a:t>
+            </a:r>
+            <a:pPr algn="l" indent="0" marL="0">
+              <a:lnSpc>
+                <a:spcPts val="1620"/>
+              </a:lnSpc>
+              <a:spcAft>
+                <a:spcPts val="300"/>
+              </a:spcAft>
+              <a:buNone/>
+            </a:pPr>
+            <a:r>
+              <a:rPr lang="en-US" sz="1200" i="1" dirty="0">
+                <a:solidFill>
+                  <a:srgbClr val="1C2833"/>
+                </a:solidFill>
+                <a:latin typeface="Arial" pitchFamily="34" charset="0"/>
+                <a:ea typeface="Arial" pitchFamily="34" charset="-122"/>
+                <a:cs typeface="Arial" pitchFamily="34" charset="-120"/>
+              </a:rPr>
+              <a:t>Rāhu</a:t>
+            </a:r>
+            <a:pPr algn="l" indent="0" marL="0">
+              <a:lnSpc>
+                <a:spcPts val="1620"/>
+              </a:lnSpc>
+              <a:spcAft>
+                <a:spcPts val="300"/>
+              </a:spcAft>
+              <a:buNone/>
+            </a:pPr>
+            <a:r>
+              <a:rPr lang="en-US" sz="1200" dirty="0">
+                <a:solidFill>
+                  <a:srgbClr val="1C2833"/>
+                </a:solidFill>
+                <a:latin typeface="Arial" pitchFamily="34" charset="0"/>
+                <a:ea typeface="Arial" pitchFamily="34" charset="-122"/>
+                <a:cs typeface="Arial" pitchFamily="34" charset="-120"/>
+              </a:rPr>
+              <a:t> story (Rāhu the demon swallowing the Sun/Moon during eclipses). Acknowledge it as a pre-scientific narrative shared by many cultures, then return to the geometric explanation. Classical Indian astronomers like Āryabhaṭa explicitly rejected the </a:t>
+            </a:r>
+            <a:pPr algn="l" indent="0" marL="0">
+              <a:lnSpc>
+                <a:spcPts val="1620"/>
+              </a:lnSpc>
+              <a:spcAft>
+                <a:spcPts val="300"/>
+              </a:spcAft>
+              <a:buNone/>
+            </a:pPr>
+            <a:r>
+              <a:rPr lang="en-US" sz="1200" i="1" dirty="0">
+                <a:solidFill>
+                  <a:srgbClr val="1C2833"/>
+                </a:solidFill>
+                <a:latin typeface="Arial" pitchFamily="34" charset="0"/>
+                <a:ea typeface="Arial" pitchFamily="34" charset="-122"/>
+                <a:cs typeface="Arial" pitchFamily="34" charset="-120"/>
+              </a:rPr>
+              <a:t>Rāhu</a:t>
+            </a:r>
+            <a:pPr algn="l" indent="0" marL="0">
+              <a:lnSpc>
+                <a:spcPts val="1620"/>
+              </a:lnSpc>
+              <a:spcAft>
+                <a:spcPts val="300"/>
+              </a:spcAft>
+              <a:buNone/>
+            </a:pPr>
+            <a:r>
+              <a:rPr lang="en-US" sz="1200" dirty="0">
+                <a:solidFill>
+                  <a:srgbClr val="1C2833"/>
+                </a:solidFill>
+                <a:latin typeface="Arial" pitchFamily="34" charset="0"/>
+                <a:ea typeface="Arial" pitchFamily="34" charset="-122"/>
+                <a:cs typeface="Arial" pitchFamily="34" charset="-120"/>
+              </a:rPr>
+              <a:t> explanation in favour of the shadow-geometry account.</a:t>
+            </a:r>
+            <a:endParaRPr lang="en-US" sz="1200" dirty="0"/>
+          </a:p>
+          <a:p>
+            <a:pPr algn="l" marL="342900" indent="-342900">
+              <a:lnSpc>
+                <a:spcPts val="1620"/>
+              </a:lnSpc>
+              <a:spcAft>
+                <a:spcPts val="300"/>
+              </a:spcAft>
+              <a:buSzPct val="100000"/>
+              <a:buChar char="•"/>
+            </a:pPr>
+            <a:r>
+              <a:rPr lang="en-US" sz="1200" dirty="0">
+                <a:solidFill>
+                  <a:srgbClr val="1C2833"/>
+                </a:solidFill>
+                <a:latin typeface="Arial" pitchFamily="34" charset="0"/>
+                <a:ea typeface="Arial" pitchFamily="34" charset="-122"/>
+                <a:cs typeface="Arial" pitchFamily="34" charset="-120"/>
+              </a:rPr>
+              <a:t>The "5° tilt" number is the key. Repeat it. Without it, the "why not every month" question has no answer.</a:t>
+            </a:r>
+            <a:endParaRPr lang="en-US" sz="1200" dirty="0"/>
+          </a:p>
+        </p:txBody>
+      </p:sp>
+      <p:sp>
+        <p:nvSpPr>
+          <p:cNvPr id="5" name="Text 3"/>
+          <p:cNvSpPr/>
+          <p:nvPr/>
+        </p:nvSpPr>
+        <p:spPr>
+          <a:xfrm>
+            <a:off x="406301" y="4434929"/>
+            <a:ext cx="8498026" cy="213271"/>
+          </a:xfrm>
+          <a:prstGeom prst="rect">
+            <a:avLst/>
+          </a:prstGeom>
+          <a:noFill/>
+          <a:ln/>
+        </p:spPr>
+        <p:txBody>
+          <a:bodyPr wrap="square" lIns="0" tIns="0" rIns="0" bIns="0" rtlCol="0" anchor="t"/>
+          <a:lstStyle/>
+          <a:p>
+            <a:pPr algn="l" indent="0" marL="0">
+              <a:lnSpc>
+                <a:spcPts val="1680"/>
+              </a:lnSpc>
+              <a:spcBef>
+                <a:spcPts val="300"/>
+              </a:spcBef>
+              <a:spcAft>
+                <a:spcPts val="300"/>
+              </a:spcAft>
+              <a:buNone/>
+            </a:pPr>
+            <a:r>
+              <a:rPr lang="en-US" sz="1200" dirty="0">
+                <a:solidFill>
+                  <a:srgbClr val="1C2833"/>
+                </a:solidFill>
+                <a:latin typeface="Arial" pitchFamily="34" charset="0"/>
+                <a:ea typeface="Arial" pitchFamily="34" charset="-122"/>
+                <a:cs typeface="Arial" pitchFamily="34" charset="-120"/>
+              </a:rPr>
+              <a:t>Middle ·  · IKS Curriculum</a:t>
+            </a:r>
+            <a:endParaRPr lang="en-US" sz="1200" dirty="0"/>
+          </a:p>
+        </p:txBody>
+      </p:sp>
+    </p:spTree>
+  </p:cSld>
+  <p:clrMapOvr>
+    <a:masterClrMapping/>
+  </p:clrMapOvr>
+</p:sld>
+</file>
+
+<file path=ppt/slides/slide22.xml><?xml version="1.0" encoding="utf-8"?>
+<p:sld xmlns:a="http://schemas.openxmlformats.org/drawingml/2006/main" xmlns:r="http://schemas.openxmlformats.org/officeDocument/2006/relationships" xmlns:p="http://schemas.openxmlformats.org/presentationml/2006/main">
+  <p:cSld name="Slide 22">
+    <p:bg>
+      <p:bgPr>
+        <a:solidFill>
+          <a:srgbClr val="FFFFFF"/>
+        </a:solidFill>
+      </p:bgPr>
+    </p:bg>
+    <p:spTree>
+      <p:nvGrpSpPr>
+        <p:cNvPr id="1" name=""/>
+        <p:cNvGrpSpPr/>
+        <p:nvPr/>
+      </p:nvGrpSpPr>
+      <p:grpSpPr>
+        <a:xfrm>
+          <a:off x="0" y="0"/>
+          <a:ext cx="0" cy="0"/>
+          <a:chOff x="0" y="0"/>
+          <a:chExt cx="0" cy="0"/>
+        </a:xfrm>
+      </p:grpSpPr>
+      <p:sp>
+        <p:nvSpPr>
+          <p:cNvPr id="2" name="Text 0"/>
+          <p:cNvSpPr/>
+          <p:nvPr/>
+        </p:nvSpPr>
+        <p:spPr>
+          <a:xfrm>
+            <a:off x="0" y="0"/>
+            <a:ext cx="9144000" cy="101501"/>
+          </a:xfrm>
+          <a:prstGeom prst="rect">
+            <a:avLst/>
+          </a:prstGeom>
+          <a:solidFill>
+            <a:srgbClr val="277884"/>
+          </a:solidFill>
+          <a:ln/>
+        </p:spPr>
+        <p:txBody>
+          <a:bodyPr wrap="square" rtlCol="0" anchor="ctr"/>
+          <a:lstStyle/>
+          <a:p>
+            <a:pPr indent="0" marL="0">
+              <a:buNone/>
+            </a:pPr>
+            <a:endParaRPr lang="en-US" dirty="0"/>
+          </a:p>
+        </p:txBody>
+      </p:sp>
+      <p:sp>
+        <p:nvSpPr>
+          <p:cNvPr id="3" name="Text 1"/>
+          <p:cNvSpPr/>
+          <p:nvPr/>
+        </p:nvSpPr>
+        <p:spPr>
+          <a:xfrm>
+            <a:off x="406301" y="457051"/>
+            <a:ext cx="8498026" cy="274290"/>
+          </a:xfrm>
+          <a:prstGeom prst="rect">
+            <a:avLst/>
+          </a:prstGeom>
+          <a:noFill/>
+          <a:ln/>
+        </p:spPr>
+        <p:txBody>
+          <a:bodyPr wrap="square" lIns="0" tIns="0" rIns="0" bIns="0" rtlCol="0" anchor="t"/>
+          <a:lstStyle/>
+          <a:p>
+            <a:pPr algn="l" indent="0" marL="0">
+              <a:lnSpc>
+                <a:spcPts val="2160"/>
+              </a:lnSpc>
+              <a:spcBef>
+                <a:spcPts val="600"/>
+              </a:spcBef>
+              <a:spcAft>
+                <a:spcPts val="800"/>
+              </a:spcAft>
+              <a:buNone/>
+            </a:pPr>
+            <a:r>
+              <a:rPr lang="en-US" sz="1800" b="1" dirty="0">
+                <a:solidFill>
+                  <a:srgbClr val="FE4447"/>
+                </a:solidFill>
+                <a:latin typeface="Georgia" pitchFamily="34" charset="0"/>
+                <a:ea typeface="Georgia" pitchFamily="34" charset="-122"/>
+                <a:cs typeface="Georgia" pitchFamily="34" charset="-120"/>
+              </a:rPr>
+              <a:t>Citation(s) used in this lesson</a:t>
+            </a:r>
+            <a:endParaRPr lang="en-US" sz="1800" dirty="0"/>
+          </a:p>
+        </p:txBody>
+      </p:sp>
+      <p:sp>
+        <p:nvSpPr>
+          <p:cNvPr id="4" name="Text 2"/>
+          <p:cNvSpPr/>
+          <p:nvPr/>
+        </p:nvSpPr>
+        <p:spPr>
+          <a:xfrm>
+            <a:off x="634901" y="883593"/>
+            <a:ext cx="8102798" cy="731341"/>
+          </a:xfrm>
+          <a:prstGeom prst="rect">
+            <a:avLst/>
+          </a:prstGeom>
+          <a:noFill/>
+          <a:ln/>
+        </p:spPr>
+        <p:txBody>
+          <a:bodyPr wrap="square" lIns="0" tIns="0" rIns="0" bIns="0" rtlCol="0" anchor="t"/>
+          <a:lstStyle/>
+          <a:p>
+            <a:pPr algn="l" marL="342900" indent="-342900">
+              <a:lnSpc>
+                <a:spcPts val="1620"/>
+              </a:lnSpc>
+              <a:spcAft>
+                <a:spcPts val="300"/>
+              </a:spcAft>
+              <a:buSzPct val="100000"/>
+              <a:buChar char="•"/>
+            </a:pPr>
+            <a:r>
+              <a:rPr lang="en-US" sz="1200" dirty="0">
+                <a:solidFill>
+                  <a:srgbClr val="1C2833"/>
+                </a:solidFill>
+                <a:latin typeface="Arial" pitchFamily="34" charset="0"/>
+                <a:ea typeface="Arial" pitchFamily="34" charset="-122"/>
+                <a:cs typeface="Arial" pitchFamily="34" charset="-120"/>
+              </a:rPr>
+              <a:t>Paraphrase from </a:t>
+            </a:r>
+            <a:pPr algn="l" indent="0" marL="0">
+              <a:lnSpc>
+                <a:spcPts val="1620"/>
+              </a:lnSpc>
+              <a:spcAft>
+                <a:spcPts val="300"/>
+              </a:spcAft>
+              <a:buNone/>
+            </a:pPr>
+            <a:r>
+              <a:rPr lang="en-US" sz="1200" i="1" dirty="0">
+                <a:solidFill>
+                  <a:srgbClr val="1C2833"/>
+                </a:solidFill>
+                <a:latin typeface="Arial" pitchFamily="34" charset="0"/>
+                <a:ea typeface="Arial" pitchFamily="34" charset="-122"/>
+                <a:cs typeface="Arial" pitchFamily="34" charset="-120"/>
+              </a:rPr>
+              <a:t>Sūrya-siddhānta</a:t>
+            </a:r>
+            <a:pPr algn="l" indent="0" marL="0">
+              <a:lnSpc>
+                <a:spcPts val="1620"/>
+              </a:lnSpc>
+              <a:spcAft>
+                <a:spcPts val="300"/>
+              </a:spcAft>
+              <a:buNone/>
+            </a:pPr>
+            <a:r>
+              <a:rPr lang="en-US" sz="1200" dirty="0">
+                <a:solidFill>
+                  <a:srgbClr val="1C2833"/>
+                </a:solidFill>
+                <a:latin typeface="Arial" pitchFamily="34" charset="0"/>
+                <a:ea typeface="Arial" pitchFamily="34" charset="-122"/>
+                <a:cs typeface="Arial" pitchFamily="34" charset="-120"/>
+              </a:rPr>
+              <a:t>, chapters 4–5 (computation of solar and lunar eclipses): the text gives detailed algorithms for predicting eclipse timing using the geometry of the Moon's nodes. Cited by text and chapter range only.</a:t>
+            </a:r>
+            <a:endParaRPr lang="en-US" sz="1200" dirty="0"/>
+          </a:p>
+          <a:p>
+            <a:pPr algn="l" marL="342900" indent="-342900">
+              <a:lnSpc>
+                <a:spcPts val="1620"/>
+              </a:lnSpc>
+              <a:spcAft>
+                <a:spcPts val="300"/>
+              </a:spcAft>
+              <a:buSzPct val="100000"/>
+              <a:buChar char="•"/>
+            </a:pPr>
+            <a:r>
+              <a:rPr lang="en-US" sz="1200" dirty="0">
+                <a:solidFill>
+                  <a:srgbClr val="1C2833"/>
+                </a:solidFill>
+                <a:latin typeface="Arial" pitchFamily="34" charset="0"/>
+                <a:ea typeface="Arial" pitchFamily="34" charset="-122"/>
+                <a:cs typeface="Arial" pitchFamily="34" charset="-120"/>
+              </a:rPr>
+              <a:t>Modern reference: NASA's eclipse pages (search "NASA Eclipse Website" — official, free).</a:t>
             </a:r>
             <a:endParaRPr lang="en-US" sz="1200" dirty="0"/>
           </a:p>
@@ -3496,7 +7874,7 @@
                 <a:ea typeface="Georgia" pitchFamily="34" charset="-122"/>
                 <a:cs typeface="Georgia" pitchFamily="34" charset="-120"/>
               </a:rPr>
-              <a:t>Vocabulary introduced today</a:t>
+              <a:t>Materials</a:t>
             </a:r>
             <a:endParaRPr lang="en-US" sz="1800" dirty="0"/>
           </a:p>
@@ -3511,7 +7889,7 @@
         <p:spPr>
           <a:xfrm>
             <a:off x="634901" y="883593"/>
-            <a:ext cx="8102798" cy="975122"/>
+            <a:ext cx="8102798" cy="1500783"/>
           </a:xfrm>
           <a:prstGeom prst="rect">
             <a:avLst/>
@@ -3534,26 +7912,6 @@
               <a:buChar char="•"/>
             </a:pPr>
             <a:r>
-              <a:rPr lang="en-US" sz="1200" i="1" dirty="0">
-                <a:solidFill>
-                  <a:srgbClr val="1C2833"/>
-                </a:solidFill>
-                <a:latin typeface="Arial" pitchFamily="34" charset="0"/>
-                <a:ea typeface="Arial" pitchFamily="34" charset="-122"/>
-                <a:cs typeface="Arial" pitchFamily="34" charset="-120"/>
-              </a:rPr>
-              <a:t>eclipse</a:t>
-            </a:r>
-            <a:pPr algn="l" indent="0" marL="0">
-              <a:lnSpc>
-                <a:spcPts val="1620"/>
-              </a:lnSpc>
-              <a:spcAft>
-                <a:spcPts val="300"/>
-              </a:spcAft>
-              <a:buNone/>
-            </a:pPr>
-            <a:r>
               <a:rPr lang="en-US" sz="1200" dirty="0">
                 <a:solidFill>
                   <a:srgbClr val="1C2833"/>
@@ -3562,7 +7920,7 @@
                 <a:ea typeface="Arial" pitchFamily="34" charset="-122"/>
                 <a:cs typeface="Arial" pitchFamily="34" charset="-120"/>
               </a:rPr>
-              <a:t> — when one body's shadow falls on another (lunar eclipse: Earth's shadow on Moon) or one body passes between two others (solar eclipse: Moon between Sun and Earth).</a:t>
+              <a:t>A small globe (or a large white ball — the Earth)</a:t>
             </a:r>
             <a:endParaRPr lang="en-US" sz="1200" dirty="0"/>
           </a:p>
@@ -3578,26 +7936,6 @@
               <a:buChar char="•"/>
             </a:pPr>
             <a:r>
-              <a:rPr lang="en-US" sz="1200" i="1" dirty="0">
-                <a:solidFill>
-                  <a:srgbClr val="1C2833"/>
-                </a:solidFill>
-                <a:latin typeface="Arial" pitchFamily="34" charset="0"/>
-                <a:ea typeface="Arial" pitchFamily="34" charset="-122"/>
-                <a:cs typeface="Arial" pitchFamily="34" charset="-120"/>
-              </a:rPr>
-              <a:t>ecliptic plane</a:t>
-            </a:r>
-            <a:pPr algn="l" indent="0" marL="0">
-              <a:lnSpc>
-                <a:spcPts val="1620"/>
-              </a:lnSpc>
-              <a:spcAft>
-                <a:spcPts val="300"/>
-              </a:spcAft>
-              <a:buNone/>
-            </a:pPr>
-            <a:r>
               <a:rPr lang="en-US" sz="1200" dirty="0">
                 <a:solidFill>
                   <a:srgbClr val="1C2833"/>
@@ -3606,7 +7944,7 @@
                 <a:ea typeface="Arial" pitchFamily="34" charset="-122"/>
                 <a:cs typeface="Arial" pitchFamily="34" charset="-120"/>
               </a:rPr>
-              <a:t> — the plane of Earth's orbit around the Sun.</a:t>
+              <a:t>A smaller dark ball (a tennis ball, painted dark — the Moon)</a:t>
             </a:r>
             <a:endParaRPr lang="en-US" sz="1200" dirty="0"/>
           </a:p>
@@ -3622,24 +7960,28 @@
               <a:buChar char="•"/>
             </a:pPr>
             <a:r>
-              <a:rPr lang="en-US" sz="1200" i="1" dirty="0">
-                <a:solidFill>
-                  <a:srgbClr val="1C2833"/>
-                </a:solidFill>
-                <a:latin typeface="Arial" pitchFamily="34" charset="0"/>
-                <a:ea typeface="Arial" pitchFamily="34" charset="-122"/>
-                <a:cs typeface="Arial" pitchFamily="34" charset="-120"/>
-              </a:rPr>
-              <a:t>nodes</a:t>
-            </a:r>
-            <a:pPr algn="l" indent="0" marL="0">
+              <a:rPr lang="en-US" sz="1200" dirty="0">
+                <a:solidFill>
+                  <a:srgbClr val="1C2833"/>
+                </a:solidFill>
+                <a:latin typeface="Arial" pitchFamily="34" charset="0"/>
+                <a:ea typeface="Arial" pitchFamily="34" charset="-122"/>
+                <a:cs typeface="Arial" pitchFamily="34" charset="-120"/>
+              </a:rPr>
+              <a:t>A torch (the Sun)</a:t>
+            </a:r>
+            <a:endParaRPr lang="en-US" sz="1200" dirty="0"/>
+          </a:p>
+          <a:p>
+            <a:pPr algn="l" marL="342900" indent="-342900">
               <a:lnSpc>
                 <a:spcPts val="1620"/>
               </a:lnSpc>
               <a:spcAft>
                 <a:spcPts val="300"/>
               </a:spcAft>
-              <a:buNone/>
+              <a:buSzPct val="100000"/>
+              <a:buChar char="•"/>
             </a:pPr>
             <a:r>
               <a:rPr lang="en-US" sz="1200" dirty="0">
@@ -3650,7 +7992,55 @@
                 <a:ea typeface="Arial" pitchFamily="34" charset="-122"/>
                 <a:cs typeface="Arial" pitchFamily="34" charset="-120"/>
               </a:rPr>
-              <a:t> — the two points where the Moon's orbit crosses the ecliptic plane.</a:t>
+              <a:t>Two metres of string (to mark orbits)</a:t>
+            </a:r>
+            <a:endParaRPr lang="en-US" sz="1200" dirty="0"/>
+          </a:p>
+          <a:p>
+            <a:pPr algn="l" marL="342900" indent="-342900">
+              <a:lnSpc>
+                <a:spcPts val="1620"/>
+              </a:lnSpc>
+              <a:spcAft>
+                <a:spcPts val="300"/>
+              </a:spcAft>
+              <a:buSzPct val="100000"/>
+              <a:buChar char="•"/>
+            </a:pPr>
+            <a:r>
+              <a:rPr lang="en-US" sz="1200" dirty="0">
+                <a:solidFill>
+                  <a:srgbClr val="1C2833"/>
+                </a:solidFill>
+                <a:latin typeface="Arial" pitchFamily="34" charset="0"/>
+                <a:ea typeface="Arial" pitchFamily="34" charset="-122"/>
+                <a:cs typeface="Arial" pitchFamily="34" charset="-120"/>
+              </a:rPr>
+              <a:t>The activity-02 handout for the diagramming exercise</a:t>
+            </a:r>
+            <a:endParaRPr lang="en-US" sz="1200" dirty="0"/>
+          </a:p>
+          <a:p>
+            <a:pPr algn="l" marL="342900" indent="-342900">
+              <a:lnSpc>
+                <a:spcPts val="1620"/>
+              </a:lnSpc>
+              <a:spcAft>
+                <a:spcPts val="300"/>
+              </a:spcAft>
+              <a:buSzPct val="100000"/>
+              <a:buChar char="•"/>
+            </a:pPr>
+            <a:r>
+              <a:rPr lang="en-US" sz="1200" dirty="0">
+                <a:solidFill>
+                  <a:srgbClr val="1C2833"/>
+                </a:solidFill>
+                <a:latin typeface="Arial" pitchFamily="34" charset="0"/>
+                <a:ea typeface="Arial" pitchFamily="34" charset="-122"/>
+                <a:cs typeface="Arial" pitchFamily="34" charset="-120"/>
+              </a:rPr>
+              <a:t>Notebooks</a:t>
             </a:r>
             <a:endParaRPr lang="en-US" sz="1200" dirty="0"/>
           </a:p>
@@ -3808,7 +8198,7 @@
                 <a:ea typeface="Georgia" pitchFamily="34" charset="-122"/>
                 <a:cs typeface="Georgia" pitchFamily="34" charset="-120"/>
               </a:rPr>
-              <a:t>Lesson flow</a:t>
+              <a:t>Vocabulary introduced today</a:t>
             </a:r>
             <a:endParaRPr lang="en-US" sz="1800" dirty="0"/>
           </a:p>
@@ -3817,6 +8207,160 @@
       <p:sp>
         <p:nvSpPr>
           <p:cNvPr id="4" name="Text 2"/>
+          <p:cNvSpPr/>
+          <p:nvPr/>
+        </p:nvSpPr>
+        <p:spPr>
+          <a:xfrm>
+            <a:off x="634901" y="883593"/>
+            <a:ext cx="8102798" cy="975122"/>
+          </a:xfrm>
+          <a:prstGeom prst="rect">
+            <a:avLst/>
+          </a:prstGeom>
+          <a:noFill/>
+          <a:ln/>
+        </p:spPr>
+        <p:txBody>
+          <a:bodyPr wrap="square" lIns="0" tIns="0" rIns="0" bIns="0" rtlCol="0" anchor="t"/>
+          <a:lstStyle/>
+          <a:p>
+            <a:pPr algn="l" marL="342900" indent="-342900">
+              <a:lnSpc>
+                <a:spcPts val="1620"/>
+              </a:lnSpc>
+              <a:spcAft>
+                <a:spcPts val="300"/>
+              </a:spcAft>
+              <a:buSzPct val="100000"/>
+              <a:buChar char="•"/>
+            </a:pPr>
+            <a:r>
+              <a:rPr lang="en-US" sz="1200" i="1" dirty="0">
+                <a:solidFill>
+                  <a:srgbClr val="1C2833"/>
+                </a:solidFill>
+                <a:latin typeface="Arial" pitchFamily="34" charset="0"/>
+                <a:ea typeface="Arial" pitchFamily="34" charset="-122"/>
+                <a:cs typeface="Arial" pitchFamily="34" charset="-120"/>
+              </a:rPr>
+              <a:t>eclipse</a:t>
+            </a:r>
+            <a:pPr algn="l" indent="0" marL="0">
+              <a:lnSpc>
+                <a:spcPts val="1620"/>
+              </a:lnSpc>
+              <a:spcAft>
+                <a:spcPts val="300"/>
+              </a:spcAft>
+              <a:buNone/>
+            </a:pPr>
+            <a:r>
+              <a:rPr lang="en-US" sz="1200" dirty="0">
+                <a:solidFill>
+                  <a:srgbClr val="1C2833"/>
+                </a:solidFill>
+                <a:latin typeface="Arial" pitchFamily="34" charset="0"/>
+                <a:ea typeface="Arial" pitchFamily="34" charset="-122"/>
+                <a:cs typeface="Arial" pitchFamily="34" charset="-120"/>
+              </a:rPr>
+              <a:t> — when one body's shadow falls on another (lunar eclipse: Earth's shadow on Moon) or one body passes between two others (solar eclipse: Moon between Sun and Earth).</a:t>
+            </a:r>
+            <a:endParaRPr lang="en-US" sz="1200" dirty="0"/>
+          </a:p>
+          <a:p>
+            <a:pPr algn="l" marL="342900" indent="-342900">
+              <a:lnSpc>
+                <a:spcPts val="1620"/>
+              </a:lnSpc>
+              <a:spcAft>
+                <a:spcPts val="300"/>
+              </a:spcAft>
+              <a:buSzPct val="100000"/>
+              <a:buChar char="•"/>
+            </a:pPr>
+            <a:r>
+              <a:rPr lang="en-US" sz="1200" i="1" dirty="0">
+                <a:solidFill>
+                  <a:srgbClr val="1C2833"/>
+                </a:solidFill>
+                <a:latin typeface="Arial" pitchFamily="34" charset="0"/>
+                <a:ea typeface="Arial" pitchFamily="34" charset="-122"/>
+                <a:cs typeface="Arial" pitchFamily="34" charset="-120"/>
+              </a:rPr>
+              <a:t>ecliptic plane</a:t>
+            </a:r>
+            <a:pPr algn="l" indent="0" marL="0">
+              <a:lnSpc>
+                <a:spcPts val="1620"/>
+              </a:lnSpc>
+              <a:spcAft>
+                <a:spcPts val="300"/>
+              </a:spcAft>
+              <a:buNone/>
+            </a:pPr>
+            <a:r>
+              <a:rPr lang="en-US" sz="1200" dirty="0">
+                <a:solidFill>
+                  <a:srgbClr val="1C2833"/>
+                </a:solidFill>
+                <a:latin typeface="Arial" pitchFamily="34" charset="0"/>
+                <a:ea typeface="Arial" pitchFamily="34" charset="-122"/>
+                <a:cs typeface="Arial" pitchFamily="34" charset="-120"/>
+              </a:rPr>
+              <a:t> — the plane of Earth's orbit around the Sun.</a:t>
+            </a:r>
+            <a:endParaRPr lang="en-US" sz="1200" dirty="0"/>
+          </a:p>
+          <a:p>
+            <a:pPr algn="l" marL="342900" indent="-342900">
+              <a:lnSpc>
+                <a:spcPts val="1620"/>
+              </a:lnSpc>
+              <a:spcAft>
+                <a:spcPts val="300"/>
+              </a:spcAft>
+              <a:buSzPct val="100000"/>
+              <a:buChar char="•"/>
+            </a:pPr>
+            <a:r>
+              <a:rPr lang="en-US" sz="1200" i="1" dirty="0">
+                <a:solidFill>
+                  <a:srgbClr val="1C2833"/>
+                </a:solidFill>
+                <a:latin typeface="Arial" pitchFamily="34" charset="0"/>
+                <a:ea typeface="Arial" pitchFamily="34" charset="-122"/>
+                <a:cs typeface="Arial" pitchFamily="34" charset="-120"/>
+              </a:rPr>
+              <a:t>nodes</a:t>
+            </a:r>
+            <a:pPr algn="l" indent="0" marL="0">
+              <a:lnSpc>
+                <a:spcPts val="1620"/>
+              </a:lnSpc>
+              <a:spcAft>
+                <a:spcPts val="300"/>
+              </a:spcAft>
+              <a:buNone/>
+            </a:pPr>
+            <a:r>
+              <a:rPr lang="en-US" sz="1200" dirty="0">
+                <a:solidFill>
+                  <a:srgbClr val="1C2833"/>
+                </a:solidFill>
+                <a:latin typeface="Arial" pitchFamily="34" charset="0"/>
+                <a:ea typeface="Arial" pitchFamily="34" charset="-122"/>
+                <a:cs typeface="Arial" pitchFamily="34" charset="-120"/>
+              </a:rPr>
+              <a:t> — the two points where the Moon's orbit crosses the ecliptic plane.</a:t>
+            </a:r>
+            <a:endParaRPr lang="en-US" sz="1200" dirty="0"/>
+          </a:p>
+        </p:txBody>
+      </p:sp>
+      <p:sp>
+        <p:nvSpPr>
+          <p:cNvPr id="5" name="Text 3"/>
           <p:cNvSpPr/>
           <p:nvPr/>
         </p:nvSpPr>
@@ -3966,7 +8510,7 @@
                 <a:ea typeface="Georgia" pitchFamily="34" charset="-122"/>
                 <a:cs typeface="Georgia" pitchFamily="34" charset="-120"/>
               </a:rPr>
-              <a:t>Warm-up (5 min)</a:t>
+              <a:t>Lesson flow</a:t>
             </a:r>
             <a:endParaRPr lang="en-US" sz="1800" dirty="0"/>
           </a:p>
@@ -3975,146 +8519,6 @@
       <p:sp>
         <p:nvSpPr>
           <p:cNvPr id="4" name="Text 2"/>
-          <p:cNvSpPr/>
-          <p:nvPr/>
-        </p:nvSpPr>
-        <p:spPr>
-          <a:xfrm>
-            <a:off x="406301" y="870942"/>
-            <a:ext cx="8498026" cy="213271"/>
-          </a:xfrm>
-          <a:prstGeom prst="rect">
-            <a:avLst/>
-          </a:prstGeom>
-          <a:noFill/>
-          <a:ln/>
-        </p:spPr>
-        <p:txBody>
-          <a:bodyPr wrap="square" lIns="0" tIns="0" rIns="0" bIns="0" rtlCol="0" anchor="t"/>
-          <a:lstStyle/>
-          <a:p>
-            <a:pPr algn="l" indent="0" marL="0">
-              <a:lnSpc>
-                <a:spcPts val="1680"/>
-              </a:lnSpc>
-              <a:spcBef>
-                <a:spcPts val="300"/>
-              </a:spcBef>
-              <a:spcAft>
-                <a:spcPts val="300"/>
-              </a:spcAft>
-              <a:buNone/>
-            </a:pPr>
-            <a:r>
-              <a:rPr lang="en-US" sz="1200" dirty="0">
-                <a:solidFill>
-                  <a:srgbClr val="1C2833"/>
-                </a:solidFill>
-                <a:latin typeface="Arial" pitchFamily="34" charset="0"/>
-                <a:ea typeface="Arial" pitchFamily="34" charset="-122"/>
-                <a:cs typeface="Arial" pitchFamily="34" charset="-120"/>
-              </a:rPr>
-              <a:t>– Daily prompt: </a:t>
-            </a:r>
-            <a:pPr algn="l" indent="0" marL="0">
-              <a:lnSpc>
-                <a:spcPts val="1680"/>
-              </a:lnSpc>
-              <a:spcBef>
-                <a:spcPts val="300"/>
-              </a:spcBef>
-              <a:spcAft>
-                <a:spcPts val="300"/>
-              </a:spcAft>
-              <a:buNone/>
-            </a:pPr>
-            <a:r>
-              <a:rPr lang="en-US" sz="1200" i="1" dirty="0">
-                <a:solidFill>
-                  <a:srgbClr val="1C2833"/>
-                </a:solidFill>
-                <a:latin typeface="Arial" pitchFamily="34" charset="0"/>
-                <a:ea typeface="Arial" pitchFamily="34" charset="-122"/>
-                <a:cs typeface="Arial" pitchFamily="34" charset="-120"/>
-              </a:rPr>
-              <a:t>"Did you see the Moon last night? What tithi?"</a:t>
-            </a:r>
-            <a:pPr algn="l" indent="0" marL="0">
-              <a:lnSpc>
-                <a:spcPts val="1680"/>
-              </a:lnSpc>
-              <a:spcBef>
-                <a:spcPts val="300"/>
-              </a:spcBef>
-              <a:spcAft>
-                <a:spcPts val="300"/>
-              </a:spcAft>
-              <a:buNone/>
-            </a:pPr>
-            <a:r>
-              <a:rPr lang="en-US" sz="1200" dirty="0">
-                <a:solidFill>
-                  <a:srgbClr val="1C2833"/>
-                </a:solidFill>
-                <a:latin typeface="Arial" pitchFamily="34" charset="0"/>
-                <a:ea typeface="Arial" pitchFamily="34" charset="-122"/>
-                <a:cs typeface="Arial" pitchFamily="34" charset="-120"/>
-              </a:rPr>
-              <a:t> — 2 students share.</a:t>
-            </a:r>
-            <a:endParaRPr lang="en-US" sz="1200" dirty="0"/>
-          </a:p>
-        </p:txBody>
-      </p:sp>
-      <p:sp>
-        <p:nvSpPr>
-          <p:cNvPr id="5" name="Text 3"/>
-          <p:cNvSpPr/>
-          <p:nvPr/>
-        </p:nvSpPr>
-        <p:spPr>
-          <a:xfrm>
-            <a:off x="634901" y="1173063"/>
-            <a:ext cx="8102798" cy="487561"/>
-          </a:xfrm>
-          <a:prstGeom prst="rect">
-            <a:avLst/>
-          </a:prstGeom>
-          <a:noFill/>
-          <a:ln/>
-        </p:spPr>
-        <p:txBody>
-          <a:bodyPr wrap="square" lIns="0" tIns="0" rIns="0" bIns="0" rtlCol="0" anchor="t"/>
-          <a:lstStyle/>
-          <a:p>
-            <a:pPr algn="l" marL="342900" indent="-342900">
-              <a:lnSpc>
-                <a:spcPts val="1620"/>
-              </a:lnSpc>
-              <a:spcAft>
-                <a:spcPts val="300"/>
-              </a:spcAft>
-              <a:buSzPct val="100000"/>
-              <a:buChar char="•"/>
-            </a:pPr>
-            <a:r>
-              <a:rPr lang="en-US" sz="1200" i="1" dirty="0">
-                <a:solidFill>
-                  <a:srgbClr val="1C2833"/>
-                </a:solidFill>
-                <a:latin typeface="Arial" pitchFamily="34" charset="0"/>
-                <a:ea typeface="Arial" pitchFamily="34" charset="-122"/>
-                <a:cs typeface="Arial" pitchFamily="34" charset="-120"/>
-              </a:rPr>
-              <a:t>"You have a Moon diary now. Has any night's Moon been completely covered by Earth's shadow? Probably not. Why not? That's today."</a:t>
-            </a:r>
-            <a:endParaRPr lang="en-US" sz="1200" dirty="0"/>
-          </a:p>
-        </p:txBody>
-      </p:sp>
-      <p:sp>
-        <p:nvSpPr>
-          <p:cNvPr id="6" name="Text 4"/>
           <p:cNvSpPr/>
           <p:nvPr/>
         </p:nvSpPr>
@@ -4264,7 +8668,7 @@
                 <a:ea typeface="Georgia" pitchFamily="34" charset="-122"/>
                 <a:cs typeface="Georgia" pitchFamily="34" charset="-120"/>
               </a:rPr>
-              <a:t>Activity (10 min) — Diagram the geometry</a:t>
+              <a:t>Warm-up (5 min)</a:t>
             </a:r>
             <a:endParaRPr lang="en-US" sz="1800" dirty="0"/>
           </a:p>
@@ -4278,8 +8682,8 @@
         </p:nvSpPr>
         <p:spPr>
           <a:xfrm>
-            <a:off x="406301" y="870942"/>
-            <a:ext cx="8498026" cy="222796"/>
+            <a:off x="634901" y="883593"/>
+            <a:ext cx="8102798" cy="731341"/>
           </a:xfrm>
           <a:prstGeom prst="rect">
             <a:avLst/>
@@ -4291,100 +8695,6 @@
           <a:bodyPr wrap="square" lIns="0" tIns="0" rIns="0" bIns="0" rtlCol="0" anchor="t"/>
           <a:lstStyle/>
           <a:p>
-            <a:pPr algn="l" indent="0" marL="0">
-              <a:lnSpc>
-                <a:spcPts val="1680"/>
-              </a:lnSpc>
-              <a:spcBef>
-                <a:spcPts val="300"/>
-              </a:spcBef>
-              <a:spcAft>
-                <a:spcPts val="300"/>
-              </a:spcAft>
-              <a:buNone/>
-            </a:pPr>
-            <a:r>
-              <a:rPr lang="en-US" sz="1200" dirty="0">
-                <a:solidFill>
-                  <a:srgbClr val="1C2833"/>
-                </a:solidFill>
-                <a:latin typeface="Arial" pitchFamily="34" charset="0"/>
-                <a:ea typeface="Arial" pitchFamily="34" charset="-122"/>
-                <a:cs typeface="Arial" pitchFamily="34" charset="-120"/>
-              </a:rPr>
-              <a:t>This is </a:t>
-            </a:r>
-            <a:pPr algn="l" indent="0" marL="0">
-              <a:lnSpc>
-                <a:spcPts val="1680"/>
-              </a:lnSpc>
-              <a:spcBef>
-                <a:spcPts val="300"/>
-              </a:spcBef>
-              <a:spcAft>
-                <a:spcPts val="300"/>
-              </a:spcAft>
-              <a:buNone/>
-            </a:pPr>
-            <a:r>
-              <a:rPr lang="en-US" sz="1200" dirty="0">
-                <a:solidFill>
-                  <a:srgbClr val="1C2833"/>
-                </a:solidFill>
-                <a:latin typeface="Arial" pitchFamily="34" charset="0"/>
-                <a:ea typeface="Arial" pitchFamily="34" charset="-122"/>
-                <a:cs typeface="Arial" pitchFamily="34" charset="-120"/>
-              </a:rPr>
-              <a:t>activities/activity-02-eclipse-geometry.md</a:t>
-            </a:r>
-            <a:pPr algn="l" indent="0" marL="0">
-              <a:lnSpc>
-                <a:spcPts val="1680"/>
-              </a:lnSpc>
-              <a:spcBef>
-                <a:spcPts val="300"/>
-              </a:spcBef>
-              <a:spcAft>
-                <a:spcPts val="300"/>
-              </a:spcAft>
-              <a:buNone/>
-            </a:pPr>
-            <a:r>
-              <a:rPr lang="en-US" sz="1200" dirty="0">
-                <a:solidFill>
-                  <a:srgbClr val="1C2833"/>
-                </a:solidFill>
-                <a:latin typeface="Arial" pitchFamily="34" charset="0"/>
-                <a:ea typeface="Arial" pitchFamily="34" charset="-122"/>
-                <a:cs typeface="Arial" pitchFamily="34" charset="-120"/>
-              </a:rPr>
-              <a:t> in full. Students:</a:t>
-            </a:r>
-            <a:endParaRPr lang="en-US" sz="1200" dirty="0"/>
-          </a:p>
-        </p:txBody>
-      </p:sp>
-      <p:sp>
-        <p:nvSpPr>
-          <p:cNvPr id="5" name="Text 3"/>
-          <p:cNvSpPr/>
-          <p:nvPr/>
-        </p:nvSpPr>
-        <p:spPr>
-          <a:xfrm>
-            <a:off x="634901" y="1182588"/>
-            <a:ext cx="8102798" cy="1668363"/>
-          </a:xfrm>
-          <a:prstGeom prst="rect">
-            <a:avLst/>
-          </a:prstGeom>
-          <a:noFill/>
-          <a:ln/>
-        </p:spPr>
-        <p:txBody>
-          <a:bodyPr wrap="square" lIns="0" tIns="0" rIns="0" bIns="0" rtlCol="0" anchor="t"/>
-          <a:lstStyle/>
-          <a:p>
             <a:pPr algn="l" marL="342900" indent="-342900">
               <a:lnSpc>
                 <a:spcPts val="1620"/>
@@ -4404,7 +8714,47 @@
                 <a:ea typeface="Arial" pitchFamily="34" charset="-122"/>
                 <a:cs typeface="Arial" pitchFamily="34" charset="-120"/>
               </a:rPr>
-              <a:t>Receive the activity sheet (with two unfinished diagrams — Sun in one position, Earth in another, Moon's orbit drawn around Earth).</a:t>
+              <a:t>Daily prompt: </a:t>
+            </a:r>
+            <a:pPr algn="l" indent="0" marL="0">
+              <a:lnSpc>
+                <a:spcPts val="1620"/>
+              </a:lnSpc>
+              <a:spcAft>
+                <a:spcPts val="300"/>
+              </a:spcAft>
+              <a:buNone/>
+            </a:pPr>
+            <a:r>
+              <a:rPr lang="en-US" sz="1200" i="1" dirty="0">
+                <a:solidFill>
+                  <a:srgbClr val="1C2833"/>
+                </a:solidFill>
+                <a:latin typeface="Arial" pitchFamily="34" charset="0"/>
+                <a:ea typeface="Arial" pitchFamily="34" charset="-122"/>
+                <a:cs typeface="Arial" pitchFamily="34" charset="-120"/>
+              </a:rPr>
+              <a:t>"Did you see the Moon last night? What tithi?"</a:t>
+            </a:r>
+            <a:pPr algn="l" indent="0" marL="0">
+              <a:lnSpc>
+                <a:spcPts val="1620"/>
+              </a:lnSpc>
+              <a:spcAft>
+                <a:spcPts val="300"/>
+              </a:spcAft>
+              <a:buNone/>
+            </a:pPr>
+            <a:r>
+              <a:rPr lang="en-US" sz="1200" dirty="0">
+                <a:solidFill>
+                  <a:srgbClr val="1C2833"/>
+                </a:solidFill>
+                <a:latin typeface="Arial" pitchFamily="34" charset="0"/>
+                <a:ea typeface="Arial" pitchFamily="34" charset="-122"/>
+                <a:cs typeface="Arial" pitchFamily="34" charset="-120"/>
+              </a:rPr>
+              <a:t> — 2 students share.</a:t>
             </a:r>
             <a:endParaRPr lang="en-US" sz="1200" dirty="0"/>
           </a:p>
@@ -4420,115 +8770,23 @@
               <a:buChar char="•"/>
             </a:pPr>
             <a:r>
-              <a:rPr lang="en-US" sz="1200" dirty="0">
-                <a:solidFill>
-                  <a:srgbClr val="1C2833"/>
-                </a:solidFill>
-                <a:latin typeface="Arial" pitchFamily="34" charset="0"/>
-                <a:ea typeface="Arial" pitchFamily="34" charset="-122"/>
-                <a:cs typeface="Arial" pitchFamily="34" charset="-120"/>
-              </a:rPr>
-              <a:t>Place the Moon (a sticker or a drawn circle) at the eclipse positions: between Sun and Earth (solar) and opposite (lunar).</a:t>
+              <a:rPr lang="en-US" sz="1200" i="1" dirty="0">
+                <a:solidFill>
+                  <a:srgbClr val="1C2833"/>
+                </a:solidFill>
+                <a:latin typeface="Arial" pitchFamily="34" charset="0"/>
+                <a:ea typeface="Arial" pitchFamily="34" charset="-122"/>
+                <a:cs typeface="Arial" pitchFamily="34" charset="-120"/>
+              </a:rPr>
+              <a:t>"You have a Moon diary now. Has any night's Moon been completely covered by Earth's shadow? Probably not. Why not? That's today."</a:t>
             </a:r>
             <a:endParaRPr lang="en-US" sz="1200" dirty="0"/>
           </a:p>
-          <a:p>
-            <a:pPr algn="l" marL="342900" indent="-342900">
-              <a:lnSpc>
-                <a:spcPts val="1620"/>
-              </a:lnSpc>
-              <a:spcAft>
-                <a:spcPts val="300"/>
-              </a:spcAft>
-              <a:buSzPct val="100000"/>
-              <a:buChar char="•"/>
-            </a:pPr>
-            <a:r>
-              <a:rPr lang="en-US" sz="1200" dirty="0">
-                <a:solidFill>
-                  <a:srgbClr val="1C2833"/>
-                </a:solidFill>
-                <a:latin typeface="Arial" pitchFamily="34" charset="0"/>
-                <a:ea typeface="Arial" pitchFamily="34" charset="-122"/>
-                <a:cs typeface="Arial" pitchFamily="34" charset="-120"/>
-              </a:rPr>
-              <a:t>Draw the shadow cones.</a:t>
-            </a:r>
-            <a:endParaRPr lang="en-US" sz="1200" dirty="0"/>
-          </a:p>
-          <a:p>
-            <a:pPr algn="l" marL="342900" indent="-342900">
-              <a:lnSpc>
-                <a:spcPts val="1620"/>
-              </a:lnSpc>
-              <a:spcAft>
-                <a:spcPts val="300"/>
-              </a:spcAft>
-              <a:buSzPct val="100000"/>
-              <a:buChar char="•"/>
-            </a:pPr>
-            <a:r>
-              <a:rPr lang="en-US" sz="1200" dirty="0">
-                <a:solidFill>
-                  <a:srgbClr val="1C2833"/>
-                </a:solidFill>
-                <a:latin typeface="Arial" pitchFamily="34" charset="0"/>
-                <a:ea typeface="Arial" pitchFamily="34" charset="-122"/>
-                <a:cs typeface="Arial" pitchFamily="34" charset="-120"/>
-              </a:rPr>
-              <a:t>Mark the two nodes on the Moon's orbit and shade the regions where an eclipse is possible.</a:t>
-            </a:r>
-            <a:endParaRPr lang="en-US" sz="1200" dirty="0"/>
-          </a:p>
-          <a:p>
-            <a:pPr algn="l" marL="342900" indent="-342900">
-              <a:lnSpc>
-                <a:spcPts val="1620"/>
-              </a:lnSpc>
-              <a:spcAft>
-                <a:spcPts val="300"/>
-              </a:spcAft>
-              <a:buSzPct val="100000"/>
-              <a:buChar char="•"/>
-            </a:pPr>
-            <a:r>
-              <a:rPr lang="en-US" sz="1200" dirty="0">
-                <a:solidFill>
-                  <a:srgbClr val="1C2833"/>
-                </a:solidFill>
-                <a:latin typeface="Arial" pitchFamily="34" charset="0"/>
-                <a:ea typeface="Arial" pitchFamily="34" charset="-122"/>
-                <a:cs typeface="Arial" pitchFamily="34" charset="-120"/>
-              </a:rPr>
-              <a:t>Below the diagram, in 3 sentences, explain: </a:t>
-            </a:r>
-            <a:pPr algn="l" indent="0" marL="0">
-              <a:lnSpc>
-                <a:spcPts val="1620"/>
-              </a:lnSpc>
-              <a:spcAft>
-                <a:spcPts val="300"/>
-              </a:spcAft>
-              <a:buNone/>
-            </a:pPr>
-            <a:r>
-              <a:rPr lang="en-US" sz="1200" i="1" dirty="0">
-                <a:solidFill>
-                  <a:srgbClr val="1C2833"/>
-                </a:solidFill>
-                <a:latin typeface="Arial" pitchFamily="34" charset="0"/>
-                <a:ea typeface="Arial" pitchFamily="34" charset="-122"/>
-                <a:cs typeface="Arial" pitchFamily="34" charset="-120"/>
-              </a:rPr>
-              <a:t>why does an eclipse not happen every amāvasyā / pūrṇimā?</a:t>
-            </a:r>
-            <a:endParaRPr lang="en-US" sz="1200" dirty="0"/>
-          </a:p>
-        </p:txBody>
-      </p:sp>
-      <p:sp>
-        <p:nvSpPr>
-          <p:cNvPr id="6" name="Text 4"/>
+        </p:txBody>
+      </p:sp>
+      <p:sp>
+        <p:nvSpPr>
+          <p:cNvPr id="5" name="Text 3"/>
           <p:cNvSpPr/>
           <p:nvPr/>
         </p:nvSpPr>
@@ -4678,7 +8936,7 @@
                 <a:ea typeface="Georgia" pitchFamily="34" charset="-122"/>
                 <a:cs typeface="Georgia" pitchFamily="34" charset="-120"/>
               </a:rPr>
-              <a:t>Wrap-up (5 min)</a:t>
+              <a:t>Core (25 min)</a:t>
             </a:r>
             <a:endParaRPr lang="en-US" sz="1800" dirty="0"/>
           </a:p>
@@ -4693,7 +8951,7 @@
         <p:spPr>
           <a:xfrm>
             <a:off x="406301" y="870942"/>
-            <a:ext cx="8498026" cy="426541"/>
+            <a:ext cx="8498026" cy="213271"/>
           </a:xfrm>
           <a:prstGeom prst="rect">
             <a:avLst/>
@@ -4718,6 +8976,29 @@
               <a:buNone/>
             </a:pPr>
             <a:r>
+              <a:rPr lang="en-US" sz="1200" b="1" dirty="0">
+                <a:solidFill>
+                  <a:srgbClr val="1C2833"/>
+                </a:solidFill>
+                <a:latin typeface="Arial" pitchFamily="34" charset="0"/>
+                <a:ea typeface="Arial" pitchFamily="34" charset="-122"/>
+                <a:cs typeface="Arial" pitchFamily="34" charset="-120"/>
+              </a:rPr>
+              <a:t>Safety first (2 min, before anything else).</a:t>
+            </a:r>
+            <a:pPr algn="l" indent="0" marL="0">
+              <a:lnSpc>
+                <a:spcPts val="1680"/>
+              </a:lnSpc>
+              <a:spcBef>
+                <a:spcPts val="300"/>
+              </a:spcBef>
+              <a:spcAft>
+                <a:spcPts val="300"/>
+              </a:spcAft>
+              <a:buNone/>
+            </a:pPr>
+            <a:r>
               <a:rPr lang="en-US" sz="1200" dirty="0">
                 <a:solidFill>
                   <a:srgbClr val="1C2833"/>
@@ -4726,99 +9007,7 @@
                 <a:ea typeface="Arial" pitchFamily="34" charset="-122"/>
                 <a:cs typeface="Arial" pitchFamily="34" charset="-120"/>
               </a:rPr>
-              <a:t>– Read the safety rule aloud as a class. Once more. – Ask: </a:t>
-            </a:r>
-            <a:pPr algn="l" indent="0" marL="0">
-              <a:lnSpc>
-                <a:spcPts val="1680"/>
-              </a:lnSpc>
-              <a:spcBef>
-                <a:spcPts val="300"/>
-              </a:spcBef>
-              <a:spcAft>
-                <a:spcPts val="300"/>
-              </a:spcAft>
-              <a:buNone/>
-            </a:pPr>
-            <a:r>
-              <a:rPr lang="en-US" sz="1200" i="1" dirty="0">
-                <a:solidFill>
-                  <a:srgbClr val="1C2833"/>
-                </a:solidFill>
-                <a:latin typeface="Arial" pitchFamily="34" charset="0"/>
-                <a:ea typeface="Arial" pitchFamily="34" charset="-122"/>
-                <a:cs typeface="Arial" pitchFamily="34" charset="-120"/>
-              </a:rPr>
-              <a:t>"What's the safest way to watch a solar eclipse?"</a:t>
-            </a:r>
-            <a:pPr algn="l" indent="0" marL="0">
-              <a:lnSpc>
-                <a:spcPts val="1680"/>
-              </a:lnSpc>
-              <a:spcBef>
-                <a:spcPts val="300"/>
-              </a:spcBef>
-              <a:spcAft>
-                <a:spcPts val="300"/>
-              </a:spcAft>
-              <a:buNone/>
-            </a:pPr>
-            <a:r>
-              <a:rPr lang="en-US" sz="1200" dirty="0">
-                <a:solidFill>
-                  <a:srgbClr val="1C2833"/>
-                </a:solidFill>
-                <a:latin typeface="Arial" pitchFamily="34" charset="0"/>
-                <a:ea typeface="Arial" pitchFamily="34" charset="-122"/>
-                <a:cs typeface="Arial" pitchFamily="34" charset="-120"/>
-              </a:rPr>
-              <a:t> (Eclipse glasses with ISO certification; or pinhole projection.) </a:t>
-            </a:r>
-            <a:pPr algn="l" indent="0" marL="0">
-              <a:lnSpc>
-                <a:spcPts val="1680"/>
-              </a:lnSpc>
-              <a:spcBef>
-                <a:spcPts val="300"/>
-              </a:spcBef>
-              <a:spcAft>
-                <a:spcPts val="300"/>
-              </a:spcAft>
-              <a:buNone/>
-            </a:pPr>
-            <a:r>
-              <a:rPr lang="en-US" sz="1200" i="1" dirty="0">
-                <a:solidFill>
-                  <a:srgbClr val="1C2833"/>
-                </a:solidFill>
-                <a:latin typeface="Arial" pitchFamily="34" charset="0"/>
-                <a:ea typeface="Arial" pitchFamily="34" charset="-122"/>
-                <a:cs typeface="Arial" pitchFamily="34" charset="-120"/>
-              </a:rPr>
-              <a:t>"What about a lunar eclipse?"</a:t>
-            </a:r>
-            <a:pPr algn="l" indent="0" marL="0">
-              <a:lnSpc>
-                <a:spcPts val="1680"/>
-              </a:lnSpc>
-              <a:spcBef>
-                <a:spcPts val="300"/>
-              </a:spcBef>
-              <a:spcAft>
-                <a:spcPts val="300"/>
-              </a:spcAft>
-              <a:buNone/>
-            </a:pPr>
-            <a:r>
-              <a:rPr lang="en-US" sz="1200" dirty="0">
-                <a:solidFill>
-                  <a:srgbClr val="1C2833"/>
-                </a:solidFill>
-                <a:latin typeface="Arial" pitchFamily="34" charset="0"/>
-                <a:ea typeface="Arial" pitchFamily="34" charset="-122"/>
-                <a:cs typeface="Arial" pitchFamily="34" charset="-120"/>
-              </a:rPr>
-              <a:t> (Look directly — no danger.)</a:t>
+              <a:t> Write on the board in capitals:</a:t>
             </a:r>
             <a:endParaRPr lang="en-US" sz="1200" dirty="0"/>
           </a:p>
@@ -4832,8 +9021,61 @@
         </p:nvSpPr>
         <p:spPr>
           <a:xfrm>
-            <a:off x="634901" y="1386334"/>
-            <a:ext cx="8102798" cy="281880"/>
+            <a:off x="406301" y="1173063"/>
+            <a:ext cx="8331398" cy="842963"/>
+          </a:xfrm>
+          <a:prstGeom prst="rect">
+            <a:avLst/>
+          </a:prstGeom>
+          <a:solidFill>
+            <a:srgbClr val="F4F8F9"/>
+          </a:solidFill>
+          <a:ln/>
+        </p:spPr>
+        <p:txBody>
+          <a:bodyPr wrap="square" rtlCol="0" anchor="ctr"/>
+          <a:lstStyle/>
+          <a:p>
+            <a:pPr indent="0" marL="0">
+              <a:buNone/>
+            </a:pPr>
+            <a:endParaRPr lang="en-US" dirty="0"/>
+          </a:p>
+        </p:txBody>
+      </p:sp>
+      <p:sp>
+        <p:nvSpPr>
+          <p:cNvPr id="6" name="Shape 4"/>
+          <p:cNvSpPr/>
+          <p:nvPr/>
+        </p:nvSpPr>
+        <p:spPr>
+          <a:xfrm>
+            <a:off x="434876" y="1173063"/>
+            <a:ext cx="0" cy="842963"/>
+          </a:xfrm>
+          <a:prstGeom prst="line">
+            <a:avLst/>
+          </a:prstGeom>
+          <a:noFill/>
+          <a:ln w="57150">
+            <a:solidFill>
+              <a:srgbClr val="FE4447"/>
+            </a:solidFill>
+            <a:prstDash val="solid"/>
+          </a:ln>
+        </p:spPr>
+      </p:sp>
+      <p:sp>
+        <p:nvSpPr>
+          <p:cNvPr id="7" name="Text 5"/>
+          <p:cNvSpPr/>
+          <p:nvPr/>
+        </p:nvSpPr>
+        <p:spPr>
+          <a:xfrm>
+            <a:off x="692051" y="1363563"/>
+            <a:ext cx="7973389" cy="461963"/>
           </a:xfrm>
           <a:prstGeom prst="rect">
             <a:avLst/>
@@ -4845,31 +9087,61 @@
           <a:bodyPr wrap="square" lIns="0" tIns="0" rIns="0" bIns="0" rtlCol="0" anchor="t"/>
           <a:lstStyle/>
           <a:p>
-            <a:pPr algn="l" marL="342900" indent="-342900">
-              <a:lnSpc>
-                <a:spcPts val="1620"/>
-              </a:lnSpc>
-              <a:spcAft>
-                <a:spcPts val="300"/>
-              </a:spcAft>
-              <a:buSzPct val="100000"/>
-              <a:buChar char="•"/>
-            </a:pPr>
-            <a:r>
-              <a:rPr lang="en-US" sz="1200" b="1" dirty="0">
-                <a:solidFill>
-                  <a:srgbClr val="1C2833"/>
-                </a:solidFill>
-                <a:latin typeface="Arial" pitchFamily="34" charset="0"/>
-                <a:ea typeface="Arial" pitchFamily="34" charset="-122"/>
-                <a:cs typeface="Arial" pitchFamily="34" charset="-120"/>
-              </a:rPr>
-              <a:t>Preview Day 8:</a:t>
-            </a:r>
-            <a:pPr algn="l" indent="0" marL="0">
-              <a:lnSpc>
-                <a:spcPts val="1620"/>
-              </a:lnSpc>
+            <a:pPr algn="l" indent="0" marL="0">
+              <a:lnSpc>
+                <a:spcPts val="1820"/>
+              </a:lnSpc>
+              <a:spcBef>
+                <a:spcPts val="300"/>
+              </a:spcBef>
+              <a:spcAft>
+                <a:spcPts val="300"/>
+              </a:spcAft>
+              <a:buNone/>
+            </a:pPr>
+            <a:r>
+              <a:rPr lang="en-US" sz="1300" b="1" i="1" dirty="0">
+                <a:solidFill>
+                  <a:srgbClr val="1C2833"/>
+                </a:solidFill>
+                <a:latin typeface="Georgia" pitchFamily="34" charset="0"/>
+                <a:ea typeface="Georgia" pitchFamily="34" charset="-122"/>
+                <a:cs typeface="Georgia" pitchFamily="34" charset="-120"/>
+              </a:rPr>
+              <a:t>NEVER LOOK DIRECTLY AT A SOLAR ECLIPSE. Ordinary sunglasses do not protect your eyes. You need ISO 12312-2 certified eclipse glasses, or use pinhole projection.</a:t>
+            </a:r>
+            <a:endParaRPr lang="en-US" sz="1300" dirty="0"/>
+          </a:p>
+        </p:txBody>
+      </p:sp>
+      <p:sp>
+        <p:nvSpPr>
+          <p:cNvPr id="8" name="Text 6"/>
+          <p:cNvSpPr/>
+          <p:nvPr/>
+        </p:nvSpPr>
+        <p:spPr>
+          <a:xfrm>
+            <a:off x="406301" y="2104876"/>
+            <a:ext cx="8498026" cy="213271"/>
+          </a:xfrm>
+          <a:prstGeom prst="rect">
+            <a:avLst/>
+          </a:prstGeom>
+          <a:noFill/>
+          <a:ln/>
+        </p:spPr>
+        <p:txBody>
+          <a:bodyPr wrap="square" lIns="0" tIns="0" rIns="0" bIns="0" rtlCol="0" anchor="t"/>
+          <a:lstStyle/>
+          <a:p>
+            <a:pPr algn="l" indent="0" marL="0">
+              <a:lnSpc>
+                <a:spcPts val="1680"/>
+              </a:lnSpc>
+              <a:spcBef>
+                <a:spcPts val="300"/>
+              </a:spcBef>
               <a:spcAft>
                 <a:spcPts val="300"/>
               </a:spcAft>
@@ -4884,27 +9156,7 @@
                 <a:ea typeface="Arial" pitchFamily="34" charset="-122"/>
                 <a:cs typeface="Arial" pitchFamily="34" charset="-120"/>
               </a:rPr>
-              <a:t> </a:t>
-            </a:r>
-            <a:pPr algn="l" indent="0" marL="0">
-              <a:lnSpc>
-                <a:spcPts val="1620"/>
-              </a:lnSpc>
-              <a:spcAft>
-                <a:spcPts val="300"/>
-              </a:spcAft>
-              <a:buNone/>
-            </a:pPr>
-            <a:r>
-              <a:rPr lang="en-US" sz="1200" i="1" dirty="0">
-                <a:solidFill>
-                  <a:srgbClr val="1C2833"/>
-                </a:solidFill>
-                <a:latin typeface="Arial" pitchFamily="34" charset="0"/>
-                <a:ea typeface="Arial" pitchFamily="34" charset="-122"/>
-                <a:cs typeface="Arial" pitchFamily="34" charset="-120"/>
-              </a:rPr>
-              <a:t>"Tomorrow you start your project."</a:t>
+              <a:t>Every student copies this into their workbook. We will revisit at end of class.</a:t>
             </a:r>
             <a:endParaRPr lang="en-US" sz="1200" dirty="0"/>
           </a:p>
@@ -4912,7 +9164,7 @@
       </p:sp>
       <p:sp>
         <p:nvSpPr>
-          <p:cNvPr id="6" name="Text 4"/>
+          <p:cNvPr id="9" name="Text 7"/>
           <p:cNvSpPr/>
           <p:nvPr/>
         </p:nvSpPr>
@@ -5062,7 +9314,7 @@
                 <a:ea typeface="Georgia" pitchFamily="34" charset="-122"/>
                 <a:cs typeface="Georgia" pitchFamily="34" charset="-120"/>
               </a:rPr>
-              <a:t>Student-facing content</a:t>
+              <a:t>Core (25 min) (cont.)</a:t>
             </a:r>
             <a:endParaRPr lang="en-US" sz="1800" dirty="0"/>
           </a:p>
@@ -5076,61 +9328,54 @@
         </p:nvSpPr>
         <p:spPr>
           <a:xfrm>
-            <a:off x="406301" y="883593"/>
-            <a:ext cx="8331398" cy="3036094"/>
-          </a:xfrm>
-          <a:prstGeom prst="rect">
-            <a:avLst/>
-          </a:prstGeom>
-          <a:solidFill>
-            <a:srgbClr val="F4F8F9"/>
-          </a:solidFill>
+            <a:off x="634901" y="883593"/>
+            <a:ext cx="8102798" cy="281880"/>
+          </a:xfrm>
+          <a:prstGeom prst="rect">
+            <a:avLst/>
+          </a:prstGeom>
+          <a:noFill/>
           <a:ln/>
         </p:spPr>
         <p:txBody>
-          <a:bodyPr wrap="square" rtlCol="0" anchor="ctr"/>
-          <a:lstStyle/>
-          <a:p>
-            <a:pPr indent="0" marL="0">
-              <a:buNone/>
-            </a:pPr>
-            <a:endParaRPr lang="en-US" dirty="0"/>
-          </a:p>
-        </p:txBody>
-      </p:sp>
-      <p:sp>
-        <p:nvSpPr>
-          <p:cNvPr id="5" name="Shape 3"/>
+          <a:bodyPr wrap="square" lIns="0" tIns="0" rIns="0" bIns="0" rtlCol="0" anchor="t"/>
+          <a:lstStyle/>
+          <a:p>
+            <a:pPr algn="l" marL="342900" indent="-342900">
+              <a:lnSpc>
+                <a:spcPts val="1620"/>
+              </a:lnSpc>
+              <a:spcAft>
+                <a:spcPts val="300"/>
+              </a:spcAft>
+              <a:buSzPct val="100000"/>
+              <a:buChar char="•"/>
+            </a:pPr>
+            <a:r>
+              <a:rPr lang="en-US" sz="1200" b="1" dirty="0">
+                <a:solidFill>
+                  <a:srgbClr val="1C2833"/>
+                </a:solidFill>
+                <a:latin typeface="Arial" pitchFamily="34" charset="0"/>
+                <a:ea typeface="Arial" pitchFamily="34" charset="-122"/>
+                <a:cs typeface="Arial" pitchFamily="34" charset="-120"/>
+              </a:rPr>
+              <a:t>The basic geometry — three bodies in a line.</a:t>
+            </a:r>
+            <a:endParaRPr lang="en-US" sz="1200" dirty="0"/>
+          </a:p>
+        </p:txBody>
+      </p:sp>
+      <p:sp>
+        <p:nvSpPr>
+          <p:cNvPr id="5" name="Text 3"/>
           <p:cNvSpPr/>
           <p:nvPr/>
         </p:nvSpPr>
         <p:spPr>
           <a:xfrm>
-            <a:off x="434876" y="883593"/>
-            <a:ext cx="0" cy="3036094"/>
-          </a:xfrm>
-          <a:prstGeom prst="line">
-            <a:avLst/>
-          </a:prstGeom>
-          <a:noFill/>
-          <a:ln w="57150">
-            <a:solidFill>
-              <a:srgbClr val="FE4447"/>
-            </a:solidFill>
-            <a:prstDash val="solid"/>
-          </a:ln>
-        </p:spPr>
-      </p:sp>
-      <p:sp>
-        <p:nvSpPr>
-          <p:cNvPr id="6" name="Text 4"/>
-          <p:cNvSpPr/>
-          <p:nvPr/>
-        </p:nvSpPr>
-        <p:spPr>
-          <a:xfrm>
-            <a:off x="692051" y="1074093"/>
-            <a:ext cx="7973389" cy="461963"/>
+            <a:off x="406301" y="1254323"/>
+            <a:ext cx="8498026" cy="426541"/>
           </a:xfrm>
           <a:prstGeom prst="rect">
             <a:avLst/>
@@ -5144,7 +9389,7 @@
           <a:p>
             <a:pPr algn="l" indent="0" marL="0">
               <a:lnSpc>
-                <a:spcPts val="1820"/>
+                <a:spcPts val="1680"/>
               </a:lnSpc>
               <a:spcBef>
                 <a:spcPts val="300"/>
@@ -5155,466 +9400,23 @@
               <a:buNone/>
             </a:pPr>
             <a:r>
-              <a:rPr lang="en-US" sz="1300" b="1" i="1" dirty="0">
-                <a:solidFill>
-                  <a:srgbClr val="1C2833"/>
-                </a:solidFill>
-                <a:latin typeface="Georgia" pitchFamily="34" charset="0"/>
-                <a:ea typeface="Georgia" pitchFamily="34" charset="-122"/>
-                <a:cs typeface="Georgia" pitchFamily="34" charset="-120"/>
-              </a:rPr>
-              <a:t>Solar eclipse:</a:t>
-            </a:r>
-            <a:pPr algn="l" indent="0" marL="0">
-              <a:lnSpc>
-                <a:spcPts val="1820"/>
-              </a:lnSpc>
-              <a:spcBef>
-                <a:spcPts val="300"/>
-              </a:spcBef>
-              <a:spcAft>
-                <a:spcPts val="300"/>
-              </a:spcAft>
-              <a:buNone/>
-            </a:pPr>
-            <a:r>
-              <a:rPr lang="en-US" sz="1300" dirty="0">
-                <a:solidFill>
-                  <a:srgbClr val="1C2833"/>
-                </a:solidFill>
-                <a:latin typeface="Georgia" pitchFamily="34" charset="0"/>
-                <a:ea typeface="Georgia" pitchFamily="34" charset="-122"/>
-                <a:cs typeface="Georgia" pitchFamily="34" charset="-120"/>
-              </a:rPr>
-              <a:t> Sun, Moon, Earth in line (Moon in middle). Happens on </a:t>
-            </a:r>
-            <a:pPr algn="l" indent="0" marL="0">
-              <a:lnSpc>
-                <a:spcPts val="1820"/>
-              </a:lnSpc>
-              <a:spcBef>
-                <a:spcPts val="300"/>
-              </a:spcBef>
-              <a:spcAft>
-                <a:spcPts val="300"/>
-              </a:spcAft>
-              <a:buNone/>
-            </a:pPr>
-            <a:r>
-              <a:rPr lang="en-US" sz="1300" i="1" dirty="0">
-                <a:solidFill>
-                  <a:srgbClr val="1C2833"/>
-                </a:solidFill>
-                <a:latin typeface="Georgia" pitchFamily="34" charset="0"/>
-                <a:ea typeface="Georgia" pitchFamily="34" charset="-122"/>
-                <a:cs typeface="Georgia" pitchFamily="34" charset="-120"/>
-              </a:rPr>
-              <a:t>amāvasyā</a:t>
-            </a:r>
-            <a:pPr algn="l" indent="0" marL="0">
-              <a:lnSpc>
-                <a:spcPts val="1820"/>
-              </a:lnSpc>
-              <a:spcBef>
-                <a:spcPts val="300"/>
-              </a:spcBef>
-              <a:spcAft>
-                <a:spcPts val="300"/>
-              </a:spcAft>
-              <a:buNone/>
-            </a:pPr>
-            <a:r>
-              <a:rPr lang="en-US" sz="1300" dirty="0">
-                <a:solidFill>
-                  <a:srgbClr val="1C2833"/>
-                </a:solidFill>
-                <a:latin typeface="Georgia" pitchFamily="34" charset="0"/>
-                <a:ea typeface="Georgia" pitchFamily="34" charset="-122"/>
-                <a:cs typeface="Georgia" pitchFamily="34" charset="-120"/>
-              </a:rPr>
-              <a:t>. Moon's shadow falls on Earth.</a:t>
-            </a:r>
-            <a:endParaRPr lang="en-US" sz="1300" dirty="0"/>
-          </a:p>
-        </p:txBody>
-      </p:sp>
-      <p:sp>
-        <p:nvSpPr>
-          <p:cNvPr id="7" name="Text 5"/>
-          <p:cNvSpPr/>
-          <p:nvPr/>
-        </p:nvSpPr>
-        <p:spPr>
-          <a:xfrm>
-            <a:off x="692051" y="1574155"/>
-            <a:ext cx="7973389" cy="461963"/>
-          </a:xfrm>
-          <a:prstGeom prst="rect">
-            <a:avLst/>
-          </a:prstGeom>
-          <a:noFill/>
-          <a:ln/>
-        </p:spPr>
-        <p:txBody>
-          <a:bodyPr wrap="square" lIns="0" tIns="0" rIns="0" bIns="0" rtlCol="0" anchor="t"/>
-          <a:lstStyle/>
-          <a:p>
-            <a:pPr algn="l" indent="0" marL="0">
-              <a:lnSpc>
-                <a:spcPts val="1820"/>
-              </a:lnSpc>
-              <a:spcBef>
-                <a:spcPts val="300"/>
-              </a:spcBef>
-              <a:spcAft>
-                <a:spcPts val="300"/>
-              </a:spcAft>
-              <a:buNone/>
-            </a:pPr>
-            <a:r>
-              <a:rPr lang="en-US" sz="1300" b="1" i="1" dirty="0">
-                <a:solidFill>
-                  <a:srgbClr val="1C2833"/>
-                </a:solidFill>
-                <a:latin typeface="Georgia" pitchFamily="34" charset="0"/>
-                <a:ea typeface="Georgia" pitchFamily="34" charset="-122"/>
-                <a:cs typeface="Georgia" pitchFamily="34" charset="-120"/>
-              </a:rPr>
-              <a:t>Lunar eclipse:</a:t>
-            </a:r>
-            <a:pPr algn="l" indent="0" marL="0">
-              <a:lnSpc>
-                <a:spcPts val="1820"/>
-              </a:lnSpc>
-              <a:spcBef>
-                <a:spcPts val="300"/>
-              </a:spcBef>
-              <a:spcAft>
-                <a:spcPts val="300"/>
-              </a:spcAft>
-              <a:buNone/>
-            </a:pPr>
-            <a:r>
-              <a:rPr lang="en-US" sz="1300" dirty="0">
-                <a:solidFill>
-                  <a:srgbClr val="1C2833"/>
-                </a:solidFill>
-                <a:latin typeface="Georgia" pitchFamily="34" charset="0"/>
-                <a:ea typeface="Georgia" pitchFamily="34" charset="-122"/>
-                <a:cs typeface="Georgia" pitchFamily="34" charset="-120"/>
-              </a:rPr>
-              <a:t> Sun, Earth, Moon in line (Earth in middle). Happens on </a:t>
-            </a:r>
-            <a:pPr algn="l" indent="0" marL="0">
-              <a:lnSpc>
-                <a:spcPts val="1820"/>
-              </a:lnSpc>
-              <a:spcBef>
-                <a:spcPts val="300"/>
-              </a:spcBef>
-              <a:spcAft>
-                <a:spcPts val="300"/>
-              </a:spcAft>
-              <a:buNone/>
-            </a:pPr>
-            <a:r>
-              <a:rPr lang="en-US" sz="1300" i="1" dirty="0">
-                <a:solidFill>
-                  <a:srgbClr val="1C2833"/>
-                </a:solidFill>
-                <a:latin typeface="Georgia" pitchFamily="34" charset="0"/>
-                <a:ea typeface="Georgia" pitchFamily="34" charset="-122"/>
-                <a:cs typeface="Georgia" pitchFamily="34" charset="-120"/>
-              </a:rPr>
-              <a:t>pūrṇimā</a:t>
-            </a:r>
-            <a:pPr algn="l" indent="0" marL="0">
-              <a:lnSpc>
-                <a:spcPts val="1820"/>
-              </a:lnSpc>
-              <a:spcBef>
-                <a:spcPts val="300"/>
-              </a:spcBef>
-              <a:spcAft>
-                <a:spcPts val="300"/>
-              </a:spcAft>
-              <a:buNone/>
-            </a:pPr>
-            <a:r>
-              <a:rPr lang="en-US" sz="1300" dirty="0">
-                <a:solidFill>
-                  <a:srgbClr val="1C2833"/>
-                </a:solidFill>
-                <a:latin typeface="Georgia" pitchFamily="34" charset="0"/>
-                <a:ea typeface="Georgia" pitchFamily="34" charset="-122"/>
-                <a:cs typeface="Georgia" pitchFamily="34" charset="-120"/>
-              </a:rPr>
-              <a:t>. Earth's shadow falls on Moon.</a:t>
-            </a:r>
-            <a:endParaRPr lang="en-US" sz="1300" dirty="0"/>
-          </a:p>
-        </p:txBody>
-      </p:sp>
-      <p:sp>
-        <p:nvSpPr>
-          <p:cNvPr id="8" name="Text 6"/>
-          <p:cNvSpPr/>
-          <p:nvPr/>
-        </p:nvSpPr>
-        <p:spPr>
-          <a:xfrm>
-            <a:off x="692051" y="2074218"/>
-            <a:ext cx="7973389" cy="923925"/>
-          </a:xfrm>
-          <a:prstGeom prst="rect">
-            <a:avLst/>
-          </a:prstGeom>
-          <a:noFill/>
-          <a:ln/>
-        </p:spPr>
-        <p:txBody>
-          <a:bodyPr wrap="square" lIns="0" tIns="0" rIns="0" bIns="0" rtlCol="0" anchor="t"/>
-          <a:lstStyle/>
-          <a:p>
-            <a:pPr algn="l" indent="0" marL="0">
-              <a:lnSpc>
-                <a:spcPts val="1820"/>
-              </a:lnSpc>
-              <a:spcBef>
-                <a:spcPts val="300"/>
-              </a:spcBef>
-              <a:spcAft>
-                <a:spcPts val="300"/>
-              </a:spcAft>
-              <a:buNone/>
-            </a:pPr>
-            <a:r>
-              <a:rPr lang="en-US" sz="1300" b="1" i="1" dirty="0">
-                <a:solidFill>
-                  <a:srgbClr val="1C2833"/>
-                </a:solidFill>
-                <a:latin typeface="Georgia" pitchFamily="34" charset="0"/>
-                <a:ea typeface="Georgia" pitchFamily="34" charset="-122"/>
-                <a:cs typeface="Georgia" pitchFamily="34" charset="-120"/>
-              </a:rPr>
-              <a:t>Why not every month?</a:t>
-            </a:r>
-            <a:pPr algn="l" indent="0" marL="0">
-              <a:lnSpc>
-                <a:spcPts val="1820"/>
-              </a:lnSpc>
-              <a:spcBef>
-                <a:spcPts val="300"/>
-              </a:spcBef>
-              <a:spcAft>
-                <a:spcPts val="300"/>
-              </a:spcAft>
-              <a:buNone/>
-            </a:pPr>
-            <a:r>
-              <a:rPr lang="en-US" sz="1300" dirty="0">
-                <a:solidFill>
-                  <a:srgbClr val="1C2833"/>
-                </a:solidFill>
-                <a:latin typeface="Georgia" pitchFamily="34" charset="0"/>
-                <a:ea typeface="Georgia" pitchFamily="34" charset="-122"/>
-                <a:cs typeface="Georgia" pitchFamily="34" charset="-120"/>
-              </a:rPr>
-              <a:t> The Moon's orbit is tilted ~5° from Earth's orbit around the Sun. So usually the Moon's shadow misses Earth (at amāvasyā) or Earth's shadow misses the Moon (at pūrṇimā). Eclipses happen only when the Moon is </a:t>
-            </a:r>
-            <a:pPr algn="l" indent="0" marL="0">
-              <a:lnSpc>
-                <a:spcPts val="1820"/>
-              </a:lnSpc>
-              <a:spcBef>
-                <a:spcPts val="300"/>
-              </a:spcBef>
-              <a:spcAft>
-                <a:spcPts val="300"/>
-              </a:spcAft>
-              <a:buNone/>
-            </a:pPr>
-            <a:r>
-              <a:rPr lang="en-US" sz="1300" i="1" dirty="0">
-                <a:solidFill>
-                  <a:srgbClr val="1C2833"/>
-                </a:solidFill>
-                <a:latin typeface="Georgia" pitchFamily="34" charset="0"/>
-                <a:ea typeface="Georgia" pitchFamily="34" charset="-122"/>
-                <a:cs typeface="Georgia" pitchFamily="34" charset="-120"/>
-              </a:rPr>
-              <a:t>both</a:t>
-            </a:r>
-            <a:pPr algn="l" indent="0" marL="0">
-              <a:lnSpc>
-                <a:spcPts val="1820"/>
-              </a:lnSpc>
-              <a:spcBef>
-                <a:spcPts val="300"/>
-              </a:spcBef>
-              <a:spcAft>
-                <a:spcPts val="300"/>
-              </a:spcAft>
-              <a:buNone/>
-            </a:pPr>
-            <a:r>
-              <a:rPr lang="en-US" sz="1300" dirty="0">
-                <a:solidFill>
-                  <a:srgbClr val="1C2833"/>
-                </a:solidFill>
-                <a:latin typeface="Georgia" pitchFamily="34" charset="0"/>
-                <a:ea typeface="Georgia" pitchFamily="34" charset="-122"/>
-                <a:cs typeface="Georgia" pitchFamily="34" charset="-120"/>
-              </a:rPr>
-              <a:t> at amāvasyā/pūrṇimā </a:t>
-            </a:r>
-            <a:pPr algn="l" indent="0" marL="0">
-              <a:lnSpc>
-                <a:spcPts val="1820"/>
-              </a:lnSpc>
-              <a:spcBef>
-                <a:spcPts val="300"/>
-              </a:spcBef>
-              <a:spcAft>
-                <a:spcPts val="300"/>
-              </a:spcAft>
-              <a:buNone/>
-            </a:pPr>
-            <a:r>
-              <a:rPr lang="en-US" sz="1300" i="1" dirty="0">
-                <a:solidFill>
-                  <a:srgbClr val="1C2833"/>
-                </a:solidFill>
-                <a:latin typeface="Georgia" pitchFamily="34" charset="0"/>
-                <a:ea typeface="Georgia" pitchFamily="34" charset="-122"/>
-                <a:cs typeface="Georgia" pitchFamily="34" charset="-120"/>
-              </a:rPr>
-              <a:t>and</a:t>
-            </a:r>
-            <a:pPr algn="l" indent="0" marL="0">
-              <a:lnSpc>
-                <a:spcPts val="1820"/>
-              </a:lnSpc>
-              <a:spcBef>
-                <a:spcPts val="300"/>
-              </a:spcBef>
-              <a:spcAft>
-                <a:spcPts val="300"/>
-              </a:spcAft>
-              <a:buNone/>
-            </a:pPr>
-            <a:r>
-              <a:rPr lang="en-US" sz="1300" dirty="0">
-                <a:solidFill>
-                  <a:srgbClr val="1C2833"/>
-                </a:solidFill>
-                <a:latin typeface="Georgia" pitchFamily="34" charset="0"/>
-                <a:ea typeface="Georgia" pitchFamily="34" charset="-122"/>
-                <a:cs typeface="Georgia" pitchFamily="34" charset="-120"/>
-              </a:rPr>
-              <a:t> close to one of the two nodes (where the two orbital planes cross).</a:t>
-            </a:r>
-            <a:endParaRPr lang="en-US" sz="1300" dirty="0"/>
-          </a:p>
-        </p:txBody>
-      </p:sp>
-      <p:sp>
-        <p:nvSpPr>
-          <p:cNvPr id="9" name="Text 7"/>
-          <p:cNvSpPr/>
-          <p:nvPr/>
-        </p:nvSpPr>
-        <p:spPr>
-          <a:xfrm>
-            <a:off x="692051" y="3036243"/>
-            <a:ext cx="7973389" cy="692944"/>
-          </a:xfrm>
-          <a:prstGeom prst="rect">
-            <a:avLst/>
-          </a:prstGeom>
-          <a:noFill/>
-          <a:ln/>
-        </p:spPr>
-        <p:txBody>
-          <a:bodyPr wrap="square" lIns="0" tIns="0" rIns="0" bIns="0" rtlCol="0" anchor="t"/>
-          <a:lstStyle/>
-          <a:p>
-            <a:pPr algn="l" indent="0" marL="0">
-              <a:lnSpc>
-                <a:spcPts val="1820"/>
-              </a:lnSpc>
-              <a:spcBef>
-                <a:spcPts val="300"/>
-              </a:spcBef>
-              <a:spcAft>
-                <a:spcPts val="300"/>
-              </a:spcAft>
-              <a:buNone/>
-            </a:pPr>
-            <a:r>
-              <a:rPr lang="en-US" sz="1300" dirty="0">
-                <a:solidFill>
-                  <a:srgbClr val="1C2833"/>
-                </a:solidFill>
-                <a:latin typeface="Georgia" pitchFamily="34" charset="0"/>
-                <a:ea typeface="Georgia" pitchFamily="34" charset="-122"/>
-                <a:cs typeface="Georgia" pitchFamily="34" charset="-120"/>
-              </a:rPr>
-              <a:t>⚠️ </a:t>
-            </a:r>
-            <a:pPr algn="l" indent="0" marL="0">
-              <a:lnSpc>
-                <a:spcPts val="1820"/>
-              </a:lnSpc>
-              <a:spcBef>
-                <a:spcPts val="300"/>
-              </a:spcBef>
-              <a:spcAft>
-                <a:spcPts val="300"/>
-              </a:spcAft>
-              <a:buNone/>
-            </a:pPr>
-            <a:r>
-              <a:rPr lang="en-US" sz="1300" b="1" i="1" dirty="0">
-                <a:solidFill>
-                  <a:srgbClr val="1C2833"/>
-                </a:solidFill>
-                <a:latin typeface="Georgia" pitchFamily="34" charset="0"/>
-                <a:ea typeface="Georgia" pitchFamily="34" charset="-122"/>
-                <a:cs typeface="Georgia" pitchFamily="34" charset="-120"/>
-              </a:rPr>
-              <a:t>NEVER look directly at a solar eclipse.</a:t>
-            </a:r>
-            <a:pPr algn="l" indent="0" marL="0">
-              <a:lnSpc>
-                <a:spcPts val="1820"/>
-              </a:lnSpc>
-              <a:spcBef>
-                <a:spcPts val="300"/>
-              </a:spcBef>
-              <a:spcAft>
-                <a:spcPts val="300"/>
-              </a:spcAft>
-              <a:buNone/>
-            </a:pPr>
-            <a:r>
-              <a:rPr lang="en-US" sz="1300" dirty="0">
-                <a:solidFill>
-                  <a:srgbClr val="1C2833"/>
-                </a:solidFill>
-                <a:latin typeface="Georgia" pitchFamily="34" charset="0"/>
-                <a:ea typeface="Georgia" pitchFamily="34" charset="-122"/>
-                <a:cs typeface="Georgia" pitchFamily="34" charset="-120"/>
-              </a:rPr>
-              <a:t> Use ISO 12312-2 certified eclipse glasses, or project the Sun through a pinhole onto paper. Sunglasses, smoked glass, photographic film do not work. Lunar eclipses are safe to view directly.</a:t>
-            </a:r>
-            <a:endParaRPr lang="en-US" sz="1300" dirty="0"/>
-          </a:p>
-        </p:txBody>
-      </p:sp>
-      <p:sp>
-        <p:nvSpPr>
-          <p:cNvPr id="10" name="Text 8"/>
+              <a:rPr lang="en-US" sz="1200" dirty="0">
+                <a:solidFill>
+                  <a:srgbClr val="1C2833"/>
+                </a:solidFill>
+                <a:latin typeface="Arial" pitchFamily="34" charset="0"/>
+                <a:ea typeface="Arial" pitchFamily="34" charset="-122"/>
+                <a:cs typeface="Arial" pitchFamily="34" charset="-120"/>
+              </a:rPr>
+              <a:t>Set up the demo: torch (Sun) on one side, white ball (Earth) in middle, dark ball (Moon) on the other side. Show the two configurations:</a:t>
+            </a:r>
+            <a:endParaRPr lang="en-US" sz="1200" dirty="0"/>
+          </a:p>
+        </p:txBody>
+      </p:sp>
+      <p:sp>
+        <p:nvSpPr>
+          <p:cNvPr id="6" name="Text 4"/>
           <p:cNvSpPr/>
           <p:nvPr/>
         </p:nvSpPr>
@@ -5764,7 +9566,7 @@
                 <a:ea typeface="Georgia" pitchFamily="34" charset="-122"/>
                 <a:cs typeface="Georgia" pitchFamily="34" charset="-120"/>
               </a:rPr>
-              <a:t>Homework</a:t>
+              <a:t>Core (25 min) (cont.)</a:t>
             </a:r>
             <a:endParaRPr lang="en-US" sz="1800" dirty="0"/>
           </a:p>
@@ -5778,8 +9580,8 @@
         </p:nvSpPr>
         <p:spPr>
           <a:xfrm>
-            <a:off x="406301" y="870942"/>
-            <a:ext cx="8498026" cy="426541"/>
+            <a:off x="634901" y="883593"/>
+            <a:ext cx="8102798" cy="937022"/>
           </a:xfrm>
           <a:prstGeom prst="rect">
             <a:avLst/>
@@ -5791,13 +9593,31 @@
           <a:bodyPr wrap="square" lIns="0" tIns="0" rIns="0" bIns="0" rtlCol="0" anchor="t"/>
           <a:lstStyle/>
           <a:p>
-            <a:pPr algn="l" indent="0" marL="0">
-              <a:lnSpc>
-                <a:spcPts val="1680"/>
-              </a:lnSpc>
-              <a:spcBef>
-                <a:spcPts val="300"/>
-              </a:spcBef>
+            <a:pPr algn="l" marL="342900" indent="-342900">
+              <a:lnSpc>
+                <a:spcPts val="1620"/>
+              </a:lnSpc>
+              <a:spcAft>
+                <a:spcPts val="300"/>
+              </a:spcAft>
+              <a:buSzPct val="100000"/>
+              <a:buChar char="•"/>
+            </a:pPr>
+            <a:r>
+              <a:rPr lang="en-US" sz="1200" b="1" dirty="0">
+                <a:solidFill>
+                  <a:srgbClr val="1C2833"/>
+                </a:solidFill>
+                <a:latin typeface="Arial" pitchFamily="34" charset="0"/>
+                <a:ea typeface="Arial" pitchFamily="34" charset="-122"/>
+                <a:cs typeface="Arial" pitchFamily="34" charset="-120"/>
+              </a:rPr>
+              <a:t>Solar eclipse:</a:t>
+            </a:r>
+            <a:pPr algn="l" indent="0" marL="0">
+              <a:lnSpc>
+                <a:spcPts val="1620"/>
+              </a:lnSpc>
               <a:spcAft>
                 <a:spcPts val="300"/>
               </a:spcAft>
@@ -5812,15 +9632,185 @@
                 <a:ea typeface="Arial" pitchFamily="34" charset="-122"/>
                 <a:cs typeface="Arial" pitchFamily="34" charset="-120"/>
               </a:rPr>
-              <a:t>– Continue the Moon diary. – Look up: what is the date of the next solar eclipse and the next lunar eclipse visible from India? Note in your workbook.</a:t>
+              <a:t> Sun — Moon — Earth (in that order). Moon casts a shadow on Earth. This can ONLY happen on </a:t>
+            </a:r>
+            <a:pPr algn="l" indent="0" marL="0">
+              <a:lnSpc>
+                <a:spcPts val="1620"/>
+              </a:lnSpc>
+              <a:spcAft>
+                <a:spcPts val="300"/>
+              </a:spcAft>
+              <a:buNone/>
+            </a:pPr>
+            <a:r>
+              <a:rPr lang="en-US" sz="1200" i="1" dirty="0">
+                <a:solidFill>
+                  <a:srgbClr val="1C2833"/>
+                </a:solidFill>
+                <a:latin typeface="Arial" pitchFamily="34" charset="0"/>
+                <a:ea typeface="Arial" pitchFamily="34" charset="-122"/>
+                <a:cs typeface="Arial" pitchFamily="34" charset="-120"/>
+              </a:rPr>
+              <a:t>amāvasyā</a:t>
+            </a:r>
+            <a:pPr algn="l" indent="0" marL="0">
+              <a:lnSpc>
+                <a:spcPts val="1620"/>
+              </a:lnSpc>
+              <a:spcAft>
+                <a:spcPts val="300"/>
+              </a:spcAft>
+              <a:buNone/>
+            </a:pPr>
+            <a:r>
+              <a:rPr lang="en-US" sz="1200" dirty="0">
+                <a:solidFill>
+                  <a:srgbClr val="1C2833"/>
+                </a:solidFill>
+                <a:latin typeface="Arial" pitchFamily="34" charset="0"/>
+                <a:ea typeface="Arial" pitchFamily="34" charset="-122"/>
+                <a:cs typeface="Arial" pitchFamily="34" charset="-120"/>
+              </a:rPr>
+              <a:t> (because that's the only time the Moon is between Sun and Earth).</a:t>
             </a:r>
             <a:endParaRPr lang="en-US" sz="1200" dirty="0"/>
           </a:p>
+          <a:p>
+            <a:pPr algn="l" marL="342900" indent="-342900">
+              <a:lnSpc>
+                <a:spcPts val="1620"/>
+              </a:lnSpc>
+              <a:spcAft>
+                <a:spcPts val="300"/>
+              </a:spcAft>
+              <a:buSzPct val="100000"/>
+              <a:buChar char="•"/>
+            </a:pPr>
+            <a:r>
+              <a:rPr lang="en-US" sz="1200" b="1" dirty="0">
+                <a:solidFill>
+                  <a:srgbClr val="1C2833"/>
+                </a:solidFill>
+                <a:latin typeface="Arial" pitchFamily="34" charset="0"/>
+                <a:ea typeface="Arial" pitchFamily="34" charset="-122"/>
+                <a:cs typeface="Arial" pitchFamily="34" charset="-120"/>
+              </a:rPr>
+              <a:t>Lunar eclipse:</a:t>
+            </a:r>
+            <a:pPr algn="l" indent="0" marL="0">
+              <a:lnSpc>
+                <a:spcPts val="1620"/>
+              </a:lnSpc>
+              <a:spcAft>
+                <a:spcPts val="300"/>
+              </a:spcAft>
+              <a:buNone/>
+            </a:pPr>
+            <a:r>
+              <a:rPr lang="en-US" sz="1200" dirty="0">
+                <a:solidFill>
+                  <a:srgbClr val="1C2833"/>
+                </a:solidFill>
+                <a:latin typeface="Arial" pitchFamily="34" charset="0"/>
+                <a:ea typeface="Arial" pitchFamily="34" charset="-122"/>
+                <a:cs typeface="Arial" pitchFamily="34" charset="-120"/>
+              </a:rPr>
+              <a:t> Sun — Earth — Moon. Earth casts a shadow on Moon. This can ONLY happen on </a:t>
+            </a:r>
+            <a:pPr algn="l" indent="0" marL="0">
+              <a:lnSpc>
+                <a:spcPts val="1620"/>
+              </a:lnSpc>
+              <a:spcAft>
+                <a:spcPts val="300"/>
+              </a:spcAft>
+              <a:buNone/>
+            </a:pPr>
+            <a:r>
+              <a:rPr lang="en-US" sz="1200" i="1" dirty="0">
+                <a:solidFill>
+                  <a:srgbClr val="1C2833"/>
+                </a:solidFill>
+                <a:latin typeface="Arial" pitchFamily="34" charset="0"/>
+                <a:ea typeface="Arial" pitchFamily="34" charset="-122"/>
+                <a:cs typeface="Arial" pitchFamily="34" charset="-120"/>
+              </a:rPr>
+              <a:t>pūrṇimā</a:t>
+            </a:r>
+            <a:pPr algn="l" indent="0" marL="0">
+              <a:lnSpc>
+                <a:spcPts val="1620"/>
+              </a:lnSpc>
+              <a:spcAft>
+                <a:spcPts val="300"/>
+              </a:spcAft>
+              <a:buNone/>
+            </a:pPr>
+            <a:r>
+              <a:rPr lang="en-US" sz="1200" dirty="0">
+                <a:solidFill>
+                  <a:srgbClr val="1C2833"/>
+                </a:solidFill>
+                <a:latin typeface="Arial" pitchFamily="34" charset="0"/>
+                <a:ea typeface="Arial" pitchFamily="34" charset="-122"/>
+                <a:cs typeface="Arial" pitchFamily="34" charset="-120"/>
+              </a:rPr>
+              <a:t> (because that's the only time the Moon is opposite the Sun).</a:t>
+            </a:r>
+            <a:endParaRPr lang="en-US" sz="1200" dirty="0"/>
+          </a:p>
         </p:txBody>
       </p:sp>
       <p:sp>
         <p:nvSpPr>
           <p:cNvPr id="5" name="Text 3"/>
+          <p:cNvSpPr/>
+          <p:nvPr/>
+        </p:nvSpPr>
+        <p:spPr>
+          <a:xfrm>
+            <a:off x="634901" y="1922115"/>
+            <a:ext cx="8102798" cy="281880"/>
+          </a:xfrm>
+          <a:prstGeom prst="rect">
+            <a:avLst/>
+          </a:prstGeom>
+          <a:noFill/>
+          <a:ln/>
+        </p:spPr>
+        <p:txBody>
+          <a:bodyPr wrap="square" lIns="0" tIns="0" rIns="0" bIns="0" rtlCol="0" anchor="t"/>
+          <a:lstStyle/>
+          <a:p>
+            <a:pPr algn="l" marL="342900" indent="-342900">
+              <a:lnSpc>
+                <a:spcPts val="1620"/>
+              </a:lnSpc>
+              <a:spcAft>
+                <a:spcPts val="300"/>
+              </a:spcAft>
+              <a:buSzPct val="100000"/>
+              <a:buChar char="•"/>
+            </a:pPr>
+            <a:r>
+              <a:rPr lang="en-US" sz="1200" b="1" dirty="0">
+                <a:solidFill>
+                  <a:srgbClr val="1C2833"/>
+                </a:solidFill>
+                <a:latin typeface="Arial" pitchFamily="34" charset="0"/>
+                <a:ea typeface="Arial" pitchFamily="34" charset="-122"/>
+                <a:cs typeface="Arial" pitchFamily="34" charset="-120"/>
+              </a:rPr>
+              <a:t>So why doesn't this happen every month?</a:t>
+            </a:r>
+            <a:endParaRPr lang="en-US" sz="1200" dirty="0"/>
+          </a:p>
+        </p:txBody>
+      </p:sp>
+      <p:sp>
+        <p:nvSpPr>
+          <p:cNvPr id="6" name="Text 4"/>
           <p:cNvSpPr/>
           <p:nvPr/>
         </p:nvSpPr>
